--- a/docs/教父世家-3分鐘簡報.pptx
+++ b/docs/教父世家-3分鐘簡報.pptx
@@ -516,7 +516,7 @@
           </a:p>
           <a:p>
             <a:r>
-              <a:t>唔係又一個點擊升級遊戲。你入去唔係一個數字，而係一間住喺青嵐山門嘅修仙世家。</a:t>
+              <a:t>唔係又一個點擊升級遊戲。你入去唔係一個數字，而係一間住喺教父山門嘅修仙世家。</a:t>
             </a:r>
           </a:p>
           <a:p>

--- a/docs/教父世家-3分鐘簡報.pptx
+++ b/docs/教父世家-3分鐘簡報.pptx
@@ -15,6 +15,7 @@
     <p:sldId id="263" r:id="rId15"/>
     <p:sldId id="264" r:id="rId16"/>
     <p:sldId id="265" r:id="rId17"/>
+    <p:sldId id="266" r:id="rId18"/>
   </p:sldIdLst>
   <p:sldSz cx="12191695" cy="6858000" type="screen4x3"/>
   <p:notesSz cx="6858000" cy="9144000"/>
@@ -511,32 +512,17 @@
           <a:lstStyle/>
           <a:p>
             <a:r>
-              <a:t>大家好。呢個係教父世家。</a:t>
-            </a:r>
-          </a:p>
-          <a:p>
-            <a:r>
-              <a:t>唔係又一個點擊升級遊戲。你入去唔係一個數字，而係一間住喺教父山門嘅修仙世家。</a:t>
-            </a:r>
-          </a:p>
-          <a:p>
-            <a:r>
-              <a:t>你係天道：睇住人長大、結緣、走火、身死道消；間中伸手改命。</a:t>
-            </a:r>
-          </a:p>
-          <a:p>
-            <a:r>
-              <a:t>而家就可以玩：yip-lgtm.github.io/family</a:t>
-            </a:r>
-          </a:p>
-          <a:p>
-            <a:r>
-              <a:t>源碼喺 github.com/yip-lgtm/family</a:t>
-            </a:r>
-          </a:p>
-          <a:p>
-            <a:r>
-              <a:t>今日三分鐘：做咩、點做出嚟、點玩。</a:t>
+              <a:t>大家好。呢個係教父世家。品牌印係「父」，英文 THE FAMILY。地圖標題：教父山門，GODFATHER GATE。</a:t>
+            </a:r>
+          </a:p>
+          <a:p>
+            <a:r>
+              <a:t>你唔係點擊農夫。你入去係一間修仙世家，你係天道：睇住人，間中伸手改命。</a:t>
+            </a:r>
+          </a:p>
+          <a:p>
+            <a:r>
+              <a:t>而家就可以玩：yip-lgtm.github.io/family。今日三分鐘：做咩、畫面點樣永遠有人、點做出嚟。</a:t>
             </a:r>
           </a:p>
         </p:txBody>
@@ -606,27 +592,92 @@
           <a:lstStyle/>
           <a:p>
             <a:r>
-              <a:t>收束。</a:t>
-            </a:r>
-          </a:p>
-          <a:p>
-            <a:r>
-              <a:t>教父世家想證明：放置遊戲可以係一場有人、有怨、有遺產嘅戲，而唔係一條升級曲線。</a:t>
-            </a:r>
-          </a:p>
-          <a:p>
-            <a:r>
-              <a:t>你係天道。少出手。睇住人。</a:t>
-            </a:r>
-          </a:p>
-          <a:p>
-            <a:r>
-              <a:t>連結再講一次：github.io/family 同 github.com/yip-lgtm/family。</a:t>
-            </a:r>
-          </a:p>
-          <a:p>
-            <a:r>
-              <a:t>多謝。歡迎而家一齊開。</a:t>
+              <a:t>四步，唔使註冊。打開 yip-lgtm.github.io/family，撳承天命。點沈清梧或者葉疏影——畫像即見。</a:t>
+            </a:r>
+          </a:p>
+          <a:p>
+            <a:r>
+              <a:t>開時間，等編劇組兩場。只用一次天道：賜福或者天劫，然後停手。</a:t>
+            </a:r>
+          </a:p>
+          <a:p>
+            <a:r>
+              <a:t>可選貼 OpenRouter Key，編劇同畫師就喺背景開工。冇 Key 一樣完整。</a:t>
+            </a:r>
+          </a:p>
+        </p:txBody>
+      </p:sp>
+      <p:sp>
+        <p:nvSpPr>
+          <p:cNvPr id="4" name="Slide Number Placeholder 3"/>
+          <p:cNvSpPr>
+            <a:spLocks noGrp="1"/>
+          </p:cNvSpPr>
+          <p:nvPr>
+            <p:ph type="sldNum" idx="5" sz="quarter"/>
+          </p:nvPr>
+        </p:nvSpPr>
+        <p:spPr/>
+      </p:sp>
+    </p:spTree>
+  </p:cSld>
+  <p:clrMapOvr>
+    <a:masterClrMapping/>
+  </p:clrMapOvr>
+</p:notes>
+</file>
+
+<file path=ppt/notesSlides/notesSlide11.xml><?xml version="1.0" encoding="utf-8"?>
+<p:notes xmlns:a="http://schemas.openxmlformats.org/drawingml/2006/main" xmlns:p="http://schemas.openxmlformats.org/presentationml/2006/main" xmlns:r="http://schemas.openxmlformats.org/officeDocument/2006/relationships">
+  <p:cSld>
+    <p:spTree>
+      <p:nvGrpSpPr>
+        <p:cNvPr id="1" name=""/>
+        <p:cNvGrpSpPr/>
+        <p:nvPr/>
+      </p:nvGrpSpPr>
+      <p:grpSpPr>
+        <a:xfrm>
+          <a:off x="0" y="0"/>
+          <a:ext cx="0" cy="0"/>
+          <a:chOff x="0" y="0"/>
+          <a:chExt cx="0" cy="0"/>
+        </a:xfrm>
+      </p:grpSpPr>
+      <p:sp>
+        <p:nvSpPr>
+          <p:cNvPr id="2" name="Slide Image Placeholder 1"/>
+          <p:cNvSpPr>
+            <a:spLocks noGrp="1"/>
+          </p:cNvSpPr>
+          <p:nvPr>
+            <p:ph type="sldImg" idx="2"/>
+          </p:nvPr>
+        </p:nvSpPr>
+        <p:spPr/>
+      </p:sp>
+      <p:sp>
+        <p:nvSpPr>
+          <p:cNvPr id="3" name="Notes Placeholder 2"/>
+          <p:cNvSpPr>
+            <a:spLocks noGrp="1"/>
+          </p:cNvSpPr>
+          <p:nvPr>
+            <p:ph type="body" idx="3" sz="quarter"/>
+          </p:nvPr>
+        </p:nvSpPr>
+        <p:spPr/>
+        <p:txBody>
+          <a:bodyPr/>
+          <a:lstStyle/>
+          <a:p>
+            <a:r>
+              <a:t>收束。放置遊戲可以係一場有人、有怨、有遺產嘅戲。你係天道。少出手。睇住人。畫面永遠有人。</a:t>
+            </a:r>
+          </a:p>
+          <a:p>
+            <a:r>
+              <a:t>人死功法在。家在，戲就未完。github.io/family。多謝。</a:t>
             </a:r>
           </a:p>
         </p:txBody>
@@ -696,22 +747,17 @@
           <a:lstStyle/>
           <a:p>
             <a:r>
-              <a:t>傳統放置遊戲：你係農夫，囤資源、買升級、睇數字。</a:t>
-            </a:r>
-          </a:p>
-          <a:p>
-            <a:r>
-              <a:t>教父世家唔係。畫面中間個靈樞可以聚氣，但真正玩法係右邊同下面：一班有根骨、心性、境界、壽元、心情、關係網嘅人。</a:t>
-            </a:r>
-          </a:p>
-          <a:p>
-            <a:r>
-              <a:t>你用業力賜福、降天劫、種心魔、或者指派去丹房藏經閣。</a:t>
-            </a:r>
-          </a:p>
-          <a:p>
-            <a:r>
-              <a:t>你少出手，山門自己過月。你出手，就係改命。</a:t>
+              <a:t>傳統放置：你係農夫，囤靈氣、買升級、睇數字。</a:t>
+            </a:r>
+          </a:p>
+          <a:p>
+            <a:r>
+              <a:t>教父世家唔係。靈樞可以聚氣，但真正玩法係一班有根骨、心性、關係網嘅人。</a:t>
+            </a:r>
+          </a:p>
+          <a:p>
+            <a:r>
+              <a:t>你用氣運賜福、天劫、心魔、指派。氣運唔夠就唔好亂改。少出手，山門自己過月。你出手，就係改命。</a:t>
             </a:r>
           </a:p>
         </p:txBody>
@@ -781,32 +827,17 @@
           <a:lstStyle/>
           <a:p>
             <a:r>
-              <a:t>介面就係天道嘅工作台。</a:t>
-            </a:r>
-          </a:p>
-          <a:p>
-            <a:r>
-              <a:t>上面係曆法、靈氣、業力。時間可以停、可以快轉。</a:t>
-            </a:r>
-          </a:p>
-          <a:p>
-            <a:r>
-              <a:t>中間係山門地圖：人會自己去後山冒險、丹房煉丹、藏經閣讀書、雲市交易。</a:t>
-            </a:r>
-          </a:p>
-          <a:p>
-            <a:r>
-              <a:t>點一個人，睇根骨心性境界心事記憶。</a:t>
-            </a:r>
-          </a:p>
-          <a:p>
-            <a:r>
-              <a:t>天道三鍵好貴：賜福八業、天劫十二、心魔十、指派三。</a:t>
-            </a:r>
-          </a:p>
-          <a:p>
-            <a:r>
-              <a:t>左邊傳承：家訓、老祖突破、揀天賦。金丹同元嬰會金光一閃。</a:t>
+              <a:t>介面係天道工作台。上面曆法、氣運、人口。時間可停，可一倍、三倍、八倍。</a:t>
+            </a:r>
+          </a:p>
+          <a:p>
+            <a:r>
+              <a:t>中間地圖標題：教父山門，GODFATHER GATE。人會自己去後山、丹房、藏經閣、雲市。</a:t>
+            </a:r>
+          </a:p>
+          <a:p>
+            <a:r>
+              <a:t>天道四鍵好貴：賜福八、天劫十二、心魔十、指派三。開場畫像即見。老祖唔會死。</a:t>
             </a:r>
           </a:p>
         </p:txBody>
@@ -876,27 +907,17 @@
           <a:lstStyle/>
           <a:p>
             <a:r>
-              <a:t>開局六個人，全部寫咗性格，唔係隨機數。</a:t>
-            </a:r>
-          </a:p>
-          <a:p>
-            <a:r>
-              <a:t>青玄機鎮山門，金丹後期，壽元同普通人唔同，死唔到——因為冇老祖就冇世家。</a:t>
-            </a:r>
-          </a:p>
-          <a:p>
-            <a:r>
-              <a:t>沈清梧穩、顧家。葉疏影冷、準、同清梧有舊怨。白無塵外來、身世成謎。蒼小魚貪生識時務。嵐七七細、靈、成日問不該問嘅嘢。</a:t>
-            </a:r>
-          </a:p>
-          <a:p>
-            <a:r>
-              <a:t>每個月佢哋自己揀修煉、冒險、煉丹、讀書、交際、交易或者歇息。會生病、心魔、走火、身死。死咗，功法可以留低。</a:t>
-            </a:r>
-          </a:p>
-          <a:p>
-            <a:r>
-              <a:t>你招人，招嚟嘅係新角色，唔係再加一點 DPS。</a:t>
+              <a:t>開局六人，性格寫死，畫像已捆進遊戲，一開就見。</a:t>
+            </a:r>
+          </a:p>
+          <a:p>
+            <a:r>
+              <a:t>青玄機鎮山門，修《青嵐吐納訣》。沈清梧穩、顧家。葉疏影冷、同清梧有舊怨。白無塵外來。蒼小魚識時務。嵐七七成日問不該問嘅。</a:t>
+            </a:r>
+          </a:p>
+          <a:p>
+            <a:r>
+              <a:t>人會死。死咗，功法可以留低。</a:t>
             </a:r>
           </a:p>
         </p:txBody>
@@ -966,32 +987,17 @@
           <a:lstStyle/>
           <a:p>
             <a:r>
-              <a:t>呢度係產品最特別嘅一層：編劇組。</a:t>
-            </a:r>
-          </a:p>
-          <a:p>
-            <a:r>
-              <a:t>結構致敬《教父》三部曲：血色開端、雙生歲月、最後輓歌。致敬節奏同主題，唔抄對白，唔抄人名。</a:t>
-            </a:r>
-          </a:p>
-          <a:p>
-            <a:r>
-              <a:t>每兩個月自動一場戲，你亦可以撳下一場。</a:t>
-            </a:r>
-          </a:p>
-          <a:p>
-            <a:r>
-              <a:t>接咗 OpenRouter，預設免費路由。API Key 只存在你部瀏覽器，我哋伺服器唔存。</a:t>
-            </a:r>
-          </a:p>
-          <a:p>
-            <a:r>
-              <a:t>冇 Key 或者模型失敗，就用劇組代班——仍然有完整場面，遊戲唔會爛。</a:t>
-            </a:r>
-          </a:p>
-          <a:p>
-            <a:r>
-              <a:t>場戲會寫入角色心事同關係，所以下個月世界會唔同。</a:t>
+              <a:t>編劇組結構致敬《教父》三部曲：血色開端、雙生歲月、最後輓歌。致敬節奏，唔抄對白、唔抄人名。</a:t>
+            </a:r>
+          </a:p>
+          <a:p>
+            <a:r>
+              <a:t>每兩個月自動一場戲。文字預設 openrouter/free，Key 只存瀏覽器。有 Key，編劇背景無限連載，冷卻更短。</a:t>
+            </a:r>
+          </a:p>
+          <a:p>
+            <a:r>
+              <a:t>冇 Key：劇組代班，戲照拍，寫入心事同關係。</a:t>
             </a:r>
           </a:p>
         </p:txBody>
@@ -1061,22 +1067,17 @@
           <a:lstStyle/>
           <a:p>
             <a:r>
-              <a:t>美術全部 CSS 同 Canvas，無外部圖，載入快，GitHub Pages 穩。</a:t>
-            </a:r>
-          </a:p>
-          <a:p>
-            <a:r>
-              <a:t>音效用 Web Audio 合成木魚磬雷，唔使下載音檔。</a:t>
-            </a:r>
-          </a:p>
-          <a:p>
-            <a:r>
-              <a:t>背景音樂係嗶哩官方嵌入《中國風純音樂》，有牌有鏈接。右下角可縮成一條，唔擋地圖。</a:t>
-            </a:r>
-          </a:p>
-          <a:p>
-            <a:r>
-              <a:t>技術棧刻意薄：Vite、原生 JS。規則引擎同編劇組分開。npm run dev 或者直接開 Pages。</a:t>
+              <a:t>畫面最怕空白「插畫未成」。所以六人開場畫像同場次演示畫，全部捆進遊戲。</a:t>
+            </a:r>
+          </a:p>
+          <a:p>
+            <a:r>
+              <a:t>有 Key：編劇同畫師喺背景無限開工。畫師預設 google/gemini-2.5-flash-image，512 檔細圖，失敗靜默重試。</a:t>
+            </a:r>
+          </a:p>
+          <a:p>
+            <a:r>
+              <a:t>演示畫留住，LLM 畫好先換。模型設定可以關自動出圖。冇 Key 或者失敗：演示畫唔走。你永遠唔會睇住一個空框。</a:t>
             </a:r>
           </a:p>
         </p:txBody>
@@ -1146,32 +1147,12 @@
           <a:lstStyle/>
           <a:p>
             <a:r>
-              <a:t>製作唔係先畫皮。先問：玩家係邊個？答案係天道。</a:t>
-            </a:r>
-          </a:p>
-          <a:p>
-            <a:r>
-              <a:t>第二先寫規則引擎 world.js：每個月人自己揀去邊、會病、會走火、會死，業力先可以改命。</a:t>
-            </a:r>
-          </a:p>
-          <a:p>
-            <a:r>
-              <a:t>第三先有編劇組 screenplay.js：三幕致敬教父節奏，劇組代班保證冇 Key 都有戲。</a:t>
-            </a:r>
-          </a:p>
-          <a:p>
-            <a:r>
-              <a:t>第四先上金漆：CSS、Canvas、Web Audio、嗶哩官方嵌入。無外部圖，Pages 先載得快。</a:t>
-            </a:r>
-          </a:p>
-          <a:p>
-            <a:r>
-              <a:t>第五現場試：Vite 開 /family/，改完即睇。BGM 太大、文案唔順，呢一步先修。</a:t>
-            </a:r>
-          </a:p>
-          <a:p>
-            <a:r>
-              <a:t>第六出貨：npm run build，推 gh-pages，base 設 /family/，就係而家呢個站。</a:t>
+              <a:t>牌坊係 CSS 描金，印係「父」。演示畫打進倉庫，唔靠外鏈圖床。音效 Web Audio 合成木魚磬雷。</a:t>
+            </a:r>
+          </a:p>
+          <a:p>
+            <a:r>
+              <a:t>BGM 係嗶哩官方嵌入，唔下載、唔轉檔、唔盜鏈音源。技術棧：Vite 加原生 JS。</a:t>
             </a:r>
           </a:p>
         </p:txBody>
@@ -1241,27 +1222,12 @@
           <a:lstStyle/>
           <a:p>
             <a:r>
-              <a:t>工程刻意薄：六個檔，冇框架組件庫。</a:t>
-            </a:r>
-          </a:p>
-          <a:p>
-            <a:r>
-              <a:t>world 管規則，screenplay 管戲，main 管天道介面，style、fx、audio 管現場。</a:t>
-            </a:r>
-          </a:p>
-          <a:p>
-            <a:r>
-              <a:t>每日回路就係：改一條規則或者一句文案，開 Vite 睇，覺得山門仲似一間屋，先 commit。</a:t>
-            </a:r>
-          </a:p>
-          <a:p>
-            <a:r>
-              <a:t>出貨唔使後端：build 完推 gh-pages，base 係 /family/。</a:t>
-            </a:r>
-          </a:p>
-          <a:p>
-            <a:r>
-              <a:t>三條紅線：唔偷嗶哩音、唔抄教父對白、Key 唔上伺服器。劇組代班永遠兜底。</a:t>
+              <a:t>製作唔係先畫皮。六步：立意，玩家係天道。規則 world.js。編劇 screenplay.js，三幕加劇組代班；有 Key 就背景無限連載。</a:t>
+            </a:r>
+          </a:p>
+          <a:p>
+            <a:r>
+              <a:t>皮與聲：先捆六人同場次演示畫，再接 LLM 背景出圖。試玩 Vite 開 /family/。出貨 build 推 gh-pages，就係而家呢個站。</a:t>
             </a:r>
           </a:p>
         </p:txBody>
@@ -1331,32 +1297,17 @@
           <a:lstStyle/>
           <a:p>
             <a:r>
-              <a:t>示範四步。</a:t>
-            </a:r>
-          </a:p>
-          <a:p>
-            <a:r>
-              <a:t>一：打開 yip-lgtm.github.io/family ，撳承天命。</a:t>
-            </a:r>
-          </a:p>
-          <a:p>
-            <a:r>
-              <a:t>二：點一個角色，睇心事。建議先睇沈清梧同葉疏影——佢哋有舊怨，戲先有衝突。</a:t>
-            </a:r>
-          </a:p>
-          <a:p>
-            <a:r>
-              <a:t>三：開時間，等編劇組兩場。第一幕會寫權力同聯姻。</a:t>
-            </a:r>
-          </a:p>
-          <a:p>
-            <a:r>
-              <a:t>四：只用一次天道：賜福或者天劫。然後停手。好嘅天道唔係不停改，而係改完就睇。</a:t>
-            </a:r>
-          </a:p>
-          <a:p>
-            <a:r>
-              <a:t>可選：模型設定貼 OpenRouter Key，之後嘅戲會更貼近現場。冇 Key 一樣完整。</a:t>
+              <a:t>核心六個檔。world 規則，screenplay 戲，main 介面，style fx audio 現場。</a:t>
+            </a:r>
+          </a:p>
+          <a:p>
+            <a:r>
+              <a:t>畫面掛兩件：demoArt 捆演示畫，illustrate 背景出 512 檔圖，失敗靜默重試。</a:t>
+            </a:r>
+          </a:p>
+          <a:p>
+            <a:r>
+              <a:t>紅線：唔偷嗶哩音、唔抄教父對白、Key 唔上伺服器。演示畫永遠兜底。</a:t>
             </a:r>
           </a:p>
         </p:txBody>
@@ -4458,14 +4409,59 @@
       </p:sp>
       <p:sp>
         <p:nvSpPr>
-          <p:cNvPr id="4" name="TextBox 3"/>
+          <p:cNvPr id="4" name="Diamond 3"/>
+          <p:cNvSpPr/>
+          <p:nvPr/>
+        </p:nvSpPr>
+        <p:spPr>
+          <a:xfrm>
+            <a:off x="5696712" y="777240"/>
+            <a:ext cx="804672" cy="804672"/>
+          </a:xfrm>
+          <a:prstGeom prst="diamond">
+            <a:avLst/>
+          </a:prstGeom>
+          <a:solidFill>
+            <a:srgbClr val="16120C"/>
+          </a:solidFill>
+          <a:ln w="19050">
+            <a:solidFill>
+              <a:srgbClr val="D4AF37"/>
+            </a:solidFill>
+          </a:ln>
+        </p:spPr>
+        <p:style>
+          <a:lnRef idx="1">
+            <a:schemeClr val="accent1"/>
+          </a:lnRef>
+          <a:fillRef idx="3">
+            <a:schemeClr val="accent1"/>
+          </a:fillRef>
+          <a:effectRef idx="2">
+            <a:schemeClr val="accent1"/>
+          </a:effectRef>
+          <a:fontRef idx="minor">
+            <a:schemeClr val="lt1"/>
+          </a:fontRef>
+        </p:style>
+        <p:txBody>
+          <a:bodyPr rtlCol="0" anchor="ctr"/>
+          <a:lstStyle/>
+          <a:p>
+            <a:pPr algn="ctr"/>
+          </a:p>
+        </p:txBody>
+      </p:sp>
+      <p:sp>
+        <p:nvSpPr>
+          <p:cNvPr id="5" name="TextBox 4"/>
           <p:cNvSpPr txBox="1"/>
           <p:nvPr/>
         </p:nvSpPr>
         <p:spPr>
           <a:xfrm>
-            <a:off x="731520" y="1371600"/>
-            <a:ext cx="10515600" cy="457200"/>
+            <a:off x="5696712" y="1002548"/>
+            <a:ext cx="804672" cy="386242"/>
           </a:xfrm>
           <a:prstGeom prst="rect">
             <a:avLst/>
@@ -4484,28 +4480,28 @@
               </a:spcAft>
             </a:pPr>
             <a:r>
-              <a:rPr sz="1600" b="0">
+              <a:rPr sz="2200" b="1">
                 <a:solidFill>
                   <a:srgbClr val="D4AF37"/>
                 </a:solidFill>
                 <a:latin typeface="Microsoft YaHei"/>
                 <a:ea typeface="Microsoft YaHei"/>
               </a:rPr>
-              <a:t>蒼梧山 · 修仙家族史詩</a:t>
-            </a:r>
-          </a:p>
-        </p:txBody>
-      </p:sp>
-      <p:sp>
-        <p:nvSpPr>
-          <p:cNvPr id="5" name="TextBox 4"/>
+              <a:t>父</a:t>
+            </a:r>
+          </a:p>
+        </p:txBody>
+      </p:sp>
+      <p:sp>
+        <p:nvSpPr>
+          <p:cNvPr id="6" name="TextBox 5"/>
           <p:cNvSpPr txBox="1"/>
           <p:nvPr/>
         </p:nvSpPr>
         <p:spPr>
           <a:xfrm>
-            <a:off x="731520" y="1874519"/>
-            <a:ext cx="10515600" cy="1005840"/>
+            <a:off x="731520" y="1627632"/>
+            <a:ext cx="10698480" cy="365760"/>
           </a:xfrm>
           <a:prstGeom prst="rect">
             <a:avLst/>
@@ -4524,28 +4520,28 @@
               </a:spcAft>
             </a:pPr>
             <a:r>
-              <a:rPr sz="5400" b="1">
+              <a:rPr sz="1500" b="0">
                 <a:solidFill>
                   <a:srgbClr val="D4AF37"/>
                 </a:solidFill>
                 <a:latin typeface="Microsoft YaHei"/>
                 <a:ea typeface="Microsoft YaHei"/>
               </a:rPr>
-              <a:t>教父世家</a:t>
-            </a:r>
-          </a:p>
-        </p:txBody>
-      </p:sp>
-      <p:sp>
-        <p:nvSpPr>
-          <p:cNvPr id="6" name="TextBox 5"/>
+              <a:t>蒼梧山  ·  教父山門  ·  GODFATHER GATE</a:t>
+            </a:r>
+          </a:p>
+        </p:txBody>
+      </p:sp>
+      <p:sp>
+        <p:nvSpPr>
+          <p:cNvPr id="7" name="TextBox 6"/>
           <p:cNvSpPr txBox="1"/>
           <p:nvPr/>
         </p:nvSpPr>
         <p:spPr>
           <a:xfrm>
-            <a:off x="731520" y="2926080"/>
-            <a:ext cx="10515600" cy="640080"/>
+            <a:off x="731520" y="2029968"/>
+            <a:ext cx="10698480" cy="960120"/>
           </a:xfrm>
           <a:prstGeom prst="rect">
             <a:avLst/>
@@ -4564,28 +4560,28 @@
               </a:spcAft>
             </a:pPr>
             <a:r>
-              <a:rPr sz="2600" b="0">
-                <a:solidFill>
-                  <a:srgbClr val="F4E8C8"/>
-                </a:solidFill>
-                <a:latin typeface="Microsoft YaHei"/>
-                <a:ea typeface="Microsoft YaHei"/>
-              </a:rPr>
-              <a:t>你唔係點擊升級。你係天道。</a:t>
-            </a:r>
-          </a:p>
-        </p:txBody>
-      </p:sp>
-      <p:sp>
-        <p:nvSpPr>
-          <p:cNvPr id="7" name="TextBox 6"/>
+              <a:rPr sz="5400" b="1">
+                <a:solidFill>
+                  <a:srgbClr val="D4AF37"/>
+                </a:solidFill>
+                <a:latin typeface="Microsoft YaHei"/>
+                <a:ea typeface="Microsoft YaHei"/>
+              </a:rPr>
+              <a:t>教父世家</a:t>
+            </a:r>
+          </a:p>
+        </p:txBody>
+      </p:sp>
+      <p:sp>
+        <p:nvSpPr>
+          <p:cNvPr id="8" name="TextBox 7"/>
           <p:cNvSpPr txBox="1"/>
           <p:nvPr/>
         </p:nvSpPr>
         <p:spPr>
           <a:xfrm>
-            <a:off x="731520" y="3749039"/>
-            <a:ext cx="10515600" cy="1097280"/>
+            <a:off x="731520" y="2944368"/>
+            <a:ext cx="10698480" cy="365760"/>
           </a:xfrm>
           <a:prstGeom prst="rect">
             <a:avLst/>
@@ -4604,14 +4600,94 @@
               </a:spcAft>
             </a:pPr>
             <a:r>
-              <a:rPr sz="1600" b="0">
+              <a:rPr sz="1800" b="0">
                 <a:solidFill>
                   <a:srgbClr val="B8A888"/>
                 </a:solidFill>
                 <a:latin typeface="Microsoft YaHei"/>
                 <a:ea typeface="Microsoft YaHei"/>
               </a:rPr>
-              <a:t>約 3 分鐘  ·  含製作 workflow</a:t>
+              <a:t>THE FAMILY</a:t>
+            </a:r>
+          </a:p>
+        </p:txBody>
+      </p:sp>
+      <p:sp>
+        <p:nvSpPr>
+          <p:cNvPr id="9" name="TextBox 8"/>
+          <p:cNvSpPr txBox="1"/>
+          <p:nvPr/>
+        </p:nvSpPr>
+        <p:spPr>
+          <a:xfrm>
+            <a:off x="731520" y="3401568"/>
+            <a:ext cx="10698480" cy="548640"/>
+          </a:xfrm>
+          <a:prstGeom prst="rect">
+            <a:avLst/>
+          </a:prstGeom>
+          <a:noFill/>
+        </p:spPr>
+        <p:txBody>
+          <a:bodyPr wrap="square">
+            <a:spAutoFit/>
+          </a:bodyPr>
+          <a:lstStyle/>
+          <a:p>
+            <a:pPr algn="ctr">
+              <a:spcAft>
+                <a:spcPts val="600"/>
+              </a:spcAft>
+            </a:pPr>
+            <a:r>
+              <a:rPr sz="2600" b="0">
+                <a:solidFill>
+                  <a:srgbClr val="F4E8C8"/>
+                </a:solidFill>
+                <a:latin typeface="Microsoft YaHei"/>
+                <a:ea typeface="Microsoft YaHei"/>
+              </a:rPr>
+              <a:t>你唔係點擊升級。你係天道。</a:t>
+            </a:r>
+          </a:p>
+        </p:txBody>
+      </p:sp>
+      <p:sp>
+        <p:nvSpPr>
+          <p:cNvPr id="10" name="TextBox 9"/>
+          <p:cNvSpPr txBox="1"/>
+          <p:nvPr/>
+        </p:nvSpPr>
+        <p:spPr>
+          <a:xfrm>
+            <a:off x="731520" y="4160520"/>
+            <a:ext cx="10698480" cy="1554480"/>
+          </a:xfrm>
+          <a:prstGeom prst="rect">
+            <a:avLst/>
+          </a:prstGeom>
+          <a:noFill/>
+        </p:spPr>
+        <p:txBody>
+          <a:bodyPr wrap="square">
+            <a:spAutoFit/>
+          </a:bodyPr>
+          <a:lstStyle/>
+          <a:p>
+            <a:pPr algn="ctr">
+              <a:spcAft>
+                <a:spcPts val="600"/>
+              </a:spcAft>
+            </a:pPr>
+            <a:r>
+              <a:rPr sz="1500" b="0">
+                <a:solidFill>
+                  <a:srgbClr val="B8A888"/>
+                </a:solidFill>
+                <a:latin typeface="Microsoft YaHei"/>
+                <a:ea typeface="Microsoft YaHei"/>
+              </a:rPr>
+              <a:t>約 3 分鐘  ·  含製作 workflow  ·  演示畫先上</a:t>
             </a:r>
           </a:p>
           <a:p>
@@ -4770,8 +4846,8 @@
         </p:nvSpPr>
         <p:spPr>
           <a:xfrm>
-            <a:off x="731520" y="1234440"/>
-            <a:ext cx="10698480" cy="457200"/>
+            <a:off x="502920" y="6473952"/>
+            <a:ext cx="7498079" cy="256032"/>
           </a:xfrm>
           <a:prstGeom prst="rect">
             <a:avLst/>
@@ -4784,20 +4860,20 @@
           </a:bodyPr>
           <a:lstStyle/>
           <a:p>
-            <a:pPr algn="ctr">
-              <a:spcAft>
-                <a:spcPts val="600"/>
-              </a:spcAft>
-            </a:pPr>
-            <a:r>
-              <a:rPr sz="1400" b="0">
-                <a:solidFill>
-                  <a:srgbClr val="D4AF37"/>
-                </a:solidFill>
-                <a:latin typeface="Microsoft YaHei"/>
-                <a:ea typeface="Microsoft YaHei"/>
-              </a:rPr>
-              <a:t>結  ·  家訓</a:t>
+            <a:pPr algn="l">
+              <a:spcAft>
+                <a:spcPts val="600"/>
+              </a:spcAft>
+            </a:pPr>
+            <a:r>
+              <a:rPr sz="1100" b="0">
+                <a:solidFill>
+                  <a:srgbClr val="B8A888"/>
+                </a:solidFill>
+                <a:latin typeface="Microsoft YaHei"/>
+                <a:ea typeface="Microsoft YaHei"/>
+              </a:rPr>
+              <a:t>教父世家  ·  THE FAMILY</a:t>
             </a:r>
           </a:p>
         </p:txBody>
@@ -4810,8 +4886,8 @@
         </p:nvSpPr>
         <p:spPr>
           <a:xfrm>
-            <a:off x="731520" y="1737360"/>
-            <a:ext cx="10698480" cy="1280160"/>
+            <a:off x="9509760" y="6473952"/>
+            <a:ext cx="2103120" cy="256032"/>
           </a:xfrm>
           <a:prstGeom prst="rect">
             <a:avLst/>
@@ -4824,20 +4900,20 @@
           </a:bodyPr>
           <a:lstStyle/>
           <a:p>
-            <a:pPr algn="ctr">
-              <a:spcAft>
-                <a:spcPts val="600"/>
-              </a:spcAft>
-            </a:pPr>
-            <a:r>
-              <a:rPr sz="3200" b="1">
-                <a:solidFill>
-                  <a:srgbClr val="D4AF37"/>
-                </a:solidFill>
-                <a:latin typeface="Microsoft YaHei"/>
-                <a:ea typeface="Microsoft YaHei"/>
-              </a:rPr>
-              <a:t>人死功法在。家在，戲就未完。</a:t>
+            <a:pPr algn="r">
+              <a:spcAft>
+                <a:spcPts val="600"/>
+              </a:spcAft>
+            </a:pPr>
+            <a:r>
+              <a:rPr sz="1100" b="0">
+                <a:solidFill>
+                  <a:srgbClr val="B8A888"/>
+                </a:solidFill>
+                <a:latin typeface="Microsoft YaHei"/>
+                <a:ea typeface="Microsoft YaHei"/>
+              </a:rPr>
+              <a:t>10  /  11</a:t>
             </a:r>
           </a:p>
         </p:txBody>
@@ -4850,8 +4926,8 @@
         </p:nvSpPr>
         <p:spPr>
           <a:xfrm>
-            <a:off x="731520" y="3108960"/>
-            <a:ext cx="10698480" cy="1463040"/>
+            <a:off x="640080" y="237744"/>
+            <a:ext cx="10972800" cy="777240"/>
           </a:xfrm>
           <a:prstGeom prst="rect">
             <a:avLst/>
@@ -4864,68 +4940,96 @@
           </a:bodyPr>
           <a:lstStyle/>
           <a:p>
-            <a:pPr algn="ctr">
-              <a:spcAft>
-                <a:spcPts val="600"/>
-              </a:spcAft>
-            </a:pPr>
-            <a:r>
-              <a:rPr sz="2000" b="1">
-                <a:solidFill>
-                  <a:srgbClr val="7EC8C3"/>
-                </a:solidFill>
-                <a:latin typeface="Microsoft YaHei"/>
-                <a:ea typeface="Microsoft YaHei"/>
-              </a:rPr>
-              <a:t>玩　　https://yip-lgtm.github.io/family/</a:t>
-            </a:r>
-          </a:p>
-          <a:p>
-            <a:pPr algn="ctr">
-              <a:spcAft>
-                <a:spcPts val="600"/>
-              </a:spcAft>
-            </a:pPr>
-            <a:r>
-              <a:rPr sz="1800" b="0">
-                <a:solidFill>
-                  <a:srgbClr val="B8A888"/>
-                </a:solidFill>
-                <a:latin typeface="Microsoft YaHei"/>
-                <a:ea typeface="Microsoft YaHei"/>
-              </a:rPr>
-              <a:t>源碼　https://github.com/yip-lgtm/family.git</a:t>
-            </a:r>
-          </a:p>
-          <a:p>
-            <a:pPr algn="ctr">
-              <a:spcAft>
-                <a:spcPts val="600"/>
-              </a:spcAft>
-            </a:pPr>
-            <a:r>
-              <a:rPr sz="1600" b="0">
-                <a:solidFill>
-                  <a:srgbClr val="B8A888"/>
-                </a:solidFill>
-                <a:latin typeface="Microsoft YaHei"/>
-                <a:ea typeface="Microsoft YaHei"/>
-              </a:rPr>
-              <a:t>鏡像　https://github.com/yip-lgtm/qi-lineage</a:t>
-            </a:r>
-          </a:p>
-        </p:txBody>
-      </p:sp>
-      <p:sp>
-        <p:nvSpPr>
-          <p:cNvPr id="7" name="TextBox 6"/>
+            <a:pPr algn="l">
+              <a:spcAft>
+                <a:spcPts val="600"/>
+              </a:spcAft>
+            </a:pPr>
+            <a:r>
+              <a:rPr sz="1400" b="0">
+                <a:solidFill>
+                  <a:srgbClr val="D4AF37"/>
+                </a:solidFill>
+                <a:latin typeface="Microsoft YaHei"/>
+                <a:ea typeface="Microsoft YaHei"/>
+              </a:rPr>
+              <a:t>09  ·  而家點玩（三分鐘）</a:t>
+            </a:r>
+          </a:p>
+          <a:p>
+            <a:pPr algn="l">
+              <a:spcAft>
+                <a:spcPts val="600"/>
+              </a:spcAft>
+            </a:pPr>
+            <a:r>
+              <a:rPr sz="2800" b="1">
+                <a:solidFill>
+                  <a:srgbClr val="F4E8C8"/>
+                </a:solidFill>
+                <a:latin typeface="Microsoft YaHei"/>
+                <a:ea typeface="Microsoft YaHei"/>
+              </a:rPr>
+              <a:t>四步入局，唔使註冊</a:t>
+            </a:r>
+          </a:p>
+        </p:txBody>
+      </p:sp>
+      <p:sp>
+        <p:nvSpPr>
+          <p:cNvPr id="7" name="Rounded Rectangle 6"/>
+          <p:cNvSpPr/>
+          <p:nvPr/>
+        </p:nvSpPr>
+        <p:spPr>
+          <a:xfrm>
+            <a:off x="457200" y="1207008"/>
+            <a:ext cx="2743200" cy="4434840"/>
+          </a:xfrm>
+          <a:prstGeom prst="roundRect">
+            <a:avLst/>
+          </a:prstGeom>
+          <a:solidFill>
+            <a:srgbClr val="14100A"/>
+          </a:solidFill>
+          <a:ln w="15875">
+            <a:solidFill>
+              <a:srgbClr val="D4AF37"/>
+            </a:solidFill>
+          </a:ln>
+        </p:spPr>
+        <p:style>
+          <a:lnRef idx="1">
+            <a:schemeClr val="accent1"/>
+          </a:lnRef>
+          <a:fillRef idx="3">
+            <a:schemeClr val="accent1"/>
+          </a:fillRef>
+          <a:effectRef idx="2">
+            <a:schemeClr val="accent1"/>
+          </a:effectRef>
+          <a:fontRef idx="minor">
+            <a:schemeClr val="lt1"/>
+          </a:fontRef>
+        </p:style>
+        <p:txBody>
+          <a:bodyPr rtlCol="0" anchor="ctr"/>
+          <a:lstStyle/>
+          <a:p>
+            <a:pPr algn="ctr"/>
+          </a:p>
+        </p:txBody>
+      </p:sp>
+      <p:sp>
+        <p:nvSpPr>
+          <p:cNvPr id="8" name="TextBox 7"/>
           <p:cNvSpPr txBox="1"/>
           <p:nvPr/>
         </p:nvSpPr>
         <p:spPr>
           <a:xfrm>
-            <a:off x="731520" y="5029200"/>
-            <a:ext cx="10698480" cy="731520"/>
+            <a:off x="640080" y="1417320"/>
+            <a:ext cx="2377440" cy="640080"/>
           </a:xfrm>
           <a:prstGeom prst="rect">
             <a:avLst/>
@@ -4944,6 +5048,935 @@
               </a:spcAft>
             </a:pPr>
             <a:r>
+              <a:rPr sz="3600" b="1">
+                <a:solidFill>
+                  <a:srgbClr val="D4AF37"/>
+                </a:solidFill>
+                <a:latin typeface="Microsoft YaHei"/>
+                <a:ea typeface="Microsoft YaHei"/>
+              </a:rPr>
+              <a:t>1</a:t>
+            </a:r>
+          </a:p>
+        </p:txBody>
+      </p:sp>
+      <p:sp>
+        <p:nvSpPr>
+          <p:cNvPr id="9" name="TextBox 8"/>
+          <p:cNvSpPr txBox="1"/>
+          <p:nvPr/>
+        </p:nvSpPr>
+        <p:spPr>
+          <a:xfrm>
+            <a:off x="640080" y="2148840"/>
+            <a:ext cx="2377440" cy="594360"/>
+          </a:xfrm>
+          <a:prstGeom prst="rect">
+            <a:avLst/>
+          </a:prstGeom>
+          <a:noFill/>
+        </p:spPr>
+        <p:txBody>
+          <a:bodyPr wrap="square">
+            <a:spAutoFit/>
+          </a:bodyPr>
+          <a:lstStyle/>
+          <a:p>
+            <a:pPr algn="ctr">
+              <a:spcAft>
+                <a:spcPts val="600"/>
+              </a:spcAft>
+            </a:pPr>
+            <a:r>
+              <a:rPr sz="1800" b="1">
+                <a:solidFill>
+                  <a:srgbClr val="F4E8C8"/>
+                </a:solidFill>
+                <a:latin typeface="Microsoft YaHei"/>
+                <a:ea typeface="Microsoft YaHei"/>
+              </a:rPr>
+              <a:t>打開連結</a:t>
+            </a:r>
+          </a:p>
+        </p:txBody>
+      </p:sp>
+      <p:sp>
+        <p:nvSpPr>
+          <p:cNvPr id="10" name="TextBox 9"/>
+          <p:cNvSpPr txBox="1"/>
+          <p:nvPr/>
+        </p:nvSpPr>
+        <p:spPr>
+          <a:xfrm>
+            <a:off x="594360" y="2880360"/>
+            <a:ext cx="2468880" cy="2377440"/>
+          </a:xfrm>
+          <a:prstGeom prst="rect">
+            <a:avLst/>
+          </a:prstGeom>
+          <a:noFill/>
+        </p:spPr>
+        <p:txBody>
+          <a:bodyPr wrap="square">
+            <a:spAutoFit/>
+          </a:bodyPr>
+          <a:lstStyle/>
+          <a:p>
+            <a:pPr algn="ctr">
+              <a:spcAft>
+                <a:spcPts val="600"/>
+              </a:spcAft>
+            </a:pPr>
+            <a:r>
+              <a:rPr sz="1500" b="0">
+                <a:solidFill>
+                  <a:srgbClr val="B8A888"/>
+                </a:solidFill>
+                <a:latin typeface="Microsoft YaHei"/>
+                <a:ea typeface="Microsoft YaHei"/>
+              </a:rPr>
+              <a:t>yip-lgtm.github.io/family
+撳「承天命」。</a:t>
+            </a:r>
+          </a:p>
+        </p:txBody>
+      </p:sp>
+      <p:sp>
+        <p:nvSpPr>
+          <p:cNvPr id="11" name="Rounded Rectangle 10"/>
+          <p:cNvSpPr/>
+          <p:nvPr/>
+        </p:nvSpPr>
+        <p:spPr>
+          <a:xfrm>
+            <a:off x="3383280" y="1207008"/>
+            <a:ext cx="2743200" cy="4434840"/>
+          </a:xfrm>
+          <a:prstGeom prst="roundRect">
+            <a:avLst/>
+          </a:prstGeom>
+          <a:solidFill>
+            <a:srgbClr val="14100A"/>
+          </a:solidFill>
+          <a:ln w="15875">
+            <a:solidFill>
+              <a:srgbClr val="D4AF37"/>
+            </a:solidFill>
+          </a:ln>
+        </p:spPr>
+        <p:style>
+          <a:lnRef idx="1">
+            <a:schemeClr val="accent1"/>
+          </a:lnRef>
+          <a:fillRef idx="3">
+            <a:schemeClr val="accent1"/>
+          </a:fillRef>
+          <a:effectRef idx="2">
+            <a:schemeClr val="accent1"/>
+          </a:effectRef>
+          <a:fontRef idx="minor">
+            <a:schemeClr val="lt1"/>
+          </a:fontRef>
+        </p:style>
+        <p:txBody>
+          <a:bodyPr rtlCol="0" anchor="ctr"/>
+          <a:lstStyle/>
+          <a:p>
+            <a:pPr algn="ctr"/>
+          </a:p>
+        </p:txBody>
+      </p:sp>
+      <p:sp>
+        <p:nvSpPr>
+          <p:cNvPr id="12" name="TextBox 11"/>
+          <p:cNvSpPr txBox="1"/>
+          <p:nvPr/>
+        </p:nvSpPr>
+        <p:spPr>
+          <a:xfrm>
+            <a:off x="3566160" y="1417320"/>
+            <a:ext cx="2377440" cy="640080"/>
+          </a:xfrm>
+          <a:prstGeom prst="rect">
+            <a:avLst/>
+          </a:prstGeom>
+          <a:noFill/>
+        </p:spPr>
+        <p:txBody>
+          <a:bodyPr wrap="square">
+            <a:spAutoFit/>
+          </a:bodyPr>
+          <a:lstStyle/>
+          <a:p>
+            <a:pPr algn="ctr">
+              <a:spcAft>
+                <a:spcPts val="600"/>
+              </a:spcAft>
+            </a:pPr>
+            <a:r>
+              <a:rPr sz="3600" b="1">
+                <a:solidFill>
+                  <a:srgbClr val="D4AF37"/>
+                </a:solidFill>
+                <a:latin typeface="Microsoft YaHei"/>
+                <a:ea typeface="Microsoft YaHei"/>
+              </a:rPr>
+              <a:t>2</a:t>
+            </a:r>
+          </a:p>
+        </p:txBody>
+      </p:sp>
+      <p:sp>
+        <p:nvSpPr>
+          <p:cNvPr id="13" name="TextBox 12"/>
+          <p:cNvSpPr txBox="1"/>
+          <p:nvPr/>
+        </p:nvSpPr>
+        <p:spPr>
+          <a:xfrm>
+            <a:off x="3566160" y="2148840"/>
+            <a:ext cx="2377440" cy="594360"/>
+          </a:xfrm>
+          <a:prstGeom prst="rect">
+            <a:avLst/>
+          </a:prstGeom>
+          <a:noFill/>
+        </p:spPr>
+        <p:txBody>
+          <a:bodyPr wrap="square">
+            <a:spAutoFit/>
+          </a:bodyPr>
+          <a:lstStyle/>
+          <a:p>
+            <a:pPr algn="ctr">
+              <a:spcAft>
+                <a:spcPts val="600"/>
+              </a:spcAft>
+            </a:pPr>
+            <a:r>
+              <a:rPr sz="1800" b="1">
+                <a:solidFill>
+                  <a:srgbClr val="F4E8C8"/>
+                </a:solidFill>
+                <a:latin typeface="Microsoft YaHei"/>
+                <a:ea typeface="Microsoft YaHei"/>
+              </a:rPr>
+              <a:t>睇一個人</a:t>
+            </a:r>
+          </a:p>
+        </p:txBody>
+      </p:sp>
+      <p:sp>
+        <p:nvSpPr>
+          <p:cNvPr id="14" name="TextBox 13"/>
+          <p:cNvSpPr txBox="1"/>
+          <p:nvPr/>
+        </p:nvSpPr>
+        <p:spPr>
+          <a:xfrm>
+            <a:off x="3520440" y="2880360"/>
+            <a:ext cx="2468880" cy="2377440"/>
+          </a:xfrm>
+          <a:prstGeom prst="rect">
+            <a:avLst/>
+          </a:prstGeom>
+          <a:noFill/>
+        </p:spPr>
+        <p:txBody>
+          <a:bodyPr wrap="square">
+            <a:spAutoFit/>
+          </a:bodyPr>
+          <a:lstStyle/>
+          <a:p>
+            <a:pPr algn="ctr">
+              <a:spcAft>
+                <a:spcPts val="600"/>
+              </a:spcAft>
+            </a:pPr>
+            <a:r>
+              <a:rPr sz="1500" b="0">
+                <a:solidFill>
+                  <a:srgbClr val="B8A888"/>
+                </a:solidFill>
+                <a:latin typeface="Microsoft YaHei"/>
+                <a:ea typeface="Microsoft YaHei"/>
+              </a:rPr>
+              <a:t>點沈清梧或者葉疏影。
+畫像即見，記住心事。</a:t>
+            </a:r>
+          </a:p>
+        </p:txBody>
+      </p:sp>
+      <p:sp>
+        <p:nvSpPr>
+          <p:cNvPr id="15" name="Rounded Rectangle 14"/>
+          <p:cNvSpPr/>
+          <p:nvPr/>
+        </p:nvSpPr>
+        <p:spPr>
+          <a:xfrm>
+            <a:off x="6309360" y="1207008"/>
+            <a:ext cx="2743200" cy="4434840"/>
+          </a:xfrm>
+          <a:prstGeom prst="roundRect">
+            <a:avLst/>
+          </a:prstGeom>
+          <a:solidFill>
+            <a:srgbClr val="14100A"/>
+          </a:solidFill>
+          <a:ln w="15875">
+            <a:solidFill>
+              <a:srgbClr val="D4AF37"/>
+            </a:solidFill>
+          </a:ln>
+        </p:spPr>
+        <p:style>
+          <a:lnRef idx="1">
+            <a:schemeClr val="accent1"/>
+          </a:lnRef>
+          <a:fillRef idx="3">
+            <a:schemeClr val="accent1"/>
+          </a:fillRef>
+          <a:effectRef idx="2">
+            <a:schemeClr val="accent1"/>
+          </a:effectRef>
+          <a:fontRef idx="minor">
+            <a:schemeClr val="lt1"/>
+          </a:fontRef>
+        </p:style>
+        <p:txBody>
+          <a:bodyPr rtlCol="0" anchor="ctr"/>
+          <a:lstStyle/>
+          <a:p>
+            <a:pPr algn="ctr"/>
+          </a:p>
+        </p:txBody>
+      </p:sp>
+      <p:sp>
+        <p:nvSpPr>
+          <p:cNvPr id="16" name="TextBox 15"/>
+          <p:cNvSpPr txBox="1"/>
+          <p:nvPr/>
+        </p:nvSpPr>
+        <p:spPr>
+          <a:xfrm>
+            <a:off x="6492240" y="1417320"/>
+            <a:ext cx="2377440" cy="640080"/>
+          </a:xfrm>
+          <a:prstGeom prst="rect">
+            <a:avLst/>
+          </a:prstGeom>
+          <a:noFill/>
+        </p:spPr>
+        <p:txBody>
+          <a:bodyPr wrap="square">
+            <a:spAutoFit/>
+          </a:bodyPr>
+          <a:lstStyle/>
+          <a:p>
+            <a:pPr algn="ctr">
+              <a:spcAft>
+                <a:spcPts val="600"/>
+              </a:spcAft>
+            </a:pPr>
+            <a:r>
+              <a:rPr sz="3600" b="1">
+                <a:solidFill>
+                  <a:srgbClr val="D4AF37"/>
+                </a:solidFill>
+                <a:latin typeface="Microsoft YaHei"/>
+                <a:ea typeface="Microsoft YaHei"/>
+              </a:rPr>
+              <a:t>3</a:t>
+            </a:r>
+          </a:p>
+        </p:txBody>
+      </p:sp>
+      <p:sp>
+        <p:nvSpPr>
+          <p:cNvPr id="17" name="TextBox 16"/>
+          <p:cNvSpPr txBox="1"/>
+          <p:nvPr/>
+        </p:nvSpPr>
+        <p:spPr>
+          <a:xfrm>
+            <a:off x="6492240" y="2148840"/>
+            <a:ext cx="2377440" cy="594360"/>
+          </a:xfrm>
+          <a:prstGeom prst="rect">
+            <a:avLst/>
+          </a:prstGeom>
+          <a:noFill/>
+        </p:spPr>
+        <p:txBody>
+          <a:bodyPr wrap="square">
+            <a:spAutoFit/>
+          </a:bodyPr>
+          <a:lstStyle/>
+          <a:p>
+            <a:pPr algn="ctr">
+              <a:spcAft>
+                <a:spcPts val="600"/>
+              </a:spcAft>
+            </a:pPr>
+            <a:r>
+              <a:rPr sz="1800" b="1">
+                <a:solidFill>
+                  <a:srgbClr val="F4E8C8"/>
+                </a:solidFill>
+                <a:latin typeface="Microsoft YaHei"/>
+                <a:ea typeface="Microsoft YaHei"/>
+              </a:rPr>
+              <a:t>等兩場戲</a:t>
+            </a:r>
+          </a:p>
+        </p:txBody>
+      </p:sp>
+      <p:sp>
+        <p:nvSpPr>
+          <p:cNvPr id="18" name="TextBox 17"/>
+          <p:cNvSpPr txBox="1"/>
+          <p:nvPr/>
+        </p:nvSpPr>
+        <p:spPr>
+          <a:xfrm>
+            <a:off x="6446520" y="2880360"/>
+            <a:ext cx="2468880" cy="2377440"/>
+          </a:xfrm>
+          <a:prstGeom prst="rect">
+            <a:avLst/>
+          </a:prstGeom>
+          <a:noFill/>
+        </p:spPr>
+        <p:txBody>
+          <a:bodyPr wrap="square">
+            <a:spAutoFit/>
+          </a:bodyPr>
+          <a:lstStyle/>
+          <a:p>
+            <a:pPr algn="ctr">
+              <a:spcAft>
+                <a:spcPts val="600"/>
+              </a:spcAft>
+            </a:pPr>
+            <a:r>
+              <a:rPr sz="1500" b="0">
+                <a:solidFill>
+                  <a:srgbClr val="B8A888"/>
+                </a:solidFill>
+                <a:latin typeface="Microsoft YaHei"/>
+                <a:ea typeface="Microsoft YaHei"/>
+              </a:rPr>
+              <a:t>開時間。睇編劇組出第一、第二場——場次都有演示畫。</a:t>
+            </a:r>
+          </a:p>
+        </p:txBody>
+      </p:sp>
+      <p:sp>
+        <p:nvSpPr>
+          <p:cNvPr id="19" name="Rounded Rectangle 18"/>
+          <p:cNvSpPr/>
+          <p:nvPr/>
+        </p:nvSpPr>
+        <p:spPr>
+          <a:xfrm>
+            <a:off x="9235440" y="1207008"/>
+            <a:ext cx="2743200" cy="4434840"/>
+          </a:xfrm>
+          <a:prstGeom prst="roundRect">
+            <a:avLst/>
+          </a:prstGeom>
+          <a:solidFill>
+            <a:srgbClr val="14100A"/>
+          </a:solidFill>
+          <a:ln w="15875">
+            <a:solidFill>
+              <a:srgbClr val="D4AF37"/>
+            </a:solidFill>
+          </a:ln>
+        </p:spPr>
+        <p:style>
+          <a:lnRef idx="1">
+            <a:schemeClr val="accent1"/>
+          </a:lnRef>
+          <a:fillRef idx="3">
+            <a:schemeClr val="accent1"/>
+          </a:fillRef>
+          <a:effectRef idx="2">
+            <a:schemeClr val="accent1"/>
+          </a:effectRef>
+          <a:fontRef idx="minor">
+            <a:schemeClr val="lt1"/>
+          </a:fontRef>
+        </p:style>
+        <p:txBody>
+          <a:bodyPr rtlCol="0" anchor="ctr"/>
+          <a:lstStyle/>
+          <a:p>
+            <a:pPr algn="ctr"/>
+          </a:p>
+        </p:txBody>
+      </p:sp>
+      <p:sp>
+        <p:nvSpPr>
+          <p:cNvPr id="20" name="TextBox 19"/>
+          <p:cNvSpPr txBox="1"/>
+          <p:nvPr/>
+        </p:nvSpPr>
+        <p:spPr>
+          <a:xfrm>
+            <a:off x="9418320" y="1417320"/>
+            <a:ext cx="2377440" cy="640080"/>
+          </a:xfrm>
+          <a:prstGeom prst="rect">
+            <a:avLst/>
+          </a:prstGeom>
+          <a:noFill/>
+        </p:spPr>
+        <p:txBody>
+          <a:bodyPr wrap="square">
+            <a:spAutoFit/>
+          </a:bodyPr>
+          <a:lstStyle/>
+          <a:p>
+            <a:pPr algn="ctr">
+              <a:spcAft>
+                <a:spcPts val="600"/>
+              </a:spcAft>
+            </a:pPr>
+            <a:r>
+              <a:rPr sz="3600" b="1">
+                <a:solidFill>
+                  <a:srgbClr val="D4AF37"/>
+                </a:solidFill>
+                <a:latin typeface="Microsoft YaHei"/>
+                <a:ea typeface="Microsoft YaHei"/>
+              </a:rPr>
+              <a:t>4</a:t>
+            </a:r>
+          </a:p>
+        </p:txBody>
+      </p:sp>
+      <p:sp>
+        <p:nvSpPr>
+          <p:cNvPr id="21" name="TextBox 20"/>
+          <p:cNvSpPr txBox="1"/>
+          <p:nvPr/>
+        </p:nvSpPr>
+        <p:spPr>
+          <a:xfrm>
+            <a:off x="9418320" y="2148840"/>
+            <a:ext cx="2377440" cy="594360"/>
+          </a:xfrm>
+          <a:prstGeom prst="rect">
+            <a:avLst/>
+          </a:prstGeom>
+          <a:noFill/>
+        </p:spPr>
+        <p:txBody>
+          <a:bodyPr wrap="square">
+            <a:spAutoFit/>
+          </a:bodyPr>
+          <a:lstStyle/>
+          <a:p>
+            <a:pPr algn="ctr">
+              <a:spcAft>
+                <a:spcPts val="600"/>
+              </a:spcAft>
+            </a:pPr>
+            <a:r>
+              <a:rPr sz="1800" b="1">
+                <a:solidFill>
+                  <a:srgbClr val="F4E8C8"/>
+                </a:solidFill>
+                <a:latin typeface="Microsoft YaHei"/>
+                <a:ea typeface="Microsoft YaHei"/>
+              </a:rPr>
+              <a:t>先改一次命</a:t>
+            </a:r>
+          </a:p>
+        </p:txBody>
+      </p:sp>
+      <p:sp>
+        <p:nvSpPr>
+          <p:cNvPr id="22" name="TextBox 21"/>
+          <p:cNvSpPr txBox="1"/>
+          <p:nvPr/>
+        </p:nvSpPr>
+        <p:spPr>
+          <a:xfrm>
+            <a:off x="9372600" y="2880360"/>
+            <a:ext cx="2468880" cy="2377440"/>
+          </a:xfrm>
+          <a:prstGeom prst="rect">
+            <a:avLst/>
+          </a:prstGeom>
+          <a:noFill/>
+        </p:spPr>
+        <p:txBody>
+          <a:bodyPr wrap="square">
+            <a:spAutoFit/>
+          </a:bodyPr>
+          <a:lstStyle/>
+          <a:p>
+            <a:pPr algn="ctr">
+              <a:spcAft>
+                <a:spcPts val="600"/>
+              </a:spcAft>
+            </a:pPr>
+            <a:r>
+              <a:rPr sz="1500" b="0">
+                <a:solidFill>
+                  <a:srgbClr val="B8A888"/>
+                </a:solidFill>
+                <a:latin typeface="Microsoft YaHei"/>
+                <a:ea typeface="Microsoft YaHei"/>
+              </a:rPr>
+              <a:t>賜福或者天劫。
+然後停手，睇後果。</a:t>
+            </a:r>
+          </a:p>
+        </p:txBody>
+      </p:sp>
+    </p:spTree>
+  </p:cSld>
+  <p:clrMapOvr>
+    <a:masterClrMapping/>
+  </p:clrMapOvr>
+</p:sld>
+</file>
+
+<file path=ppt/slides/slide11.xml><?xml version="1.0" encoding="utf-8"?>
+<p:sld xmlns:a="http://schemas.openxmlformats.org/drawingml/2006/main" xmlns:p="http://schemas.openxmlformats.org/presentationml/2006/main" xmlns:r="http://schemas.openxmlformats.org/officeDocument/2006/relationships">
+  <p:cSld>
+    <p:bg>
+      <p:bgPr>
+        <a:solidFill>
+          <a:srgbClr val="0B0804"/>
+        </a:solidFill>
+        <a:effectLst/>
+      </p:bgPr>
+    </p:bg>
+    <p:spTree>
+      <p:nvGrpSpPr>
+        <p:cNvPr id="1" name=""/>
+        <p:cNvGrpSpPr/>
+        <p:nvPr/>
+      </p:nvGrpSpPr>
+      <p:grpSpPr/>
+      <p:sp>
+        <p:nvSpPr>
+          <p:cNvPr id="2" name="Rectangle 1"/>
+          <p:cNvSpPr/>
+          <p:nvPr/>
+        </p:nvSpPr>
+        <p:spPr>
+          <a:xfrm>
+            <a:off x="0" y="0"/>
+            <a:ext cx="12191695" cy="54864"/>
+          </a:xfrm>
+          <a:prstGeom prst="rect">
+            <a:avLst/>
+          </a:prstGeom>
+          <a:solidFill>
+            <a:srgbClr val="D4AF37"/>
+          </a:solidFill>
+          <a:ln>
+            <a:noFill/>
+          </a:ln>
+        </p:spPr>
+        <p:style>
+          <a:lnRef idx="1">
+            <a:schemeClr val="accent1"/>
+          </a:lnRef>
+          <a:fillRef idx="3">
+            <a:schemeClr val="accent1"/>
+          </a:fillRef>
+          <a:effectRef idx="2">
+            <a:schemeClr val="accent1"/>
+          </a:effectRef>
+          <a:fontRef idx="minor">
+            <a:schemeClr val="lt1"/>
+          </a:fontRef>
+        </p:style>
+        <p:txBody>
+          <a:bodyPr rtlCol="0" anchor="ctr"/>
+          <a:lstStyle/>
+          <a:p>
+            <a:pPr algn="ctr"/>
+          </a:p>
+        </p:txBody>
+      </p:sp>
+      <p:sp>
+        <p:nvSpPr>
+          <p:cNvPr id="3" name="Rectangle 2"/>
+          <p:cNvSpPr/>
+          <p:nvPr/>
+        </p:nvSpPr>
+        <p:spPr>
+          <a:xfrm>
+            <a:off x="0" y="6803136"/>
+            <a:ext cx="12191695" cy="54864"/>
+          </a:xfrm>
+          <a:prstGeom prst="rect">
+            <a:avLst/>
+          </a:prstGeom>
+          <a:solidFill>
+            <a:srgbClr val="D4AF37"/>
+          </a:solidFill>
+          <a:ln>
+            <a:noFill/>
+          </a:ln>
+        </p:spPr>
+        <p:style>
+          <a:lnRef idx="1">
+            <a:schemeClr val="accent1"/>
+          </a:lnRef>
+          <a:fillRef idx="3">
+            <a:schemeClr val="accent1"/>
+          </a:fillRef>
+          <a:effectRef idx="2">
+            <a:schemeClr val="accent1"/>
+          </a:effectRef>
+          <a:fontRef idx="minor">
+            <a:schemeClr val="lt1"/>
+          </a:fontRef>
+        </p:style>
+        <p:txBody>
+          <a:bodyPr rtlCol="0" anchor="ctr"/>
+          <a:lstStyle/>
+          <a:p>
+            <a:pPr algn="ctr"/>
+          </a:p>
+        </p:txBody>
+      </p:sp>
+      <p:sp>
+        <p:nvSpPr>
+          <p:cNvPr id="4" name="Diamond 3"/>
+          <p:cNvSpPr/>
+          <p:nvPr/>
+        </p:nvSpPr>
+        <p:spPr>
+          <a:xfrm>
+            <a:off x="5696712" y="658368"/>
+            <a:ext cx="749808" cy="749808"/>
+          </a:xfrm>
+          <a:prstGeom prst="diamond">
+            <a:avLst/>
+          </a:prstGeom>
+          <a:solidFill>
+            <a:srgbClr val="16120C"/>
+          </a:solidFill>
+          <a:ln w="19050">
+            <a:solidFill>
+              <a:srgbClr val="D4AF37"/>
+            </a:solidFill>
+          </a:ln>
+        </p:spPr>
+        <p:style>
+          <a:lnRef idx="1">
+            <a:schemeClr val="accent1"/>
+          </a:lnRef>
+          <a:fillRef idx="3">
+            <a:schemeClr val="accent1"/>
+          </a:fillRef>
+          <a:effectRef idx="2">
+            <a:schemeClr val="accent1"/>
+          </a:effectRef>
+          <a:fontRef idx="minor">
+            <a:schemeClr val="lt1"/>
+          </a:fontRef>
+        </p:style>
+        <p:txBody>
+          <a:bodyPr rtlCol="0" anchor="ctr"/>
+          <a:lstStyle/>
+          <a:p>
+            <a:pPr algn="ctr"/>
+          </a:p>
+        </p:txBody>
+      </p:sp>
+      <p:sp>
+        <p:nvSpPr>
+          <p:cNvPr id="5" name="TextBox 4"/>
+          <p:cNvSpPr txBox="1"/>
+          <p:nvPr/>
+        </p:nvSpPr>
+        <p:spPr>
+          <a:xfrm>
+            <a:off x="5696712" y="868314"/>
+            <a:ext cx="749808" cy="359907"/>
+          </a:xfrm>
+          <a:prstGeom prst="rect">
+            <a:avLst/>
+          </a:prstGeom>
+          <a:noFill/>
+        </p:spPr>
+        <p:txBody>
+          <a:bodyPr wrap="square">
+            <a:spAutoFit/>
+          </a:bodyPr>
+          <a:lstStyle/>
+          <a:p>
+            <a:pPr algn="ctr">
+              <a:spcAft>
+                <a:spcPts val="600"/>
+              </a:spcAft>
+            </a:pPr>
+            <a:r>
+              <a:rPr sz="2200" b="1">
+                <a:solidFill>
+                  <a:srgbClr val="D4AF37"/>
+                </a:solidFill>
+                <a:latin typeface="Microsoft YaHei"/>
+                <a:ea typeface="Microsoft YaHei"/>
+              </a:rPr>
+              <a:t>父</a:t>
+            </a:r>
+          </a:p>
+        </p:txBody>
+      </p:sp>
+      <p:sp>
+        <p:nvSpPr>
+          <p:cNvPr id="6" name="TextBox 5"/>
+          <p:cNvSpPr txBox="1"/>
+          <p:nvPr/>
+        </p:nvSpPr>
+        <p:spPr>
+          <a:xfrm>
+            <a:off x="731520" y="1481328"/>
+            <a:ext cx="10698480" cy="365760"/>
+          </a:xfrm>
+          <a:prstGeom prst="rect">
+            <a:avLst/>
+          </a:prstGeom>
+          <a:noFill/>
+        </p:spPr>
+        <p:txBody>
+          <a:bodyPr wrap="square">
+            <a:spAutoFit/>
+          </a:bodyPr>
+          <a:lstStyle/>
+          <a:p>
+            <a:pPr algn="ctr">
+              <a:spcAft>
+                <a:spcPts val="600"/>
+              </a:spcAft>
+            </a:pPr>
+            <a:r>
+              <a:rPr sz="1400" b="0">
+                <a:solidFill>
+                  <a:srgbClr val="D4AF37"/>
+                </a:solidFill>
+                <a:latin typeface="Microsoft YaHei"/>
+                <a:ea typeface="Microsoft YaHei"/>
+              </a:rPr>
+              <a:t>結  ·  家訓</a:t>
+            </a:r>
+          </a:p>
+        </p:txBody>
+      </p:sp>
+      <p:sp>
+        <p:nvSpPr>
+          <p:cNvPr id="7" name="TextBox 6"/>
+          <p:cNvSpPr txBox="1"/>
+          <p:nvPr/>
+        </p:nvSpPr>
+        <p:spPr>
+          <a:xfrm>
+            <a:off x="731520" y="1901952"/>
+            <a:ext cx="10698480" cy="1143000"/>
+          </a:xfrm>
+          <a:prstGeom prst="rect">
+            <a:avLst/>
+          </a:prstGeom>
+          <a:noFill/>
+        </p:spPr>
+        <p:txBody>
+          <a:bodyPr wrap="square">
+            <a:spAutoFit/>
+          </a:bodyPr>
+          <a:lstStyle/>
+          <a:p>
+            <a:pPr algn="ctr">
+              <a:spcAft>
+                <a:spcPts val="600"/>
+              </a:spcAft>
+            </a:pPr>
+            <a:r>
+              <a:rPr sz="3200" b="1">
+                <a:solidFill>
+                  <a:srgbClr val="D4AF37"/>
+                </a:solidFill>
+                <a:latin typeface="Microsoft YaHei"/>
+                <a:ea typeface="Microsoft YaHei"/>
+              </a:rPr>
+              <a:t>人死功法在。家在，戲就未完。</a:t>
+            </a:r>
+          </a:p>
+        </p:txBody>
+      </p:sp>
+      <p:sp>
+        <p:nvSpPr>
+          <p:cNvPr id="8" name="TextBox 7"/>
+          <p:cNvSpPr txBox="1"/>
+          <p:nvPr/>
+        </p:nvSpPr>
+        <p:spPr>
+          <a:xfrm>
+            <a:off x="731520" y="3154680"/>
+            <a:ext cx="10698480" cy="1554480"/>
+          </a:xfrm>
+          <a:prstGeom prst="rect">
+            <a:avLst/>
+          </a:prstGeom>
+          <a:noFill/>
+        </p:spPr>
+        <p:txBody>
+          <a:bodyPr wrap="square">
+            <a:spAutoFit/>
+          </a:bodyPr>
+          <a:lstStyle/>
+          <a:p>
+            <a:pPr algn="ctr">
+              <a:spcAft>
+                <a:spcPts val="600"/>
+              </a:spcAft>
+            </a:pPr>
+            <a:r>
+              <a:rPr sz="2000" b="1">
+                <a:solidFill>
+                  <a:srgbClr val="7EC8C3"/>
+                </a:solidFill>
+                <a:latin typeface="Microsoft YaHei"/>
+                <a:ea typeface="Microsoft YaHei"/>
+              </a:rPr>
+              <a:t>玩　　https://yip-lgtm.github.io/family/</a:t>
+            </a:r>
+          </a:p>
+          <a:p>
+            <a:pPr algn="ctr">
+              <a:spcAft>
+                <a:spcPts val="600"/>
+              </a:spcAft>
+            </a:pPr>
+            <a:r>
+              <a:rPr sz="1800" b="0">
+                <a:solidFill>
+                  <a:srgbClr val="B8A888"/>
+                </a:solidFill>
+                <a:latin typeface="Microsoft YaHei"/>
+                <a:ea typeface="Microsoft YaHei"/>
+              </a:rPr>
+              <a:t>源碼　https://github.com/yip-lgtm/family.git</a:t>
+            </a:r>
+          </a:p>
+          <a:p>
+            <a:pPr algn="ctr">
+              <a:spcAft>
+                <a:spcPts val="600"/>
+              </a:spcAft>
+            </a:pPr>
+            <a:r>
               <a:rPr sz="1600" b="0">
                 <a:solidFill>
                   <a:srgbClr val="B8A888"/>
@@ -4951,7 +5984,64 @@
                 <a:latin typeface="Microsoft YaHei"/>
                 <a:ea typeface="Microsoft YaHei"/>
               </a:rPr>
-              <a:t>開源 · 瀏覽器即玩 · Key 可選 · 劇組永遠代班</a:t>
+              <a:t>鏡像　https://github.com/yip-lgtm/qi-lineage</a:t>
+            </a:r>
+          </a:p>
+        </p:txBody>
+      </p:sp>
+      <p:sp>
+        <p:nvSpPr>
+          <p:cNvPr id="9" name="TextBox 8"/>
+          <p:cNvSpPr txBox="1"/>
+          <p:nvPr/>
+        </p:nvSpPr>
+        <p:spPr>
+          <a:xfrm>
+            <a:off x="731520" y="4937760"/>
+            <a:ext cx="10698480" cy="914400"/>
+          </a:xfrm>
+          <a:prstGeom prst="rect">
+            <a:avLst/>
+          </a:prstGeom>
+          <a:noFill/>
+        </p:spPr>
+        <p:txBody>
+          <a:bodyPr wrap="square">
+            <a:spAutoFit/>
+          </a:bodyPr>
+          <a:lstStyle/>
+          <a:p>
+            <a:pPr algn="ctr">
+              <a:spcAft>
+                <a:spcPts val="600"/>
+              </a:spcAft>
+            </a:pPr>
+            <a:r>
+              <a:rPr sz="1600" b="0">
+                <a:solidFill>
+                  <a:srgbClr val="B8A888"/>
+                </a:solidFill>
+                <a:latin typeface="Microsoft YaHei"/>
+                <a:ea typeface="Microsoft YaHei"/>
+              </a:rPr>
+              <a:t>開源 · 瀏覽器即玩 · Key 可選 · 演示畫永遠在 · 劇組永遠代班</a:t>
+            </a:r>
+          </a:p>
+          <a:p>
+            <a:pPr algn="ctr">
+              <a:spcAft>
+                <a:spcPts val="600"/>
+              </a:spcAft>
+            </a:pPr>
+            <a:r>
+              <a:rPr sz="1400" b="0">
+                <a:solidFill>
+                  <a:srgbClr val="D4AF37"/>
+                </a:solidFill>
+                <a:latin typeface="Microsoft YaHei"/>
+                <a:ea typeface="Microsoft YaHei"/>
+              </a:rPr>
+              <a:t>THE FAMILY  ·  教父山門  ·  GODFATHER GATE</a:t>
             </a:r>
           </a:p>
         </p:txBody>
@@ -5076,8 +6166,8 @@
         </p:nvSpPr>
         <p:spPr>
           <a:xfrm>
-            <a:off x="640080" y="320040"/>
-            <a:ext cx="10972800" cy="822960"/>
+            <a:off x="502920" y="6473952"/>
+            <a:ext cx="7498079" cy="256032"/>
           </a:xfrm>
           <a:prstGeom prst="rect">
             <a:avLst/>
@@ -5096,6 +6186,86 @@
               </a:spcAft>
             </a:pPr>
             <a:r>
+              <a:rPr sz="1100" b="0">
+                <a:solidFill>
+                  <a:srgbClr val="B8A888"/>
+                </a:solidFill>
+                <a:latin typeface="Microsoft YaHei"/>
+                <a:ea typeface="Microsoft YaHei"/>
+              </a:rPr>
+              <a:t>教父世家  ·  THE FAMILY</a:t>
+            </a:r>
+          </a:p>
+        </p:txBody>
+      </p:sp>
+      <p:sp>
+        <p:nvSpPr>
+          <p:cNvPr id="5" name="TextBox 4"/>
+          <p:cNvSpPr txBox="1"/>
+          <p:nvPr/>
+        </p:nvSpPr>
+        <p:spPr>
+          <a:xfrm>
+            <a:off x="9509760" y="6473952"/>
+            <a:ext cx="2103120" cy="256032"/>
+          </a:xfrm>
+          <a:prstGeom prst="rect">
+            <a:avLst/>
+          </a:prstGeom>
+          <a:noFill/>
+        </p:spPr>
+        <p:txBody>
+          <a:bodyPr wrap="square">
+            <a:spAutoFit/>
+          </a:bodyPr>
+          <a:lstStyle/>
+          <a:p>
+            <a:pPr algn="r">
+              <a:spcAft>
+                <a:spcPts val="600"/>
+              </a:spcAft>
+            </a:pPr>
+            <a:r>
+              <a:rPr sz="1100" b="0">
+                <a:solidFill>
+                  <a:srgbClr val="B8A888"/>
+                </a:solidFill>
+                <a:latin typeface="Microsoft YaHei"/>
+                <a:ea typeface="Microsoft YaHei"/>
+              </a:rPr>
+              <a:t>02  /  11</a:t>
+            </a:r>
+          </a:p>
+        </p:txBody>
+      </p:sp>
+      <p:sp>
+        <p:nvSpPr>
+          <p:cNvPr id="6" name="TextBox 5"/>
+          <p:cNvSpPr txBox="1"/>
+          <p:nvPr/>
+        </p:nvSpPr>
+        <p:spPr>
+          <a:xfrm>
+            <a:off x="640080" y="292608"/>
+            <a:ext cx="10972800" cy="822960"/>
+          </a:xfrm>
+          <a:prstGeom prst="rect">
+            <a:avLst/>
+          </a:prstGeom>
+          <a:noFill/>
+        </p:spPr>
+        <p:txBody>
+          <a:bodyPr wrap="square">
+            <a:spAutoFit/>
+          </a:bodyPr>
+          <a:lstStyle/>
+          <a:p>
+            <a:pPr algn="l">
+              <a:spcAft>
+                <a:spcPts val="600"/>
+              </a:spcAft>
+            </a:pPr>
+            <a:r>
               <a:rPr sz="1400" b="0">
                 <a:solidFill>
                   <a:srgbClr val="D4AF37"/>
@@ -5127,14 +6297,14 @@
       </p:sp>
       <p:sp>
         <p:nvSpPr>
-          <p:cNvPr id="5" name="Rounded Rectangle 4"/>
+          <p:cNvPr id="7" name="Rounded Rectangle 6"/>
           <p:cNvSpPr/>
           <p:nvPr/>
         </p:nvSpPr>
         <p:spPr>
           <a:xfrm>
-            <a:off x="640080" y="1828800"/>
-            <a:ext cx="3474720" cy="4023360"/>
+            <a:off x="640080" y="1691640"/>
+            <a:ext cx="3474720" cy="4297680"/>
           </a:xfrm>
           <a:prstGeom prst="roundRect">
             <a:avLst/>
@@ -5172,13 +6342,13 @@
       </p:sp>
       <p:sp>
         <p:nvSpPr>
-          <p:cNvPr id="6" name="TextBox 5"/>
+          <p:cNvPr id="8" name="TextBox 7"/>
           <p:cNvSpPr txBox="1"/>
           <p:nvPr/>
         </p:nvSpPr>
         <p:spPr>
           <a:xfrm>
-            <a:off x="868680" y="2057400"/>
+            <a:off x="868680" y="1920240"/>
             <a:ext cx="3017520" cy="548640"/>
           </a:xfrm>
           <a:prstGeom prst="rect">
@@ -5212,14 +6382,14 @@
       </p:sp>
       <p:sp>
         <p:nvSpPr>
-          <p:cNvPr id="7" name="TextBox 6"/>
+          <p:cNvPr id="9" name="TextBox 8"/>
           <p:cNvSpPr txBox="1"/>
           <p:nvPr/>
         </p:nvSpPr>
         <p:spPr>
           <a:xfrm>
-            <a:off x="868680" y="2743200"/>
-            <a:ext cx="3017520" cy="2743200"/>
+            <a:off x="868680" y="2606040"/>
+            <a:ext cx="3017520" cy="2926080"/>
           </a:xfrm>
           <a:prstGeom prst="rect">
             <a:avLst/>
@@ -5254,14 +6424,14 @@
       </p:sp>
       <p:sp>
         <p:nvSpPr>
-          <p:cNvPr id="8" name="Rounded Rectangle 7"/>
+          <p:cNvPr id="10" name="Rounded Rectangle 9"/>
           <p:cNvSpPr/>
           <p:nvPr/>
         </p:nvSpPr>
         <p:spPr>
           <a:xfrm>
-            <a:off x="4389120" y="1828800"/>
-            <a:ext cx="3474720" cy="4023360"/>
+            <a:off x="4389120" y="1691640"/>
+            <a:ext cx="3474720" cy="4297680"/>
           </a:xfrm>
           <a:prstGeom prst="roundRect">
             <a:avLst/>
@@ -5299,13 +6469,13 @@
       </p:sp>
       <p:sp>
         <p:nvSpPr>
-          <p:cNvPr id="9" name="TextBox 8"/>
+          <p:cNvPr id="11" name="TextBox 10"/>
           <p:cNvSpPr txBox="1"/>
           <p:nvPr/>
         </p:nvSpPr>
         <p:spPr>
           <a:xfrm>
-            <a:off x="4617720" y="2057400"/>
+            <a:off x="4617720" y="1920240"/>
             <a:ext cx="3017520" cy="548640"/>
           </a:xfrm>
           <a:prstGeom prst="rect">
@@ -5339,14 +6509,14 @@
       </p:sp>
       <p:sp>
         <p:nvSpPr>
-          <p:cNvPr id="10" name="TextBox 9"/>
+          <p:cNvPr id="12" name="TextBox 11"/>
           <p:cNvSpPr txBox="1"/>
           <p:nvPr/>
         </p:nvSpPr>
         <p:spPr>
           <a:xfrm>
-            <a:off x="4617720" y="2743200"/>
-            <a:ext cx="3017520" cy="2743200"/>
+            <a:off x="4617720" y="2606040"/>
+            <a:ext cx="3017520" cy="2926080"/>
           </a:xfrm>
           <a:prstGeom prst="rect">
             <a:avLst/>
@@ -5381,14 +6551,14 @@
       </p:sp>
       <p:sp>
         <p:nvSpPr>
-          <p:cNvPr id="11" name="Rounded Rectangle 10"/>
+          <p:cNvPr id="13" name="Rounded Rectangle 12"/>
           <p:cNvSpPr/>
           <p:nvPr/>
         </p:nvSpPr>
         <p:spPr>
           <a:xfrm>
-            <a:off x="8138159" y="1828800"/>
-            <a:ext cx="3474720" cy="4023360"/>
+            <a:off x="8138159" y="1691640"/>
+            <a:ext cx="3474720" cy="4297680"/>
           </a:xfrm>
           <a:prstGeom prst="roundRect">
             <a:avLst/>
@@ -5426,13 +6596,13 @@
       </p:sp>
       <p:sp>
         <p:nvSpPr>
-          <p:cNvPr id="12" name="TextBox 11"/>
+          <p:cNvPr id="14" name="TextBox 13"/>
           <p:cNvSpPr txBox="1"/>
           <p:nvPr/>
         </p:nvSpPr>
         <p:spPr>
           <a:xfrm>
-            <a:off x="8366759" y="2057400"/>
+            <a:off x="8366759" y="1920240"/>
             <a:ext cx="3017520" cy="548640"/>
           </a:xfrm>
           <a:prstGeom prst="rect">
@@ -5466,14 +6636,14 @@
       </p:sp>
       <p:sp>
         <p:nvSpPr>
-          <p:cNvPr id="13" name="TextBox 12"/>
+          <p:cNvPr id="15" name="TextBox 14"/>
           <p:cNvSpPr txBox="1"/>
           <p:nvPr/>
         </p:nvSpPr>
         <p:spPr>
           <a:xfrm>
-            <a:off x="8366759" y="2743200"/>
-            <a:ext cx="3017520" cy="2743200"/>
+            <a:off x="8366759" y="2606040"/>
+            <a:ext cx="3017520" cy="2926080"/>
           </a:xfrm>
           <a:prstGeom prst="rect">
             <a:avLst/>
@@ -5501,7 +6671,7 @@
               </a:rPr>
               <a:t>賜福 · 天劫
 心魔 · 指派
-耗的是業力</a:t>
+耗的是氣運</a:t>
             </a:r>
           </a:p>
         </p:txBody>
@@ -5626,8 +6796,8 @@
         </p:nvSpPr>
         <p:spPr>
           <a:xfrm>
-            <a:off x="640080" y="320040"/>
-            <a:ext cx="10972800" cy="822960"/>
+            <a:off x="502920" y="6473952"/>
+            <a:ext cx="7498079" cy="256032"/>
           </a:xfrm>
           <a:prstGeom prst="rect">
             <a:avLst/>
@@ -5646,6 +6816,86 @@
               </a:spcAft>
             </a:pPr>
             <a:r>
+              <a:rPr sz="1100" b="0">
+                <a:solidFill>
+                  <a:srgbClr val="B8A888"/>
+                </a:solidFill>
+                <a:latin typeface="Microsoft YaHei"/>
+                <a:ea typeface="Microsoft YaHei"/>
+              </a:rPr>
+              <a:t>教父世家  ·  THE FAMILY</a:t>
+            </a:r>
+          </a:p>
+        </p:txBody>
+      </p:sp>
+      <p:sp>
+        <p:nvSpPr>
+          <p:cNvPr id="5" name="TextBox 4"/>
+          <p:cNvSpPr txBox="1"/>
+          <p:nvPr/>
+        </p:nvSpPr>
+        <p:spPr>
+          <a:xfrm>
+            <a:off x="9509760" y="6473952"/>
+            <a:ext cx="2103120" cy="256032"/>
+          </a:xfrm>
+          <a:prstGeom prst="rect">
+            <a:avLst/>
+          </a:prstGeom>
+          <a:noFill/>
+        </p:spPr>
+        <p:txBody>
+          <a:bodyPr wrap="square">
+            <a:spAutoFit/>
+          </a:bodyPr>
+          <a:lstStyle/>
+          <a:p>
+            <a:pPr algn="r">
+              <a:spcAft>
+                <a:spcPts val="600"/>
+              </a:spcAft>
+            </a:pPr>
+            <a:r>
+              <a:rPr sz="1100" b="0">
+                <a:solidFill>
+                  <a:srgbClr val="B8A888"/>
+                </a:solidFill>
+                <a:latin typeface="Microsoft YaHei"/>
+                <a:ea typeface="Microsoft YaHei"/>
+              </a:rPr>
+              <a:t>03  /  11</a:t>
+            </a:r>
+          </a:p>
+        </p:txBody>
+      </p:sp>
+      <p:sp>
+        <p:nvSpPr>
+          <p:cNvPr id="6" name="TextBox 5"/>
+          <p:cNvSpPr txBox="1"/>
+          <p:nvPr/>
+        </p:nvSpPr>
+        <p:spPr>
+          <a:xfrm>
+            <a:off x="640080" y="292608"/>
+            <a:ext cx="10972800" cy="822960"/>
+          </a:xfrm>
+          <a:prstGeom prst="rect">
+            <a:avLst/>
+          </a:prstGeom>
+          <a:noFill/>
+        </p:spPr>
+        <p:txBody>
+          <a:bodyPr wrap="square">
+            <a:spAutoFit/>
+          </a:bodyPr>
+          <a:lstStyle/>
+          <a:p>
+            <a:pPr algn="l">
+              <a:spcAft>
+                <a:spcPts val="600"/>
+              </a:spcAft>
+            </a:pPr>
+            <a:r>
               <a:rPr sz="1400" b="0">
                 <a:solidFill>
                   <a:srgbClr val="D4AF37"/>
@@ -5677,13 +6927,13 @@
       </p:sp>
       <p:sp>
         <p:nvSpPr>
-          <p:cNvPr id="5" name="Rounded Rectangle 4"/>
+          <p:cNvPr id="7" name="Rounded Rectangle 6"/>
           <p:cNvSpPr/>
           <p:nvPr/>
         </p:nvSpPr>
         <p:spPr>
           <a:xfrm>
-            <a:off x="502920" y="1554480"/>
+            <a:off x="502920" y="1417320"/>
             <a:ext cx="3657600" cy="2148840"/>
           </a:xfrm>
           <a:prstGeom prst="roundRect">
@@ -5722,14 +6972,14 @@
       </p:sp>
       <p:sp>
         <p:nvSpPr>
-          <p:cNvPr id="6" name="TextBox 5"/>
+          <p:cNvPr id="8" name="TextBox 7"/>
           <p:cNvSpPr txBox="1"/>
           <p:nvPr/>
         </p:nvSpPr>
         <p:spPr>
           <a:xfrm>
-            <a:off x="685800" y="1737360"/>
-            <a:ext cx="3291840" cy="457200"/>
+            <a:off x="685800" y="1581912"/>
+            <a:ext cx="3291840" cy="411480"/>
           </a:xfrm>
           <a:prstGeom prst="rect">
             <a:avLst/>
@@ -5762,14 +7012,14 @@
       </p:sp>
       <p:sp>
         <p:nvSpPr>
-          <p:cNvPr id="7" name="TextBox 6"/>
+          <p:cNvPr id="9" name="TextBox 8"/>
           <p:cNvSpPr txBox="1"/>
           <p:nvPr/>
         </p:nvSpPr>
         <p:spPr>
           <a:xfrm>
-            <a:off x="685800" y="2240280"/>
-            <a:ext cx="3291840" cy="1280160"/>
+            <a:off x="685800" y="2057400"/>
+            <a:ext cx="3291840" cy="1325880"/>
           </a:xfrm>
           <a:prstGeom prst="rect">
             <a:avLst/>
@@ -5795,20 +7045,20 @@
                 <a:latin typeface="Microsoft YaHei"/>
                 <a:ea typeface="Microsoft YaHei"/>
               </a:rPr>
-              <a:t>玄元曆、靈氣、業力、人口。暫停、一倍、三倍、八倍過月。</a:t>
-            </a:r>
-          </a:p>
-        </p:txBody>
-      </p:sp>
-      <p:sp>
-        <p:nvSpPr>
-          <p:cNvPr id="8" name="Rounded Rectangle 7"/>
+              <a:t>玄元曆、氣運、人口、最高境界。暫停、一倍、三倍、八倍過月。</a:t>
+            </a:r>
+          </a:p>
+        </p:txBody>
+      </p:sp>
+      <p:sp>
+        <p:nvSpPr>
+          <p:cNvPr id="10" name="Rounded Rectangle 9"/>
           <p:cNvSpPr/>
           <p:nvPr/>
         </p:nvSpPr>
         <p:spPr>
           <a:xfrm>
-            <a:off x="4343400" y="1554480"/>
+            <a:off x="4343400" y="1417320"/>
             <a:ext cx="3657600" cy="2148840"/>
           </a:xfrm>
           <a:prstGeom prst="roundRect">
@@ -5847,14 +7097,14 @@
       </p:sp>
       <p:sp>
         <p:nvSpPr>
-          <p:cNvPr id="9" name="TextBox 8"/>
+          <p:cNvPr id="11" name="TextBox 10"/>
           <p:cNvSpPr txBox="1"/>
           <p:nvPr/>
         </p:nvSpPr>
         <p:spPr>
           <a:xfrm>
-            <a:off x="4526280" y="1737360"/>
-            <a:ext cx="3291840" cy="457200"/>
+            <a:off x="4526280" y="1581912"/>
+            <a:ext cx="3291840" cy="411480"/>
           </a:xfrm>
           <a:prstGeom prst="rect">
             <a:avLst/>
@@ -5880,21 +7130,21 @@
                 <a:latin typeface="Microsoft YaHei"/>
                 <a:ea typeface="Microsoft YaHei"/>
               </a:rPr>
-              <a:t>山門地圖</a:t>
-            </a:r>
-          </a:p>
-        </p:txBody>
-      </p:sp>
-      <p:sp>
-        <p:nvSpPr>
-          <p:cNvPr id="10" name="TextBox 9"/>
+              <a:t>教父山門</a:t>
+            </a:r>
+          </a:p>
+        </p:txBody>
+      </p:sp>
+      <p:sp>
+        <p:nvSpPr>
+          <p:cNvPr id="12" name="TextBox 11"/>
           <p:cNvSpPr txBox="1"/>
           <p:nvPr/>
         </p:nvSpPr>
         <p:spPr>
           <a:xfrm>
-            <a:off x="4526280" y="2240280"/>
-            <a:ext cx="3291840" cy="1280160"/>
+            <a:off x="4526280" y="2057400"/>
+            <a:ext cx="3291840" cy="1325880"/>
           </a:xfrm>
           <a:prstGeom prst="rect">
             <a:avLst/>
@@ -5920,20 +7170,20 @@
                 <a:latin typeface="Microsoft YaHei"/>
                 <a:ea typeface="Microsoft YaHei"/>
               </a:rPr>
-              <a:t>靈樞、後山、丹房、藏經閣、山門、雲市。人會自己揀去邊。</a:t>
-            </a:r>
-          </a:p>
-        </p:txBody>
-      </p:sp>
-      <p:sp>
-        <p:nvSpPr>
-          <p:cNvPr id="11" name="Rounded Rectangle 10"/>
+              <a:t>GODFATHER GATE。靈樞、後山、丹房、藏經閣、山門、雲市。人會自己揀去邊。</a:t>
+            </a:r>
+          </a:p>
+        </p:txBody>
+      </p:sp>
+      <p:sp>
+        <p:nvSpPr>
+          <p:cNvPr id="13" name="Rounded Rectangle 12"/>
           <p:cNvSpPr/>
           <p:nvPr/>
         </p:nvSpPr>
         <p:spPr>
           <a:xfrm>
-            <a:off x="8183880" y="1554480"/>
+            <a:off x="8183880" y="1417320"/>
             <a:ext cx="3657600" cy="2148840"/>
           </a:xfrm>
           <a:prstGeom prst="roundRect">
@@ -5972,14 +7222,14 @@
       </p:sp>
       <p:sp>
         <p:nvSpPr>
-          <p:cNvPr id="12" name="TextBox 11"/>
+          <p:cNvPr id="14" name="TextBox 13"/>
           <p:cNvSpPr txBox="1"/>
           <p:nvPr/>
         </p:nvSpPr>
         <p:spPr>
           <a:xfrm>
-            <a:off x="8366760" y="1737360"/>
-            <a:ext cx="3291840" cy="457200"/>
+            <a:off x="8366760" y="1581912"/>
+            <a:ext cx="3291840" cy="411480"/>
           </a:xfrm>
           <a:prstGeom prst="rect">
             <a:avLst/>
@@ -6012,14 +7262,14 @@
       </p:sp>
       <p:sp>
         <p:nvSpPr>
-          <p:cNvPr id="13" name="TextBox 12"/>
+          <p:cNvPr id="15" name="TextBox 14"/>
           <p:cNvSpPr txBox="1"/>
           <p:nvPr/>
         </p:nvSpPr>
         <p:spPr>
           <a:xfrm>
-            <a:off x="8366760" y="2240280"/>
-            <a:ext cx="3291840" cy="1280160"/>
+            <a:off x="8366760" y="2057400"/>
+            <a:ext cx="3291840" cy="1325880"/>
           </a:xfrm>
           <a:prstGeom prst="rect">
             <a:avLst/>
@@ -6045,20 +7295,20 @@
                 <a:latin typeface="Microsoft YaHei"/>
                 <a:ea typeface="Microsoft YaHei"/>
               </a:rPr>
-              <a:t>根骨、心性、功法、丹藥、法寶、心事、記憶、關係。</a:t>
-            </a:r>
-          </a:p>
-        </p:txBody>
-      </p:sp>
-      <p:sp>
-        <p:nvSpPr>
-          <p:cNvPr id="14" name="Rounded Rectangle 13"/>
+              <a:t>根骨、心性、功法、丹藥、法寶、心事、記憶、關係。開場畫像即見。</a:t>
+            </a:r>
+          </a:p>
+        </p:txBody>
+      </p:sp>
+      <p:sp>
+        <p:nvSpPr>
+          <p:cNvPr id="16" name="Rounded Rectangle 15"/>
           <p:cNvSpPr/>
           <p:nvPr/>
         </p:nvSpPr>
         <p:spPr>
           <a:xfrm>
-            <a:off x="502920" y="3886200"/>
+            <a:off x="502920" y="3749039"/>
             <a:ext cx="3657600" cy="2148840"/>
           </a:xfrm>
           <a:prstGeom prst="roundRect">
@@ -6097,14 +7347,14 @@
       </p:sp>
       <p:sp>
         <p:nvSpPr>
-          <p:cNvPr id="15" name="TextBox 14"/>
+          <p:cNvPr id="17" name="TextBox 16"/>
           <p:cNvSpPr txBox="1"/>
           <p:nvPr/>
         </p:nvSpPr>
         <p:spPr>
           <a:xfrm>
-            <a:off x="685800" y="4069080"/>
-            <a:ext cx="3291840" cy="457200"/>
+            <a:off x="685800" y="3913631"/>
+            <a:ext cx="3291840" cy="411480"/>
           </a:xfrm>
           <a:prstGeom prst="rect">
             <a:avLst/>
@@ -6130,21 +7380,21 @@
                 <a:latin typeface="Microsoft YaHei"/>
                 <a:ea typeface="Microsoft YaHei"/>
               </a:rPr>
-              <a:t>天道三鍵</a:t>
-            </a:r>
-          </a:p>
-        </p:txBody>
-      </p:sp>
-      <p:sp>
-        <p:nvSpPr>
-          <p:cNvPr id="16" name="TextBox 15"/>
+              <a:t>天道四鍵</a:t>
+            </a:r>
+          </a:p>
+        </p:txBody>
+      </p:sp>
+      <p:sp>
+        <p:nvSpPr>
+          <p:cNvPr id="18" name="TextBox 17"/>
           <p:cNvSpPr txBox="1"/>
           <p:nvPr/>
         </p:nvSpPr>
         <p:spPr>
           <a:xfrm>
-            <a:off x="685800" y="4572000"/>
-            <a:ext cx="3291840" cy="1280160"/>
+            <a:off x="685800" y="4389119"/>
+            <a:ext cx="3291840" cy="1325880"/>
           </a:xfrm>
           <a:prstGeom prst="rect">
             <a:avLst/>
@@ -6170,20 +7420,20 @@
                 <a:latin typeface="Microsoft YaHei"/>
                 <a:ea typeface="Microsoft YaHei"/>
               </a:rPr>
-              <a:t>賜福、天劫、心魔。再加指派。業力唔夠就唔好亂改。</a:t>
-            </a:r>
-          </a:p>
-        </p:txBody>
-      </p:sp>
-      <p:sp>
-        <p:nvSpPr>
-          <p:cNvPr id="17" name="Rounded Rectangle 16"/>
+              <a:t>賜福八氣運、天劫十二、心魔十、指派三。氣運唔夠就唔好亂改。</a:t>
+            </a:r>
+          </a:p>
+        </p:txBody>
+      </p:sp>
+      <p:sp>
+        <p:nvSpPr>
+          <p:cNvPr id="19" name="Rounded Rectangle 18"/>
           <p:cNvSpPr/>
           <p:nvPr/>
         </p:nvSpPr>
         <p:spPr>
           <a:xfrm>
-            <a:off x="4343400" y="3886200"/>
+            <a:off x="4343400" y="3749039"/>
             <a:ext cx="3657600" cy="2148840"/>
           </a:xfrm>
           <a:prstGeom prst="roundRect">
@@ -6222,14 +7472,14 @@
       </p:sp>
       <p:sp>
         <p:nvSpPr>
-          <p:cNvPr id="18" name="TextBox 17"/>
+          <p:cNvPr id="20" name="TextBox 19"/>
           <p:cNvSpPr txBox="1"/>
           <p:nvPr/>
         </p:nvSpPr>
         <p:spPr>
           <a:xfrm>
-            <a:off x="4526280" y="4069080"/>
-            <a:ext cx="3291840" cy="457200"/>
+            <a:off x="4526280" y="3913631"/>
+            <a:ext cx="3291840" cy="411480"/>
           </a:xfrm>
           <a:prstGeom prst="rect">
             <a:avLst/>
@@ -6255,21 +7505,21 @@
                 <a:latin typeface="Microsoft YaHei"/>
                 <a:ea typeface="Microsoft YaHei"/>
               </a:rPr>
-              <a:t>世家傳承</a:t>
-            </a:r>
-          </a:p>
-        </p:txBody>
-      </p:sp>
-      <p:sp>
-        <p:nvSpPr>
-          <p:cNvPr id="19" name="TextBox 18"/>
+              <a:t>家族傳承</a:t>
+            </a:r>
+          </a:p>
+        </p:txBody>
+      </p:sp>
+      <p:sp>
+        <p:nvSpPr>
+          <p:cNvPr id="21" name="TextBox 20"/>
           <p:cNvSpPr txBox="1"/>
           <p:nvPr/>
         </p:nvSpPr>
         <p:spPr>
           <a:xfrm>
-            <a:off x="4526280" y="4572000"/>
-            <a:ext cx="3291840" cy="1280160"/>
+            <a:off x="4526280" y="4389119"/>
+            <a:ext cx="3291840" cy="1325880"/>
           </a:xfrm>
           <a:prstGeom prst="rect">
             <a:avLst/>
@@ -6295,20 +7545,20 @@
                 <a:latin typeface="Microsoft YaHei"/>
                 <a:ea typeface="Microsoft YaHei"/>
               </a:rPr>
-              <a:t>家訓、老祖突破、三選 N 天賦。金丹元嬰有金光。</a:t>
-            </a:r>
-          </a:p>
-        </p:txBody>
-      </p:sp>
-      <p:sp>
-        <p:nvSpPr>
-          <p:cNvPr id="20" name="Rounded Rectangle 19"/>
+              <a:t>家訓、老祖突破、三選一天賦。金丹元嬰有金光。老祖唔會死。</a:t>
+            </a:r>
+          </a:p>
+        </p:txBody>
+      </p:sp>
+      <p:sp>
+        <p:nvSpPr>
+          <p:cNvPr id="22" name="Rounded Rectangle 21"/>
           <p:cNvSpPr/>
           <p:nvPr/>
         </p:nvSpPr>
         <p:spPr>
           <a:xfrm>
-            <a:off x="8183880" y="3886200"/>
+            <a:off x="8183880" y="3749039"/>
             <a:ext cx="3657600" cy="2148840"/>
           </a:xfrm>
           <a:prstGeom prst="roundRect">
@@ -6347,14 +7597,14 @@
       </p:sp>
       <p:sp>
         <p:nvSpPr>
-          <p:cNvPr id="21" name="TextBox 20"/>
+          <p:cNvPr id="23" name="TextBox 22"/>
           <p:cNvSpPr txBox="1"/>
           <p:nvPr/>
         </p:nvSpPr>
         <p:spPr>
           <a:xfrm>
-            <a:off x="8366760" y="4069080"/>
-            <a:ext cx="3291840" cy="457200"/>
+            <a:off x="8366760" y="3913631"/>
+            <a:ext cx="3291840" cy="411480"/>
           </a:xfrm>
           <a:prstGeom prst="rect">
             <a:avLst/>
@@ -6380,21 +7630,21 @@
                 <a:latin typeface="Microsoft YaHei"/>
                 <a:ea typeface="Microsoft YaHei"/>
               </a:rPr>
-              <a:t>山門誌</a:t>
-            </a:r>
-          </a:p>
-        </p:txBody>
-      </p:sp>
-      <p:sp>
-        <p:nvSpPr>
-          <p:cNvPr id="22" name="TextBox 21"/>
+              <a:t>事件流</a:t>
+            </a:r>
+          </a:p>
+        </p:txBody>
+      </p:sp>
+      <p:sp>
+        <p:nvSpPr>
+          <p:cNvPr id="24" name="TextBox 23"/>
           <p:cNvSpPr txBox="1"/>
           <p:nvPr/>
         </p:nvSpPr>
         <p:spPr>
           <a:xfrm>
-            <a:off x="8366760" y="4572000"/>
-            <a:ext cx="3291840" cy="1280160"/>
+            <a:off x="8366760" y="4389119"/>
+            <a:ext cx="3291840" cy="1325880"/>
           </a:xfrm>
           <a:prstGeom prst="rect">
             <a:avLst/>
@@ -6545,8 +7795,8 @@
         </p:nvSpPr>
         <p:spPr>
           <a:xfrm>
-            <a:off x="640080" y="274320"/>
-            <a:ext cx="10972800" cy="777240"/>
+            <a:off x="502920" y="6473952"/>
+            <a:ext cx="7498079" cy="256032"/>
           </a:xfrm>
           <a:prstGeom prst="rect">
             <a:avLst/>
@@ -6565,6 +7815,86 @@
               </a:spcAft>
             </a:pPr>
             <a:r>
+              <a:rPr sz="1100" b="0">
+                <a:solidFill>
+                  <a:srgbClr val="B8A888"/>
+                </a:solidFill>
+                <a:latin typeface="Microsoft YaHei"/>
+                <a:ea typeface="Microsoft YaHei"/>
+              </a:rPr>
+              <a:t>教父世家  ·  THE FAMILY</a:t>
+            </a:r>
+          </a:p>
+        </p:txBody>
+      </p:sp>
+      <p:sp>
+        <p:nvSpPr>
+          <p:cNvPr id="5" name="TextBox 4"/>
+          <p:cNvSpPr txBox="1"/>
+          <p:nvPr/>
+        </p:nvSpPr>
+        <p:spPr>
+          <a:xfrm>
+            <a:off x="9509760" y="6473952"/>
+            <a:ext cx="2103120" cy="256032"/>
+          </a:xfrm>
+          <a:prstGeom prst="rect">
+            <a:avLst/>
+          </a:prstGeom>
+          <a:noFill/>
+        </p:spPr>
+        <p:txBody>
+          <a:bodyPr wrap="square">
+            <a:spAutoFit/>
+          </a:bodyPr>
+          <a:lstStyle/>
+          <a:p>
+            <a:pPr algn="r">
+              <a:spcAft>
+                <a:spcPts val="600"/>
+              </a:spcAft>
+            </a:pPr>
+            <a:r>
+              <a:rPr sz="1100" b="0">
+                <a:solidFill>
+                  <a:srgbClr val="B8A888"/>
+                </a:solidFill>
+                <a:latin typeface="Microsoft YaHei"/>
+                <a:ea typeface="Microsoft YaHei"/>
+              </a:rPr>
+              <a:t>04  /  11</a:t>
+            </a:r>
+          </a:p>
+        </p:txBody>
+      </p:sp>
+      <p:sp>
+        <p:nvSpPr>
+          <p:cNvPr id="6" name="TextBox 5"/>
+          <p:cNvSpPr txBox="1"/>
+          <p:nvPr/>
+        </p:nvSpPr>
+        <p:spPr>
+          <a:xfrm>
+            <a:off x="640080" y="237744"/>
+            <a:ext cx="10972800" cy="777240"/>
+          </a:xfrm>
+          <a:prstGeom prst="rect">
+            <a:avLst/>
+          </a:prstGeom>
+          <a:noFill/>
+        </p:spPr>
+        <p:txBody>
+          <a:bodyPr wrap="square">
+            <a:spAutoFit/>
+          </a:bodyPr>
+          <a:lstStyle/>
+          <a:p>
+            <a:pPr algn="l">
+              <a:spcAft>
+                <a:spcPts val="600"/>
+              </a:spcAft>
+            </a:pPr>
+            <a:r>
               <a:rPr sz="1400" b="0">
                 <a:solidFill>
                   <a:srgbClr val="D4AF37"/>
@@ -6589,20 +7919,20 @@
                 <a:latin typeface="Microsoft YaHei"/>
                 <a:ea typeface="Microsoft YaHei"/>
               </a:rPr>
-              <a:t>開局六人，各有根骨、心性、心事</a:t>
-            </a:r>
-          </a:p>
-        </p:txBody>
-      </p:sp>
-      <p:sp>
-        <p:nvSpPr>
-          <p:cNvPr id="5" name="Rounded Rectangle 4"/>
+              <a:t>開局六人 · 畫像已捆進遊戲</a:t>
+            </a:r>
+          </a:p>
+        </p:txBody>
+      </p:sp>
+      <p:sp>
+        <p:nvSpPr>
+          <p:cNvPr id="7" name="Rounded Rectangle 6"/>
           <p:cNvSpPr/>
           <p:nvPr/>
         </p:nvSpPr>
         <p:spPr>
           <a:xfrm>
-            <a:off x="502920" y="1280160"/>
+            <a:off x="502920" y="1170432"/>
             <a:ext cx="3657600" cy="2286000"/>
           </a:xfrm>
           <a:prstGeom prst="roundRect">
@@ -6641,14 +7971,14 @@
       </p:sp>
       <p:sp>
         <p:nvSpPr>
-          <p:cNvPr id="6" name="TextBox 5"/>
+          <p:cNvPr id="8" name="TextBox 7"/>
           <p:cNvSpPr txBox="1"/>
           <p:nvPr/>
         </p:nvSpPr>
         <p:spPr>
           <a:xfrm>
-            <a:off x="704088" y="1508760"/>
-            <a:ext cx="3200400" cy="457200"/>
+            <a:off x="704088" y="1371600"/>
+            <a:ext cx="3200400" cy="438912"/>
           </a:xfrm>
           <a:prstGeom prst="rect">
             <a:avLst/>
@@ -6681,13 +8011,13 @@
       </p:sp>
       <p:sp>
         <p:nvSpPr>
-          <p:cNvPr id="7" name="TextBox 6"/>
+          <p:cNvPr id="9" name="TextBox 8"/>
           <p:cNvSpPr txBox="1"/>
           <p:nvPr/>
         </p:nvSpPr>
         <p:spPr>
           <a:xfrm>
-            <a:off x="704088" y="2057400"/>
+            <a:off x="704088" y="1883664"/>
             <a:ext cx="3200400" cy="365760"/>
           </a:xfrm>
           <a:prstGeom prst="rect">
@@ -6714,21 +8044,21 @@
                 <a:latin typeface="Microsoft YaHei"/>
                 <a:ea typeface="Microsoft YaHei"/>
               </a:rPr>
-              <a:t>老祖 · 金丹後期</a:t>
-            </a:r>
-          </a:p>
-        </p:txBody>
-      </p:sp>
-      <p:sp>
-        <p:nvSpPr>
-          <p:cNvPr id="8" name="TextBox 7"/>
+              <a:t>老祖 · 《青嵐吐納訣》</a:t>
+            </a:r>
+          </a:p>
+        </p:txBody>
+      </p:sp>
+      <p:sp>
+        <p:nvSpPr>
+          <p:cNvPr id="10" name="TextBox 9"/>
           <p:cNvSpPr txBox="1"/>
           <p:nvPr/>
         </p:nvSpPr>
         <p:spPr>
           <a:xfrm>
-            <a:off x="704088" y="2514600"/>
-            <a:ext cx="3200400" cy="777240"/>
+            <a:off x="704088" y="2340864"/>
+            <a:ext cx="3200400" cy="822960"/>
           </a:xfrm>
           <a:prstGeom prst="rect">
             <a:avLst/>
@@ -6761,13 +8091,13 @@
       </p:sp>
       <p:sp>
         <p:nvSpPr>
-          <p:cNvPr id="9" name="Rounded Rectangle 8"/>
+          <p:cNvPr id="11" name="Rounded Rectangle 10"/>
           <p:cNvSpPr/>
           <p:nvPr/>
         </p:nvSpPr>
         <p:spPr>
           <a:xfrm>
-            <a:off x="4343400" y="1280160"/>
+            <a:off x="4343400" y="1170432"/>
             <a:ext cx="3657600" cy="2286000"/>
           </a:xfrm>
           <a:prstGeom prst="roundRect">
@@ -6806,14 +8136,14 @@
       </p:sp>
       <p:sp>
         <p:nvSpPr>
-          <p:cNvPr id="10" name="TextBox 9"/>
+          <p:cNvPr id="12" name="TextBox 11"/>
           <p:cNvSpPr txBox="1"/>
           <p:nvPr/>
         </p:nvSpPr>
         <p:spPr>
           <a:xfrm>
-            <a:off x="4544568" y="1508760"/>
-            <a:ext cx="3200400" cy="457200"/>
+            <a:off x="4544568" y="1371600"/>
+            <a:ext cx="3200400" cy="438912"/>
           </a:xfrm>
           <a:prstGeom prst="rect">
             <a:avLst/>
@@ -6846,13 +8176,13 @@
       </p:sp>
       <p:sp>
         <p:nvSpPr>
-          <p:cNvPr id="11" name="TextBox 10"/>
+          <p:cNvPr id="13" name="TextBox 12"/>
           <p:cNvSpPr txBox="1"/>
           <p:nvPr/>
         </p:nvSpPr>
         <p:spPr>
           <a:xfrm>
-            <a:off x="4544568" y="2057400"/>
+            <a:off x="4544568" y="1883664"/>
             <a:ext cx="3200400" cy="365760"/>
           </a:xfrm>
           <a:prstGeom prst="rect">
@@ -6879,21 +8209,21 @@
                 <a:latin typeface="Microsoft YaHei"/>
                 <a:ea typeface="Microsoft YaHei"/>
               </a:rPr>
-              <a:t>長女 · 金丹初期</a:t>
-            </a:r>
-          </a:p>
-        </p:txBody>
-      </p:sp>
-      <p:sp>
-        <p:nvSpPr>
-          <p:cNvPr id="12" name="TextBox 11"/>
+              <a:t>長老 · 穩、顧家</a:t>
+            </a:r>
+          </a:p>
+        </p:txBody>
+      </p:sp>
+      <p:sp>
+        <p:nvSpPr>
+          <p:cNvPr id="14" name="TextBox 13"/>
           <p:cNvSpPr txBox="1"/>
           <p:nvPr/>
         </p:nvSpPr>
         <p:spPr>
           <a:xfrm>
-            <a:off x="4544568" y="2514600"/>
-            <a:ext cx="3200400" cy="777240"/>
+            <a:off x="4544568" y="2340864"/>
+            <a:ext cx="3200400" cy="822960"/>
           </a:xfrm>
           <a:prstGeom prst="rect">
             <a:avLst/>
@@ -6919,20 +8249,20 @@
                 <a:latin typeface="Microsoft YaHei"/>
                 <a:ea typeface="Microsoft YaHei"/>
               </a:rPr>
-              <a:t>穩陣、顧家、會頂老祖。</a:t>
-            </a:r>
-          </a:p>
-        </p:txBody>
-      </p:sp>
-      <p:sp>
-        <p:nvSpPr>
-          <p:cNvPr id="13" name="Rounded Rectangle 12"/>
+              <a:t>會頂老祖，家要先立住。</a:t>
+            </a:r>
+          </a:p>
+        </p:txBody>
+      </p:sp>
+      <p:sp>
+        <p:nvSpPr>
+          <p:cNvPr id="15" name="Rounded Rectangle 14"/>
           <p:cNvSpPr/>
           <p:nvPr/>
         </p:nvSpPr>
         <p:spPr>
           <a:xfrm>
-            <a:off x="8183880" y="1280160"/>
+            <a:off x="8183880" y="1170432"/>
             <a:ext cx="3657600" cy="2286000"/>
           </a:xfrm>
           <a:prstGeom prst="roundRect">
@@ -6971,14 +8301,14 @@
       </p:sp>
       <p:sp>
         <p:nvSpPr>
-          <p:cNvPr id="14" name="TextBox 13"/>
+          <p:cNvPr id="16" name="TextBox 15"/>
           <p:cNvSpPr txBox="1"/>
           <p:nvPr/>
         </p:nvSpPr>
         <p:spPr>
           <a:xfrm>
-            <a:off x="8385048" y="1508760"/>
-            <a:ext cx="3200400" cy="457200"/>
+            <a:off x="8385048" y="1371600"/>
+            <a:ext cx="3200400" cy="438912"/>
           </a:xfrm>
           <a:prstGeom prst="rect">
             <a:avLst/>
@@ -7011,13 +8341,13 @@
       </p:sp>
       <p:sp>
         <p:nvSpPr>
-          <p:cNvPr id="15" name="TextBox 14"/>
+          <p:cNvPr id="17" name="TextBox 16"/>
           <p:cNvSpPr txBox="1"/>
           <p:nvPr/>
         </p:nvSpPr>
         <p:spPr>
           <a:xfrm>
-            <a:off x="8385048" y="2057400"/>
+            <a:off x="8385048" y="1883664"/>
             <a:ext cx="3200400" cy="365760"/>
           </a:xfrm>
           <a:prstGeom prst="rect">
@@ -7044,21 +8374,21 @@
                 <a:latin typeface="Microsoft YaHei"/>
                 <a:ea typeface="Microsoft YaHei"/>
               </a:rPr>
-              <a:t>二代 · 築基</a:t>
-            </a:r>
-          </a:p>
-        </p:txBody>
-      </p:sp>
-      <p:sp>
-        <p:nvSpPr>
-          <p:cNvPr id="16" name="TextBox 15"/>
+              <a:t>二代 · 冷、準</a:t>
+            </a:r>
+          </a:p>
+        </p:txBody>
+      </p:sp>
+      <p:sp>
+        <p:nvSpPr>
+          <p:cNvPr id="18" name="TextBox 17"/>
           <p:cNvSpPr txBox="1"/>
           <p:nvPr/>
         </p:nvSpPr>
         <p:spPr>
           <a:xfrm>
-            <a:off x="8385048" y="2514600"/>
-            <a:ext cx="3200400" cy="777240"/>
+            <a:off x="8385048" y="2340864"/>
+            <a:ext cx="3200400" cy="822960"/>
           </a:xfrm>
           <a:prstGeom prst="rect">
             <a:avLst/>
@@ -7084,20 +8414,20 @@
                 <a:latin typeface="Microsoft YaHei"/>
                 <a:ea typeface="Microsoft YaHei"/>
               </a:rPr>
-              <a:t>冷、準、同清梧有舊怨。</a:t>
-            </a:r>
-          </a:p>
-        </p:txBody>
-      </p:sp>
-      <p:sp>
-        <p:nvSpPr>
-          <p:cNvPr id="17" name="Rounded Rectangle 16"/>
+              <a:t>同清梧有舊怨，戲先有衝突。</a:t>
+            </a:r>
+          </a:p>
+        </p:txBody>
+      </p:sp>
+      <p:sp>
+        <p:nvSpPr>
+          <p:cNvPr id="19" name="Rounded Rectangle 18"/>
           <p:cNvSpPr/>
           <p:nvPr/>
         </p:nvSpPr>
         <p:spPr>
           <a:xfrm>
-            <a:off x="502920" y="3749039"/>
+            <a:off x="502920" y="3639312"/>
             <a:ext cx="3657600" cy="2286000"/>
           </a:xfrm>
           <a:prstGeom prst="roundRect">
@@ -7136,14 +8466,14 @@
       </p:sp>
       <p:sp>
         <p:nvSpPr>
-          <p:cNvPr id="18" name="TextBox 17"/>
+          <p:cNvPr id="20" name="TextBox 19"/>
           <p:cNvSpPr txBox="1"/>
           <p:nvPr/>
         </p:nvSpPr>
         <p:spPr>
           <a:xfrm>
-            <a:off x="704088" y="3977639"/>
-            <a:ext cx="3200400" cy="457200"/>
+            <a:off x="704088" y="3840480"/>
+            <a:ext cx="3200400" cy="438912"/>
           </a:xfrm>
           <a:prstGeom prst="rect">
             <a:avLst/>
@@ -7176,13 +8506,13 @@
       </p:sp>
       <p:sp>
         <p:nvSpPr>
-          <p:cNvPr id="19" name="TextBox 18"/>
+          <p:cNvPr id="21" name="TextBox 20"/>
           <p:cNvSpPr txBox="1"/>
           <p:nvPr/>
         </p:nvSpPr>
         <p:spPr>
           <a:xfrm>
-            <a:off x="704088" y="4526279"/>
+            <a:off x="704088" y="4352544"/>
             <a:ext cx="3200400" cy="365760"/>
           </a:xfrm>
           <a:prstGeom prst="rect">
@@ -7209,21 +8539,21 @@
                 <a:latin typeface="Microsoft YaHei"/>
                 <a:ea typeface="Microsoft YaHei"/>
               </a:rPr>
-              <a:t>外門 · 築基</a:t>
-            </a:r>
-          </a:p>
-        </p:txBody>
-      </p:sp>
-      <p:sp>
-        <p:nvSpPr>
-          <p:cNvPr id="20" name="TextBox 19"/>
+              <a:t>外來 · 身世成謎</a:t>
+            </a:r>
+          </a:p>
+        </p:txBody>
+      </p:sp>
+      <p:sp>
+        <p:nvSpPr>
+          <p:cNvPr id="22" name="TextBox 21"/>
           <p:cNvSpPr txBox="1"/>
           <p:nvPr/>
         </p:nvSpPr>
         <p:spPr>
           <a:xfrm>
-            <a:off x="704088" y="4983479"/>
-            <a:ext cx="3200400" cy="777240"/>
+            <a:off x="704088" y="4809744"/>
+            <a:ext cx="3200400" cy="822960"/>
           </a:xfrm>
           <a:prstGeom prst="rect">
             <a:avLst/>
@@ -7249,20 +8579,20 @@
                 <a:latin typeface="Microsoft YaHei"/>
                 <a:ea typeface="Microsoft YaHei"/>
               </a:rPr>
-              <a:t>散修入贅，身世成謎。</a:t>
-            </a:r>
-          </a:p>
-        </p:txBody>
-      </p:sp>
-      <p:sp>
-        <p:nvSpPr>
-          <p:cNvPr id="21" name="Rounded Rectangle 20"/>
+              <a:t>散修入譜，笑意難測。</a:t>
+            </a:r>
+          </a:p>
+        </p:txBody>
+      </p:sp>
+      <p:sp>
+        <p:nvSpPr>
+          <p:cNvPr id="23" name="Rounded Rectangle 22"/>
           <p:cNvSpPr/>
           <p:nvPr/>
         </p:nvSpPr>
         <p:spPr>
           <a:xfrm>
-            <a:off x="4343400" y="3749039"/>
+            <a:off x="4343400" y="3639312"/>
             <a:ext cx="3657600" cy="2286000"/>
           </a:xfrm>
           <a:prstGeom prst="roundRect">
@@ -7301,14 +8631,14 @@
       </p:sp>
       <p:sp>
         <p:nvSpPr>
-          <p:cNvPr id="22" name="TextBox 21"/>
+          <p:cNvPr id="24" name="TextBox 23"/>
           <p:cNvSpPr txBox="1"/>
           <p:nvPr/>
         </p:nvSpPr>
         <p:spPr>
           <a:xfrm>
-            <a:off x="4544568" y="3977639"/>
-            <a:ext cx="3200400" cy="457200"/>
+            <a:off x="4544568" y="3840480"/>
+            <a:ext cx="3200400" cy="438912"/>
           </a:xfrm>
           <a:prstGeom prst="rect">
             <a:avLst/>
@@ -7341,13 +8671,13 @@
       </p:sp>
       <p:sp>
         <p:nvSpPr>
-          <p:cNvPr id="23" name="TextBox 22"/>
+          <p:cNvPr id="25" name="TextBox 24"/>
           <p:cNvSpPr txBox="1"/>
           <p:nvPr/>
         </p:nvSpPr>
         <p:spPr>
           <a:xfrm>
-            <a:off x="4544568" y="4526279"/>
+            <a:off x="4544568" y="4352544"/>
             <a:ext cx="3200400" cy="365760"/>
           </a:xfrm>
           <a:prstGeom prst="rect">
@@ -7374,21 +8704,21 @@
                 <a:latin typeface="Microsoft YaHei"/>
                 <a:ea typeface="Microsoft YaHei"/>
               </a:rPr>
-              <a:t>雜役 · 煉氣</a:t>
-            </a:r>
-          </a:p>
-        </p:txBody>
-      </p:sp>
-      <p:sp>
-        <p:nvSpPr>
-          <p:cNvPr id="24" name="TextBox 23"/>
+              <a:t>丹房 · 貪生識時務</a:t>
+            </a:r>
+          </a:p>
+        </p:txBody>
+      </p:sp>
+      <p:sp>
+        <p:nvSpPr>
+          <p:cNvPr id="26" name="TextBox 25"/>
           <p:cNvSpPr txBox="1"/>
           <p:nvPr/>
         </p:nvSpPr>
         <p:spPr>
           <a:xfrm>
-            <a:off x="4544568" y="4983479"/>
-            <a:ext cx="3200400" cy="777240"/>
+            <a:off x="4544568" y="4809744"/>
+            <a:ext cx="3200400" cy="822960"/>
           </a:xfrm>
           <a:prstGeom prst="rect">
             <a:avLst/>
@@ -7414,20 +8744,20 @@
                 <a:latin typeface="Microsoft YaHei"/>
                 <a:ea typeface="Microsoft YaHei"/>
               </a:rPr>
-              <a:t>貪生、識時務、會偷雞。</a:t>
-            </a:r>
-          </a:p>
-        </p:txBody>
-      </p:sp>
-      <p:sp>
-        <p:nvSpPr>
-          <p:cNvPr id="25" name="Rounded Rectangle 24"/>
+              <a:t>會偷雞，亦會留低嚟。</a:t>
+            </a:r>
+          </a:p>
+        </p:txBody>
+      </p:sp>
+      <p:sp>
+        <p:nvSpPr>
+          <p:cNvPr id="27" name="Rounded Rectangle 26"/>
           <p:cNvSpPr/>
           <p:nvPr/>
         </p:nvSpPr>
         <p:spPr>
           <a:xfrm>
-            <a:off x="8183880" y="3749039"/>
+            <a:off x="8183880" y="3639312"/>
             <a:ext cx="3657600" cy="2286000"/>
           </a:xfrm>
           <a:prstGeom prst="roundRect">
@@ -7466,14 +8796,14 @@
       </p:sp>
       <p:sp>
         <p:nvSpPr>
-          <p:cNvPr id="26" name="TextBox 25"/>
+          <p:cNvPr id="28" name="TextBox 27"/>
           <p:cNvSpPr txBox="1"/>
           <p:nvPr/>
         </p:nvSpPr>
         <p:spPr>
           <a:xfrm>
-            <a:off x="8385048" y="3977639"/>
-            <a:ext cx="3200400" cy="457200"/>
+            <a:off x="8385048" y="3840480"/>
+            <a:ext cx="3200400" cy="438912"/>
           </a:xfrm>
           <a:prstGeom prst="rect">
             <a:avLst/>
@@ -7506,13 +8836,13 @@
       </p:sp>
       <p:sp>
         <p:nvSpPr>
-          <p:cNvPr id="27" name="TextBox 26"/>
+          <p:cNvPr id="29" name="TextBox 28"/>
           <p:cNvSpPr txBox="1"/>
           <p:nvPr/>
         </p:nvSpPr>
         <p:spPr>
           <a:xfrm>
-            <a:off x="8385048" y="4526279"/>
+            <a:off x="8385048" y="4352544"/>
             <a:ext cx="3200400" cy="365760"/>
           </a:xfrm>
           <a:prstGeom prst="rect">
@@ -7539,21 +8869,21 @@
                 <a:latin typeface="Microsoft YaHei"/>
                 <a:ea typeface="Microsoft YaHei"/>
               </a:rPr>
-              <a:t>記名 · 煉氣</a:t>
-            </a:r>
-          </a:p>
-        </p:txBody>
-      </p:sp>
-      <p:sp>
-        <p:nvSpPr>
-          <p:cNvPr id="28" name="TextBox 27"/>
+              <a:t>記名 · 細、靈</a:t>
+            </a:r>
+          </a:p>
+        </p:txBody>
+      </p:sp>
+      <p:sp>
+        <p:nvSpPr>
+          <p:cNvPr id="30" name="TextBox 29"/>
           <p:cNvSpPr txBox="1"/>
           <p:nvPr/>
         </p:nvSpPr>
         <p:spPr>
           <a:xfrm>
-            <a:off x="8385048" y="4983479"/>
-            <a:ext cx="3200400" cy="777240"/>
+            <a:off x="8385048" y="4809744"/>
+            <a:ext cx="3200400" cy="822960"/>
           </a:xfrm>
           <a:prstGeom prst="rect">
             <a:avLst/>
@@ -7579,7 +8909,7 @@
                 <a:latin typeface="Microsoft YaHei"/>
                 <a:ea typeface="Microsoft YaHei"/>
               </a:rPr>
-              <a:t>細、靈、成日問不該問嘅。</a:t>
+              <a:t>成日問不該問嘅嘢。</a:t>
             </a:r>
           </a:p>
         </p:txBody>
@@ -7704,8 +9034,8 @@
         </p:nvSpPr>
         <p:spPr>
           <a:xfrm>
-            <a:off x="640080" y="274320"/>
-            <a:ext cx="10972800" cy="777240"/>
+            <a:off x="502920" y="6473952"/>
+            <a:ext cx="7498079" cy="256032"/>
           </a:xfrm>
           <a:prstGeom prst="rect">
             <a:avLst/>
@@ -7724,6 +9054,86 @@
               </a:spcAft>
             </a:pPr>
             <a:r>
+              <a:rPr sz="1100" b="0">
+                <a:solidFill>
+                  <a:srgbClr val="B8A888"/>
+                </a:solidFill>
+                <a:latin typeface="Microsoft YaHei"/>
+                <a:ea typeface="Microsoft YaHei"/>
+              </a:rPr>
+              <a:t>教父世家  ·  THE FAMILY</a:t>
+            </a:r>
+          </a:p>
+        </p:txBody>
+      </p:sp>
+      <p:sp>
+        <p:nvSpPr>
+          <p:cNvPr id="5" name="TextBox 4"/>
+          <p:cNvSpPr txBox="1"/>
+          <p:nvPr/>
+        </p:nvSpPr>
+        <p:spPr>
+          <a:xfrm>
+            <a:off x="9509760" y="6473952"/>
+            <a:ext cx="2103120" cy="256032"/>
+          </a:xfrm>
+          <a:prstGeom prst="rect">
+            <a:avLst/>
+          </a:prstGeom>
+          <a:noFill/>
+        </p:spPr>
+        <p:txBody>
+          <a:bodyPr wrap="square">
+            <a:spAutoFit/>
+          </a:bodyPr>
+          <a:lstStyle/>
+          <a:p>
+            <a:pPr algn="r">
+              <a:spcAft>
+                <a:spcPts val="600"/>
+              </a:spcAft>
+            </a:pPr>
+            <a:r>
+              <a:rPr sz="1100" b="0">
+                <a:solidFill>
+                  <a:srgbClr val="B8A888"/>
+                </a:solidFill>
+                <a:latin typeface="Microsoft YaHei"/>
+                <a:ea typeface="Microsoft YaHei"/>
+              </a:rPr>
+              <a:t>05  /  11</a:t>
+            </a:r>
+          </a:p>
+        </p:txBody>
+      </p:sp>
+      <p:sp>
+        <p:nvSpPr>
+          <p:cNvPr id="6" name="TextBox 5"/>
+          <p:cNvSpPr txBox="1"/>
+          <p:nvPr/>
+        </p:nvSpPr>
+        <p:spPr>
+          <a:xfrm>
+            <a:off x="640080" y="237744"/>
+            <a:ext cx="10972800" cy="777240"/>
+          </a:xfrm>
+          <a:prstGeom prst="rect">
+            <a:avLst/>
+          </a:prstGeom>
+          <a:noFill/>
+        </p:spPr>
+        <p:txBody>
+          <a:bodyPr wrap="square">
+            <a:spAutoFit/>
+          </a:bodyPr>
+          <a:lstStyle/>
+          <a:p>
+            <a:pPr algn="l">
+              <a:spcAft>
+                <a:spcPts val="600"/>
+              </a:spcAft>
+            </a:pPr>
+            <a:r>
               <a:rPr sz="1400" b="0">
                 <a:solidFill>
                   <a:srgbClr val="D4AF37"/>
@@ -7755,14 +9165,14 @@
       </p:sp>
       <p:sp>
         <p:nvSpPr>
-          <p:cNvPr id="5" name="Rounded Rectangle 4"/>
+          <p:cNvPr id="7" name="Rounded Rectangle 6"/>
           <p:cNvSpPr/>
           <p:nvPr/>
         </p:nvSpPr>
         <p:spPr>
           <a:xfrm>
-            <a:off x="502920" y="1280160"/>
-            <a:ext cx="3657600" cy="2331720"/>
+            <a:off x="502920" y="1170432"/>
+            <a:ext cx="3657600" cy="2194560"/>
           </a:xfrm>
           <a:prstGeom prst="roundRect">
             <a:avLst/>
@@ -7800,14 +9210,14 @@
       </p:sp>
       <p:sp>
         <p:nvSpPr>
-          <p:cNvPr id="6" name="TextBox 5"/>
+          <p:cNvPr id="8" name="TextBox 7"/>
           <p:cNvSpPr txBox="1"/>
           <p:nvPr/>
         </p:nvSpPr>
         <p:spPr>
           <a:xfrm>
-            <a:off x="685800" y="1417320"/>
-            <a:ext cx="3291840" cy="320040"/>
+            <a:off x="685800" y="1298448"/>
+            <a:ext cx="3291840" cy="292608"/>
           </a:xfrm>
           <a:prstGeom prst="rect">
             <a:avLst/>
@@ -7840,14 +9250,14 @@
       </p:sp>
       <p:sp>
         <p:nvSpPr>
-          <p:cNvPr id="7" name="TextBox 6"/>
+          <p:cNvPr id="9" name="TextBox 8"/>
           <p:cNvSpPr txBox="1"/>
           <p:nvPr/>
         </p:nvSpPr>
         <p:spPr>
           <a:xfrm>
-            <a:off x="685800" y="1783080"/>
-            <a:ext cx="3291840" cy="457200"/>
+            <a:off x="685800" y="1627632"/>
+            <a:ext cx="3291840" cy="411480"/>
           </a:xfrm>
           <a:prstGeom prst="rect">
             <a:avLst/>
@@ -7880,13 +9290,13 @@
       </p:sp>
       <p:sp>
         <p:nvSpPr>
-          <p:cNvPr id="8" name="TextBox 7"/>
+          <p:cNvPr id="10" name="TextBox 9"/>
           <p:cNvSpPr txBox="1"/>
           <p:nvPr/>
         </p:nvSpPr>
         <p:spPr>
           <a:xfrm>
-            <a:off x="685800" y="2331720"/>
+            <a:off x="685800" y="2121408"/>
             <a:ext cx="3291840" cy="1005840"/>
           </a:xfrm>
           <a:prstGeom prst="rect">
@@ -7920,14 +9330,14 @@
       </p:sp>
       <p:sp>
         <p:nvSpPr>
-          <p:cNvPr id="9" name="Rounded Rectangle 8"/>
+          <p:cNvPr id="11" name="Rounded Rectangle 10"/>
           <p:cNvSpPr/>
           <p:nvPr/>
         </p:nvSpPr>
         <p:spPr>
           <a:xfrm>
-            <a:off x="4343400" y="1280160"/>
-            <a:ext cx="3657600" cy="2331720"/>
+            <a:off x="4343400" y="1170432"/>
+            <a:ext cx="3657600" cy="2194560"/>
           </a:xfrm>
           <a:prstGeom prst="roundRect">
             <a:avLst/>
@@ -7965,14 +9375,14 @@
       </p:sp>
       <p:sp>
         <p:nvSpPr>
-          <p:cNvPr id="10" name="TextBox 9"/>
+          <p:cNvPr id="12" name="TextBox 11"/>
           <p:cNvSpPr txBox="1"/>
           <p:nvPr/>
         </p:nvSpPr>
         <p:spPr>
           <a:xfrm>
-            <a:off x="4526280" y="1417320"/>
-            <a:ext cx="3291840" cy="320040"/>
+            <a:off x="4526280" y="1298448"/>
+            <a:ext cx="3291840" cy="292608"/>
           </a:xfrm>
           <a:prstGeom prst="rect">
             <a:avLst/>
@@ -8005,14 +9415,14 @@
       </p:sp>
       <p:sp>
         <p:nvSpPr>
-          <p:cNvPr id="11" name="TextBox 10"/>
+          <p:cNvPr id="13" name="TextBox 12"/>
           <p:cNvSpPr txBox="1"/>
           <p:nvPr/>
         </p:nvSpPr>
         <p:spPr>
           <a:xfrm>
-            <a:off x="4526280" y="1783080"/>
-            <a:ext cx="3291840" cy="457200"/>
+            <a:off x="4526280" y="1627632"/>
+            <a:ext cx="3291840" cy="411480"/>
           </a:xfrm>
           <a:prstGeom prst="rect">
             <a:avLst/>
@@ -8045,13 +9455,13 @@
       </p:sp>
       <p:sp>
         <p:nvSpPr>
-          <p:cNvPr id="12" name="TextBox 11"/>
+          <p:cNvPr id="14" name="TextBox 13"/>
           <p:cNvSpPr txBox="1"/>
           <p:nvPr/>
         </p:nvSpPr>
         <p:spPr>
           <a:xfrm>
-            <a:off x="4526280" y="2331720"/>
+            <a:off x="4526280" y="2121408"/>
             <a:ext cx="3291840" cy="1005840"/>
           </a:xfrm>
           <a:prstGeom prst="rect">
@@ -8085,14 +9495,14 @@
       </p:sp>
       <p:sp>
         <p:nvSpPr>
-          <p:cNvPr id="13" name="Rounded Rectangle 12"/>
+          <p:cNvPr id="15" name="Rounded Rectangle 14"/>
           <p:cNvSpPr/>
           <p:nvPr/>
         </p:nvSpPr>
         <p:spPr>
           <a:xfrm>
-            <a:off x="8183880" y="1280160"/>
-            <a:ext cx="3657600" cy="2331720"/>
+            <a:off x="8183880" y="1170432"/>
+            <a:ext cx="3657600" cy="2194560"/>
           </a:xfrm>
           <a:prstGeom prst="roundRect">
             <a:avLst/>
@@ -8130,14 +9540,14 @@
       </p:sp>
       <p:sp>
         <p:nvSpPr>
-          <p:cNvPr id="14" name="TextBox 13"/>
+          <p:cNvPr id="16" name="TextBox 15"/>
           <p:cNvSpPr txBox="1"/>
           <p:nvPr/>
         </p:nvSpPr>
         <p:spPr>
           <a:xfrm>
-            <a:off x="8366760" y="1417320"/>
-            <a:ext cx="3291840" cy="320040"/>
+            <a:off x="8366760" y="1298448"/>
+            <a:ext cx="3291840" cy="292608"/>
           </a:xfrm>
           <a:prstGeom prst="rect">
             <a:avLst/>
@@ -8170,14 +9580,14 @@
       </p:sp>
       <p:sp>
         <p:nvSpPr>
-          <p:cNvPr id="15" name="TextBox 14"/>
+          <p:cNvPr id="17" name="TextBox 16"/>
           <p:cNvSpPr txBox="1"/>
           <p:nvPr/>
         </p:nvSpPr>
         <p:spPr>
           <a:xfrm>
-            <a:off x="8366760" y="1783080"/>
-            <a:ext cx="3291840" cy="457200"/>
+            <a:off x="8366760" y="1627632"/>
+            <a:ext cx="3291840" cy="411480"/>
           </a:xfrm>
           <a:prstGeom prst="rect">
             <a:avLst/>
@@ -8210,13 +9620,13 @@
       </p:sp>
       <p:sp>
         <p:nvSpPr>
-          <p:cNvPr id="16" name="TextBox 15"/>
+          <p:cNvPr id="18" name="TextBox 17"/>
           <p:cNvSpPr txBox="1"/>
           <p:nvPr/>
         </p:nvSpPr>
         <p:spPr>
           <a:xfrm>
-            <a:off x="8366760" y="2331720"/>
+            <a:off x="8366760" y="2121408"/>
             <a:ext cx="3291840" cy="1005840"/>
           </a:xfrm>
           <a:prstGeom prst="rect">
@@ -8250,14 +9660,14 @@
       </p:sp>
       <p:sp>
         <p:nvSpPr>
-          <p:cNvPr id="17" name="Rounded Rectangle 16"/>
+          <p:cNvPr id="19" name="Rounded Rectangle 18"/>
           <p:cNvSpPr/>
           <p:nvPr/>
         </p:nvSpPr>
         <p:spPr>
           <a:xfrm>
-            <a:off x="502920" y="3794760"/>
-            <a:ext cx="11155680" cy="2468880"/>
+            <a:off x="502920" y="3566160"/>
+            <a:ext cx="11155680" cy="2606040"/>
           </a:xfrm>
           <a:prstGeom prst="roundRect">
             <a:avLst/>
@@ -8295,14 +9705,14 @@
       </p:sp>
       <p:sp>
         <p:nvSpPr>
-          <p:cNvPr id="18" name="TextBox 17"/>
+          <p:cNvPr id="20" name="TextBox 19"/>
           <p:cNvSpPr txBox="1"/>
           <p:nvPr/>
         </p:nvSpPr>
         <p:spPr>
           <a:xfrm>
-            <a:off x="731520" y="3977639"/>
-            <a:ext cx="10698480" cy="2103120"/>
+            <a:off x="731520" y="3730752"/>
+            <a:ext cx="10698480" cy="2286000"/>
           </a:xfrm>
           <a:prstGeom prst="rect">
             <a:avLst/>
@@ -8345,7 +9755,7 @@
                 <a:latin typeface="Microsoft YaHei"/>
                 <a:ea typeface="Microsoft YaHei"/>
               </a:rPr>
-              <a:t>有 Key：OpenRouter 用你揀嘅免費模型寫場面、對白、長線。Key 只喺你部瀏覽器。</a:t>
+              <a:t>有 Key：文字預設 openrouter/free。編劇喺背景無限連載，冷卻更短。Key 只喺瀏覽器。</a:t>
             </a:r>
           </a:p>
           <a:p>
@@ -8379,7 +9789,7 @@
                 <a:latin typeface="Microsoft YaHei"/>
                 <a:ea typeface="Microsoft YaHei"/>
               </a:rPr>
-              <a:t>戲會寫入心事同關係，再影響下個月邊個去邊、同邊個結怨。</a:t>
+              <a:t>致敬結構同主題，唔抄電影對白，唔抄電影人名。戲會寫入心事同關係。</a:t>
             </a:r>
           </a:p>
         </p:txBody>
@@ -8504,8 +9914,8 @@
         </p:nvSpPr>
         <p:spPr>
           <a:xfrm>
-            <a:off x="640080" y="274320"/>
-            <a:ext cx="10972800" cy="777240"/>
+            <a:off x="502920" y="6473952"/>
+            <a:ext cx="7498079" cy="256032"/>
           </a:xfrm>
           <a:prstGeom prst="rect">
             <a:avLst/>
@@ -8524,6 +9934,86 @@
               </a:spcAft>
             </a:pPr>
             <a:r>
+              <a:rPr sz="1100" b="0">
+                <a:solidFill>
+                  <a:srgbClr val="B8A888"/>
+                </a:solidFill>
+                <a:latin typeface="Microsoft YaHei"/>
+                <a:ea typeface="Microsoft YaHei"/>
+              </a:rPr>
+              <a:t>教父世家  ·  THE FAMILY</a:t>
+            </a:r>
+          </a:p>
+        </p:txBody>
+      </p:sp>
+      <p:sp>
+        <p:nvSpPr>
+          <p:cNvPr id="5" name="TextBox 4"/>
+          <p:cNvSpPr txBox="1"/>
+          <p:nvPr/>
+        </p:nvSpPr>
+        <p:spPr>
+          <a:xfrm>
+            <a:off x="9509760" y="6473952"/>
+            <a:ext cx="2103120" cy="256032"/>
+          </a:xfrm>
+          <a:prstGeom prst="rect">
+            <a:avLst/>
+          </a:prstGeom>
+          <a:noFill/>
+        </p:spPr>
+        <p:txBody>
+          <a:bodyPr wrap="square">
+            <a:spAutoFit/>
+          </a:bodyPr>
+          <a:lstStyle/>
+          <a:p>
+            <a:pPr algn="r">
+              <a:spcAft>
+                <a:spcPts val="600"/>
+              </a:spcAft>
+            </a:pPr>
+            <a:r>
+              <a:rPr sz="1100" b="0">
+                <a:solidFill>
+                  <a:srgbClr val="B8A888"/>
+                </a:solidFill>
+                <a:latin typeface="Microsoft YaHei"/>
+                <a:ea typeface="Microsoft YaHei"/>
+              </a:rPr>
+              <a:t>06  /  11</a:t>
+            </a:r>
+          </a:p>
+        </p:txBody>
+      </p:sp>
+      <p:sp>
+        <p:nvSpPr>
+          <p:cNvPr id="6" name="TextBox 5"/>
+          <p:cNvSpPr txBox="1"/>
+          <p:nvPr/>
+        </p:nvSpPr>
+        <p:spPr>
+          <a:xfrm>
+            <a:off x="640080" y="237744"/>
+            <a:ext cx="10972800" cy="777240"/>
+          </a:xfrm>
+          <a:prstGeom prst="rect">
+            <a:avLst/>
+          </a:prstGeom>
+          <a:noFill/>
+        </p:spPr>
+        <p:txBody>
+          <a:bodyPr wrap="square">
+            <a:spAutoFit/>
+          </a:bodyPr>
+          <a:lstStyle/>
+          <a:p>
+            <a:pPr algn="l">
+              <a:spcAft>
+                <a:spcPts val="600"/>
+              </a:spcAft>
+            </a:pPr>
+            <a:r>
               <a:rPr sz="1400" b="0">
                 <a:solidFill>
                   <a:srgbClr val="D4AF37"/>
@@ -8531,7 +10021,7 @@
                 <a:latin typeface="Microsoft YaHei"/>
                 <a:ea typeface="Microsoft YaHei"/>
               </a:rPr>
-              <a:t>05  ·  金漆山門，現場聲畫</a:t>
+              <a:t>05  ·  畫面永遠有人</a:t>
             </a:r>
           </a:p>
           <a:p>
@@ -8541,28 +10031,28 @@
               </a:spcAft>
             </a:pPr>
             <a:r>
-              <a:rPr sz="2600" b="1">
+              <a:rPr sz="2800" b="1">
                 <a:solidFill>
                   <a:srgbClr val="F4E8C8"/>
                 </a:solidFill>
                 <a:latin typeface="Microsoft YaHei"/>
                 <a:ea typeface="Microsoft YaHei"/>
               </a:rPr>
-              <a:t>零外鏈圖 · Web Audio · 嗶哩官方嵌入</a:t>
-            </a:r>
-          </a:p>
-        </p:txBody>
-      </p:sp>
-      <p:sp>
-        <p:nvSpPr>
-          <p:cNvPr id="5" name="Rounded Rectangle 4"/>
+              <a:t>演示畫先上，LLM 畫好先換</a:t>
+            </a:r>
+          </a:p>
+        </p:txBody>
+      </p:sp>
+      <p:sp>
+        <p:nvSpPr>
+          <p:cNvPr id="7" name="Rounded Rectangle 6"/>
           <p:cNvSpPr/>
           <p:nvPr/>
         </p:nvSpPr>
         <p:spPr>
           <a:xfrm>
-            <a:off x="502920" y="1280160"/>
-            <a:ext cx="5577840" cy="2286000"/>
+            <a:off x="502920" y="1170432"/>
+            <a:ext cx="5577840" cy="1828800"/>
           </a:xfrm>
           <a:prstGeom prst="roundRect">
             <a:avLst/>
@@ -8600,14 +10090,14 @@
       </p:sp>
       <p:sp>
         <p:nvSpPr>
-          <p:cNvPr id="6" name="TextBox 5"/>
+          <p:cNvPr id="8" name="TextBox 7"/>
           <p:cNvSpPr txBox="1"/>
           <p:nvPr/>
         </p:nvSpPr>
         <p:spPr>
           <a:xfrm>
-            <a:off x="777240" y="1554480"/>
-            <a:ext cx="5029200" cy="457200"/>
+            <a:off x="758952" y="1353312"/>
+            <a:ext cx="5074920" cy="411480"/>
           </a:xfrm>
           <a:prstGeom prst="rect">
             <a:avLst/>
@@ -8626,28 +10116,28 @@
               </a:spcAft>
             </a:pPr>
             <a:r>
-              <a:rPr sz="2200" b="1">
+              <a:rPr sz="1800" b="1">
                 <a:solidFill>
                   <a:srgbClr val="D4AF37"/>
                 </a:solidFill>
                 <a:latin typeface="Microsoft YaHei"/>
                 <a:ea typeface="Microsoft YaHei"/>
               </a:rPr>
-              <a:t>視覺</a:t>
-            </a:r>
-          </a:p>
-        </p:txBody>
-      </p:sp>
-      <p:sp>
-        <p:nvSpPr>
-          <p:cNvPr id="7" name="TextBox 6"/>
+              <a:t>開場六人畫像</a:t>
+            </a:r>
+          </a:p>
+        </p:txBody>
+      </p:sp>
+      <p:sp>
+        <p:nvSpPr>
+          <p:cNvPr id="9" name="TextBox 8"/>
           <p:cNvSpPr txBox="1"/>
           <p:nvPr/>
         </p:nvSpPr>
         <p:spPr>
           <a:xfrm>
-            <a:off x="777240" y="2194560"/>
-            <a:ext cx="5029200" cy="1097280"/>
+            <a:off x="758952" y="1828800"/>
+            <a:ext cx="5074920" cy="1005840"/>
           </a:xfrm>
           <a:prstGeom prst="rect">
             <a:avLst/>
@@ -8666,28 +10156,28 @@
               </a:spcAft>
             </a:pPr>
             <a:r>
-              <a:rPr sz="1600" b="0">
+              <a:rPr sz="1500" b="0">
                 <a:solidFill>
                   <a:srgbClr val="F4E8C8"/>
                 </a:solidFill>
                 <a:latin typeface="Microsoft YaHei"/>
                 <a:ea typeface="Microsoft YaHei"/>
               </a:rPr>
-              <a:t>CSS 金漆牌坊、墨底描金。Canvas 靈塵。突破金光。無外部圖片。</a:t>
-            </a:r>
-          </a:p>
-        </p:txBody>
-      </p:sp>
-      <p:sp>
-        <p:nvSpPr>
-          <p:cNvPr id="8" name="Rounded Rectangle 7"/>
+              <a:t>青玄機、沈清梧、葉疏影、白無塵、蒼小魚、嵐七七。捆進遊戲，一開即見。</a:t>
+            </a:r>
+          </a:p>
+        </p:txBody>
+      </p:sp>
+      <p:sp>
+        <p:nvSpPr>
+          <p:cNvPr id="10" name="Rounded Rectangle 9"/>
           <p:cNvSpPr/>
           <p:nvPr/>
         </p:nvSpPr>
         <p:spPr>
           <a:xfrm>
-            <a:off x="6309359" y="1280160"/>
-            <a:ext cx="5577840" cy="2286000"/>
+            <a:off x="6309359" y="1170432"/>
+            <a:ext cx="5577840" cy="1828800"/>
           </a:xfrm>
           <a:prstGeom prst="roundRect">
             <a:avLst/>
@@ -8725,14 +10215,14 @@
       </p:sp>
       <p:sp>
         <p:nvSpPr>
-          <p:cNvPr id="9" name="TextBox 8"/>
+          <p:cNvPr id="11" name="TextBox 10"/>
           <p:cNvSpPr txBox="1"/>
           <p:nvPr/>
         </p:nvSpPr>
         <p:spPr>
           <a:xfrm>
-            <a:off x="6583679" y="1554480"/>
-            <a:ext cx="5029200" cy="457200"/>
+            <a:off x="6565391" y="1353312"/>
+            <a:ext cx="5074920" cy="411480"/>
           </a:xfrm>
           <a:prstGeom prst="rect">
             <a:avLst/>
@@ -8751,28 +10241,28 @@
               </a:spcAft>
             </a:pPr>
             <a:r>
-              <a:rPr sz="2200" b="1">
+              <a:rPr sz="1800" b="1">
                 <a:solidFill>
                   <a:srgbClr val="D4AF37"/>
                 </a:solidFill>
                 <a:latin typeface="Microsoft YaHei"/>
                 <a:ea typeface="Microsoft YaHei"/>
               </a:rPr>
-              <a:t>音效</a:t>
-            </a:r>
-          </a:p>
-        </p:txBody>
-      </p:sp>
-      <p:sp>
-        <p:nvSpPr>
-          <p:cNvPr id="10" name="TextBox 9"/>
+              <a:t>場次演示畫</a:t>
+            </a:r>
+          </a:p>
+        </p:txBody>
+      </p:sp>
+      <p:sp>
+        <p:nvSpPr>
+          <p:cNvPr id="12" name="TextBox 11"/>
           <p:cNvSpPr txBox="1"/>
           <p:nvPr/>
         </p:nvSpPr>
         <p:spPr>
           <a:xfrm>
-            <a:off x="6583679" y="2194560"/>
-            <a:ext cx="5029200" cy="1097280"/>
+            <a:off x="6565391" y="1828800"/>
+            <a:ext cx="5074920" cy="1005840"/>
           </a:xfrm>
           <a:prstGeom prst="rect">
             <a:avLst/>
@@ -8791,28 +10281,28 @@
               </a:spcAft>
             </a:pPr>
             <a:r>
-              <a:rPr sz="1600" b="0">
+              <a:rPr sz="1500" b="0">
                 <a:solidFill>
                   <a:srgbClr val="F4E8C8"/>
                 </a:solidFill>
                 <a:latin typeface="Microsoft YaHei"/>
                 <a:ea typeface="Microsoft YaHei"/>
               </a:rPr>
-              <a:t>瀏覽器合成木魚、磬、雷、心魔。一鍵靜音。</a:t>
-            </a:r>
-          </a:p>
-        </p:txBody>
-      </p:sp>
-      <p:sp>
-        <p:nvSpPr>
-          <p:cNvPr id="11" name="Rounded Rectangle 10"/>
+              <a:t>大殿夜宴、雨中石階、山門、燈密室。場戲一出就有畫面。</a:t>
+            </a:r>
+          </a:p>
+        </p:txBody>
+      </p:sp>
+      <p:sp>
+        <p:nvSpPr>
+          <p:cNvPr id="13" name="Rounded Rectangle 12"/>
           <p:cNvSpPr/>
           <p:nvPr/>
         </p:nvSpPr>
         <p:spPr>
           <a:xfrm>
-            <a:off x="502920" y="3749039"/>
-            <a:ext cx="5577840" cy="2286000"/>
+            <a:off x="502920" y="3136391"/>
+            <a:ext cx="5577840" cy="1828800"/>
           </a:xfrm>
           <a:prstGeom prst="roundRect">
             <a:avLst/>
@@ -8850,14 +10340,14 @@
       </p:sp>
       <p:sp>
         <p:nvSpPr>
-          <p:cNvPr id="12" name="TextBox 11"/>
+          <p:cNvPr id="14" name="TextBox 13"/>
           <p:cNvSpPr txBox="1"/>
           <p:nvPr/>
         </p:nvSpPr>
         <p:spPr>
           <a:xfrm>
-            <a:off x="777240" y="4023359"/>
-            <a:ext cx="5029200" cy="457200"/>
+            <a:off x="758952" y="3319271"/>
+            <a:ext cx="5074920" cy="411480"/>
           </a:xfrm>
           <a:prstGeom prst="rect">
             <a:avLst/>
@@ -8876,28 +10366,28 @@
               </a:spcAft>
             </a:pPr>
             <a:r>
-              <a:rPr sz="2200" b="1">
+              <a:rPr sz="1800" b="1">
                 <a:solidFill>
                   <a:srgbClr val="D4AF37"/>
                 </a:solidFill>
                 <a:latin typeface="Microsoft YaHei"/>
                 <a:ea typeface="Microsoft YaHei"/>
               </a:rPr>
-              <a:t>BGM</a:t>
-            </a:r>
-          </a:p>
-        </p:txBody>
-      </p:sp>
-      <p:sp>
-        <p:nvSpPr>
-          <p:cNvPr id="13" name="TextBox 12"/>
+              <a:t>背景無限出圖</a:t>
+            </a:r>
+          </a:p>
+        </p:txBody>
+      </p:sp>
+      <p:sp>
+        <p:nvSpPr>
+          <p:cNvPr id="15" name="TextBox 14"/>
           <p:cNvSpPr txBox="1"/>
           <p:nvPr/>
         </p:nvSpPr>
         <p:spPr>
           <a:xfrm>
-            <a:off x="777240" y="4663439"/>
-            <a:ext cx="5029200" cy="1097280"/>
+            <a:off x="758952" y="3794759"/>
+            <a:ext cx="5074920" cy="1005840"/>
           </a:xfrm>
           <a:prstGeom prst="rect">
             <a:avLst/>
@@ -8916,28 +10406,28 @@
               </a:spcAft>
             </a:pPr>
             <a:r>
-              <a:rPr sz="1600" b="0">
+              <a:rPr sz="1500" b="0">
                 <a:solidFill>
                   <a:srgbClr val="F4E8C8"/>
                 </a:solidFill>
                 <a:latin typeface="Microsoft YaHei"/>
                 <a:ea typeface="Microsoft YaHei"/>
               </a:rPr>
-              <a:t>嗶哩嗶哩官方嵌入《中國風純音樂》。可縮小成一條，唔擋操作。</a:t>
-            </a:r>
-          </a:p>
-        </p:txBody>
-      </p:sp>
-      <p:sp>
-        <p:nvSpPr>
-          <p:cNvPr id="14" name="Rounded Rectangle 13"/>
+              <a:t>有 Key：編劇同畫師喺背景不停寫、不停畫。512 檔細圖，唔擋操作。</a:t>
+            </a:r>
+          </a:p>
+        </p:txBody>
+      </p:sp>
+      <p:sp>
+        <p:nvSpPr>
+          <p:cNvPr id="16" name="Rounded Rectangle 15"/>
           <p:cNvSpPr/>
           <p:nvPr/>
         </p:nvSpPr>
         <p:spPr>
           <a:xfrm>
-            <a:off x="6309359" y="3749039"/>
-            <a:ext cx="5577840" cy="2286000"/>
+            <a:off x="6309359" y="3136391"/>
+            <a:ext cx="5577840" cy="1828800"/>
           </a:xfrm>
           <a:prstGeom prst="roundRect">
             <a:avLst/>
@@ -8975,14 +10465,14 @@
       </p:sp>
       <p:sp>
         <p:nvSpPr>
-          <p:cNvPr id="15" name="TextBox 14"/>
+          <p:cNvPr id="17" name="TextBox 16"/>
           <p:cNvSpPr txBox="1"/>
           <p:nvPr/>
         </p:nvSpPr>
         <p:spPr>
           <a:xfrm>
-            <a:off x="6583679" y="4023359"/>
-            <a:ext cx="5029200" cy="457200"/>
+            <a:off x="6565391" y="3319271"/>
+            <a:ext cx="5074920" cy="411480"/>
           </a:xfrm>
           <a:prstGeom prst="rect">
             <a:avLst/>
@@ -9001,28 +10491,28 @@
               </a:spcAft>
             </a:pPr>
             <a:r>
-              <a:rPr sz="2200" b="1">
+              <a:rPr sz="1800" b="1">
                 <a:solidFill>
                   <a:srgbClr val="D4AF37"/>
                 </a:solidFill>
                 <a:latin typeface="Microsoft YaHei"/>
                 <a:ea typeface="Microsoft YaHei"/>
               </a:rPr>
-              <a:t>技術</a:t>
-            </a:r>
-          </a:p>
-        </p:txBody>
-      </p:sp>
-      <p:sp>
-        <p:nvSpPr>
-          <p:cNvPr id="16" name="TextBox 15"/>
+              <a:t>靜默重試</a:t>
+            </a:r>
+          </a:p>
+        </p:txBody>
+      </p:sp>
+      <p:sp>
+        <p:nvSpPr>
+          <p:cNvPr id="18" name="TextBox 17"/>
           <p:cNvSpPr txBox="1"/>
           <p:nvPr/>
         </p:nvSpPr>
         <p:spPr>
           <a:xfrm>
-            <a:off x="6583679" y="4663439"/>
-            <a:ext cx="5029200" cy="1097280"/>
+            <a:off x="6565391" y="3794759"/>
+            <a:ext cx="5074920" cy="1005840"/>
           </a:xfrm>
           <a:prstGeom prst="rect">
             <a:avLst/>
@@ -9041,14 +10531,99 @@
               </a:spcAft>
             </a:pPr>
             <a:r>
-              <a:rPr sz="1600" b="0">
+              <a:rPr sz="1500" b="0">
                 <a:solidFill>
                   <a:srgbClr val="F4E8C8"/>
                 </a:solidFill>
                 <a:latin typeface="Microsoft YaHei"/>
                 <a:ea typeface="Microsoft YaHei"/>
               </a:rPr>
-              <a:t>Vite + 原生 JS。規則模擬同編劇分檔。GitHub Pages 可直接開。</a:t>
+              <a:t>失敗就自己再試。演示畫留住，直到 LLM 畫換上去。唔會空白「插畫未成」。</a:t>
+            </a:r>
+          </a:p>
+        </p:txBody>
+      </p:sp>
+      <p:sp>
+        <p:nvSpPr>
+          <p:cNvPr id="19" name="Rounded Rectangle 18"/>
+          <p:cNvSpPr/>
+          <p:nvPr/>
+        </p:nvSpPr>
+        <p:spPr>
+          <a:xfrm>
+            <a:off x="502920" y="5193792"/>
+            <a:ext cx="11155680" cy="1024128"/>
+          </a:xfrm>
+          <a:prstGeom prst="roundRect">
+            <a:avLst/>
+          </a:prstGeom>
+          <a:solidFill>
+            <a:srgbClr val="14100A"/>
+          </a:solidFill>
+          <a:ln w="15875">
+            <a:solidFill>
+              <a:srgbClr val="7EC8C3"/>
+            </a:solidFill>
+          </a:ln>
+        </p:spPr>
+        <p:style>
+          <a:lnRef idx="1">
+            <a:schemeClr val="accent1"/>
+          </a:lnRef>
+          <a:fillRef idx="3">
+            <a:schemeClr val="accent1"/>
+          </a:fillRef>
+          <a:effectRef idx="2">
+            <a:schemeClr val="accent1"/>
+          </a:effectRef>
+          <a:fontRef idx="minor">
+            <a:schemeClr val="lt1"/>
+          </a:fontRef>
+        </p:style>
+        <p:txBody>
+          <a:bodyPr rtlCol="0" anchor="ctr"/>
+          <a:lstStyle/>
+          <a:p>
+            <a:pPr algn="ctr"/>
+          </a:p>
+        </p:txBody>
+      </p:sp>
+      <p:sp>
+        <p:nvSpPr>
+          <p:cNvPr id="20" name="TextBox 19"/>
+          <p:cNvSpPr txBox="1"/>
+          <p:nvPr/>
+        </p:nvSpPr>
+        <p:spPr>
+          <a:xfrm>
+            <a:off x="731520" y="5321808"/>
+            <a:ext cx="10698480" cy="822960"/>
+          </a:xfrm>
+          <a:prstGeom prst="rect">
+            <a:avLst/>
+          </a:prstGeom>
+          <a:noFill/>
+        </p:spPr>
+        <p:txBody>
+          <a:bodyPr wrap="square">
+            <a:spAutoFit/>
+          </a:bodyPr>
+          <a:lstStyle/>
+          <a:p>
+            <a:pPr algn="l">
+              <a:spcAft>
+                <a:spcPts val="600"/>
+              </a:spcAft>
+            </a:pPr>
+            <a:r>
+              <a:rPr sz="1500" b="0">
+                <a:solidFill>
+                  <a:srgbClr val="7EC8C3"/>
+                </a:solidFill>
+                <a:latin typeface="Microsoft YaHei"/>
+                <a:ea typeface="Microsoft YaHei"/>
+              </a:rPr>
+              <a:t>插畫預設 google/gemini-2.5-flash-image  ·  模型設定可關「自動生成插畫」  ·  冇 Key 就留演示畫</a:t>
             </a:r>
           </a:p>
         </p:txBody>
@@ -9173,8 +10748,8 @@
         </p:nvSpPr>
         <p:spPr>
           <a:xfrm>
-            <a:off x="640080" y="256032"/>
-            <a:ext cx="10972800" cy="777240"/>
+            <a:off x="502920" y="6473952"/>
+            <a:ext cx="7498079" cy="256032"/>
           </a:xfrm>
           <a:prstGeom prst="rect">
             <a:avLst/>
@@ -9193,6 +10768,86 @@
               </a:spcAft>
             </a:pPr>
             <a:r>
+              <a:rPr sz="1100" b="0">
+                <a:solidFill>
+                  <a:srgbClr val="B8A888"/>
+                </a:solidFill>
+                <a:latin typeface="Microsoft YaHei"/>
+                <a:ea typeface="Microsoft YaHei"/>
+              </a:rPr>
+              <a:t>教父世家  ·  THE FAMILY</a:t>
+            </a:r>
+          </a:p>
+        </p:txBody>
+      </p:sp>
+      <p:sp>
+        <p:nvSpPr>
+          <p:cNvPr id="5" name="TextBox 4"/>
+          <p:cNvSpPr txBox="1"/>
+          <p:nvPr/>
+        </p:nvSpPr>
+        <p:spPr>
+          <a:xfrm>
+            <a:off x="9509760" y="6473952"/>
+            <a:ext cx="2103120" cy="256032"/>
+          </a:xfrm>
+          <a:prstGeom prst="rect">
+            <a:avLst/>
+          </a:prstGeom>
+          <a:noFill/>
+        </p:spPr>
+        <p:txBody>
+          <a:bodyPr wrap="square">
+            <a:spAutoFit/>
+          </a:bodyPr>
+          <a:lstStyle/>
+          <a:p>
+            <a:pPr algn="r">
+              <a:spcAft>
+                <a:spcPts val="600"/>
+              </a:spcAft>
+            </a:pPr>
+            <a:r>
+              <a:rPr sz="1100" b="0">
+                <a:solidFill>
+                  <a:srgbClr val="B8A888"/>
+                </a:solidFill>
+                <a:latin typeface="Microsoft YaHei"/>
+                <a:ea typeface="Microsoft YaHei"/>
+              </a:rPr>
+              <a:t>07  /  11</a:t>
+            </a:r>
+          </a:p>
+        </p:txBody>
+      </p:sp>
+      <p:sp>
+        <p:nvSpPr>
+          <p:cNvPr id="6" name="TextBox 5"/>
+          <p:cNvSpPr txBox="1"/>
+          <p:nvPr/>
+        </p:nvSpPr>
+        <p:spPr>
+          <a:xfrm>
+            <a:off x="640080" y="237744"/>
+            <a:ext cx="10972800" cy="777240"/>
+          </a:xfrm>
+          <a:prstGeom prst="rect">
+            <a:avLst/>
+          </a:prstGeom>
+          <a:noFill/>
+        </p:spPr>
+        <p:txBody>
+          <a:bodyPr wrap="square">
+            <a:spAutoFit/>
+          </a:bodyPr>
+          <a:lstStyle/>
+          <a:p>
+            <a:pPr algn="l">
+              <a:spcAft>
+                <a:spcPts val="600"/>
+              </a:spcAft>
+            </a:pPr>
+            <a:r>
               <a:rPr sz="1400" b="0">
                 <a:solidFill>
                   <a:srgbClr val="D4AF37"/>
@@ -9200,7 +10855,7 @@
                 <a:latin typeface="Microsoft YaHei"/>
                 <a:ea typeface="Microsoft YaHei"/>
               </a:rPr>
-              <a:t>06  ·  遊戲製作 workflow</a:t>
+              <a:t>06  ·  金漆山門，現場聲畫</a:t>
             </a:r>
           </a:p>
           <a:p>
@@ -9217,21 +10872,21 @@
                 <a:latin typeface="Microsoft YaHei"/>
                 <a:ea typeface="Microsoft YaHei"/>
               </a:rPr>
-              <a:t>先立天道，再寫規則，最後先上金漆</a:t>
-            </a:r>
-          </a:p>
-        </p:txBody>
-      </p:sp>
-      <p:sp>
-        <p:nvSpPr>
-          <p:cNvPr id="5" name="Rounded Rectangle 4"/>
+              <a:t>CSS 牌坊 · Web Audio · 嗶哩官方嵌入</a:t>
+            </a:r>
+          </a:p>
+        </p:txBody>
+      </p:sp>
+      <p:sp>
+        <p:nvSpPr>
+          <p:cNvPr id="7" name="Rounded Rectangle 6"/>
           <p:cNvSpPr/>
           <p:nvPr/>
         </p:nvSpPr>
         <p:spPr>
           <a:xfrm>
-            <a:off x="457200" y="1234440"/>
-            <a:ext cx="3657600" cy="2377440"/>
+            <a:off x="502920" y="1170432"/>
+            <a:ext cx="5577840" cy="2194560"/>
           </a:xfrm>
           <a:prstGeom prst="roundRect">
             <a:avLst/>
@@ -9269,14 +10924,14 @@
       </p:sp>
       <p:sp>
         <p:nvSpPr>
-          <p:cNvPr id="6" name="TextBox 5"/>
+          <p:cNvPr id="8" name="TextBox 7"/>
           <p:cNvSpPr txBox="1"/>
           <p:nvPr/>
         </p:nvSpPr>
         <p:spPr>
           <a:xfrm>
-            <a:off x="640080" y="1399032"/>
-            <a:ext cx="3291840" cy="365760"/>
+            <a:off x="777240" y="1399032"/>
+            <a:ext cx="5029200" cy="411480"/>
           </a:xfrm>
           <a:prstGeom prst="rect">
             <a:avLst/>
@@ -9295,28 +10950,28 @@
               </a:spcAft>
             </a:pPr>
             <a:r>
-              <a:rPr sz="1800" b="1">
+              <a:rPr sz="2200" b="1">
                 <a:solidFill>
                   <a:srgbClr val="D4AF37"/>
                 </a:solidFill>
                 <a:latin typeface="Microsoft YaHei"/>
                 <a:ea typeface="Microsoft YaHei"/>
               </a:rPr>
-              <a:t>1  ·  立意</a:t>
-            </a:r>
-          </a:p>
-        </p:txBody>
-      </p:sp>
-      <p:sp>
-        <p:nvSpPr>
-          <p:cNvPr id="7" name="TextBox 6"/>
+              <a:t>視覺</a:t>
+            </a:r>
+          </a:p>
+        </p:txBody>
+      </p:sp>
+      <p:sp>
+        <p:nvSpPr>
+          <p:cNvPr id="9" name="TextBox 8"/>
           <p:cNvSpPr txBox="1"/>
           <p:nvPr/>
         </p:nvSpPr>
         <p:spPr>
           <a:xfrm>
-            <a:off x="640080" y="1874520"/>
-            <a:ext cx="3291840" cy="1554480"/>
+            <a:off x="777240" y="1947672"/>
+            <a:ext cx="5029200" cy="1188720"/>
           </a:xfrm>
           <a:prstGeom prst="rect">
             <a:avLst/>
@@ -9335,62 +10990,28 @@
               </a:spcAft>
             </a:pPr>
             <a:r>
-              <a:rPr sz="1500" b="0">
+              <a:rPr sz="1600" b="0">
                 <a:solidFill>
                   <a:srgbClr val="F4E8C8"/>
                 </a:solidFill>
                 <a:latin typeface="Microsoft YaHei"/>
                 <a:ea typeface="Microsoft YaHei"/>
               </a:rPr>
-              <a:t>玩家係天道。</a:t>
-            </a:r>
-          </a:p>
-          <a:p>
-            <a:pPr algn="l">
-              <a:spcAft>
-                <a:spcPts val="600"/>
-              </a:spcAft>
-            </a:pPr>
-            <a:r>
-              <a:rPr sz="1500" b="0">
-                <a:solidFill>
-                  <a:srgbClr val="F4E8C8"/>
-                </a:solidFill>
-                <a:latin typeface="Microsoft YaHei"/>
-                <a:ea typeface="Microsoft YaHei"/>
-              </a:rPr>
-              <a:t>養人、改命、睇戲。</a:t>
-            </a:r>
-          </a:p>
-          <a:p>
-            <a:pPr algn="l">
-              <a:spcAft>
-                <a:spcPts val="600"/>
-              </a:spcAft>
-            </a:pPr>
-            <a:r>
-              <a:rPr sz="1500" b="0">
-                <a:solidFill>
-                  <a:srgbClr val="F4E8C8"/>
-                </a:solidFill>
-                <a:latin typeface="Microsoft YaHei"/>
-                <a:ea typeface="Microsoft YaHei"/>
-              </a:rPr>
-              <a:t>唔做點擊農夫。</a:t>
-            </a:r>
-          </a:p>
-        </p:txBody>
-      </p:sp>
-      <p:sp>
-        <p:nvSpPr>
-          <p:cNvPr id="8" name="Rounded Rectangle 7"/>
+              <a:t>CSS 金漆牌坊、墨底描金、品牌印「父」。Canvas 靈塵。突破金光。演示畫打進倉庫，唔靠外鏈圖床。</a:t>
+            </a:r>
+          </a:p>
+        </p:txBody>
+      </p:sp>
+      <p:sp>
+        <p:nvSpPr>
+          <p:cNvPr id="10" name="Rounded Rectangle 9"/>
           <p:cNvSpPr/>
           <p:nvPr/>
         </p:nvSpPr>
         <p:spPr>
           <a:xfrm>
-            <a:off x="4297680" y="1234440"/>
-            <a:ext cx="3657600" cy="2377440"/>
+            <a:off x="6309359" y="1170432"/>
+            <a:ext cx="5577840" cy="2194560"/>
           </a:xfrm>
           <a:prstGeom prst="roundRect">
             <a:avLst/>
@@ -9428,14 +11049,14 @@
       </p:sp>
       <p:sp>
         <p:nvSpPr>
-          <p:cNvPr id="9" name="TextBox 8"/>
+          <p:cNvPr id="11" name="TextBox 10"/>
           <p:cNvSpPr txBox="1"/>
           <p:nvPr/>
         </p:nvSpPr>
         <p:spPr>
           <a:xfrm>
-            <a:off x="4480560" y="1399032"/>
-            <a:ext cx="3291840" cy="365760"/>
+            <a:off x="6583679" y="1399032"/>
+            <a:ext cx="5029200" cy="411480"/>
           </a:xfrm>
           <a:prstGeom prst="rect">
             <a:avLst/>
@@ -9454,28 +11075,28 @@
               </a:spcAft>
             </a:pPr>
             <a:r>
-              <a:rPr sz="1800" b="1">
+              <a:rPr sz="2200" b="1">
                 <a:solidFill>
                   <a:srgbClr val="D4AF37"/>
                 </a:solidFill>
                 <a:latin typeface="Microsoft YaHei"/>
                 <a:ea typeface="Microsoft YaHei"/>
               </a:rPr>
-              <a:t>2  ·  規則</a:t>
-            </a:r>
-          </a:p>
-        </p:txBody>
-      </p:sp>
-      <p:sp>
-        <p:nvSpPr>
-          <p:cNvPr id="10" name="TextBox 9"/>
+              <a:t>音效</a:t>
+            </a:r>
+          </a:p>
+        </p:txBody>
+      </p:sp>
+      <p:sp>
+        <p:nvSpPr>
+          <p:cNvPr id="12" name="TextBox 11"/>
           <p:cNvSpPr txBox="1"/>
           <p:nvPr/>
         </p:nvSpPr>
         <p:spPr>
           <a:xfrm>
-            <a:off x="4480560" y="1874520"/>
-            <a:ext cx="3291840" cy="1554480"/>
+            <a:off x="6583679" y="1947672"/>
+            <a:ext cx="5029200" cy="1188720"/>
           </a:xfrm>
           <a:prstGeom prst="rect">
             <a:avLst/>
@@ -9494,62 +11115,28 @@
               </a:spcAft>
             </a:pPr>
             <a:r>
-              <a:rPr sz="1500" b="0">
+              <a:rPr sz="1600" b="0">
                 <a:solidFill>
                   <a:srgbClr val="F4E8C8"/>
                 </a:solidFill>
                 <a:latin typeface="Microsoft YaHei"/>
                 <a:ea typeface="Microsoft YaHei"/>
               </a:rPr>
-              <a:t>world.js</a:t>
-            </a:r>
-          </a:p>
-          <a:p>
-            <a:pPr algn="l">
-              <a:spcAft>
-                <a:spcPts val="600"/>
-              </a:spcAft>
-            </a:pPr>
-            <a:r>
-              <a:rPr sz="1500" b="0">
-                <a:solidFill>
-                  <a:srgbClr val="F4E8C8"/>
-                </a:solidFill>
-                <a:latin typeface="Microsoft YaHei"/>
-                <a:ea typeface="Microsoft YaHei"/>
-              </a:rPr>
-              <a:t>月結、根骨、壽元</a:t>
-            </a:r>
-          </a:p>
-          <a:p>
-            <a:pPr algn="l">
-              <a:spcAft>
-                <a:spcPts val="600"/>
-              </a:spcAft>
-            </a:pPr>
-            <a:r>
-              <a:rPr sz="1500" b="0">
-                <a:solidFill>
-                  <a:srgbClr val="F4E8C8"/>
-                </a:solidFill>
-                <a:latin typeface="Microsoft YaHei"/>
-                <a:ea typeface="Microsoft YaHei"/>
-              </a:rPr>
-              <a:t>業力、死亡、傳承。</a:t>
-            </a:r>
-          </a:p>
-        </p:txBody>
-      </p:sp>
-      <p:sp>
-        <p:nvSpPr>
-          <p:cNvPr id="11" name="Rounded Rectangle 10"/>
+              <a:t>瀏覽器合成木魚、磬、雷、心魔。一鍵靜音。唔使下載音檔。</a:t>
+            </a:r>
+          </a:p>
+        </p:txBody>
+      </p:sp>
+      <p:sp>
+        <p:nvSpPr>
+          <p:cNvPr id="13" name="Rounded Rectangle 12"/>
           <p:cNvSpPr/>
           <p:nvPr/>
         </p:nvSpPr>
         <p:spPr>
           <a:xfrm>
-            <a:off x="8138160" y="1234440"/>
-            <a:ext cx="3657600" cy="2377440"/>
+            <a:off x="502920" y="3547872"/>
+            <a:ext cx="5577840" cy="2194560"/>
           </a:xfrm>
           <a:prstGeom prst="roundRect">
             <a:avLst/>
@@ -9587,14 +11174,14 @@
       </p:sp>
       <p:sp>
         <p:nvSpPr>
-          <p:cNvPr id="12" name="TextBox 11"/>
+          <p:cNvPr id="14" name="TextBox 13"/>
           <p:cNvSpPr txBox="1"/>
           <p:nvPr/>
         </p:nvSpPr>
         <p:spPr>
           <a:xfrm>
-            <a:off x="8321040" y="1399032"/>
-            <a:ext cx="3291840" cy="365760"/>
+            <a:off x="777240" y="3776472"/>
+            <a:ext cx="5029200" cy="411480"/>
           </a:xfrm>
           <a:prstGeom prst="rect">
             <a:avLst/>
@@ -9613,28 +11200,28 @@
               </a:spcAft>
             </a:pPr>
             <a:r>
-              <a:rPr sz="1800" b="1">
+              <a:rPr sz="2200" b="1">
                 <a:solidFill>
                   <a:srgbClr val="D4AF37"/>
                 </a:solidFill>
                 <a:latin typeface="Microsoft YaHei"/>
                 <a:ea typeface="Microsoft YaHei"/>
               </a:rPr>
-              <a:t>3  ·  編劇</a:t>
-            </a:r>
-          </a:p>
-        </p:txBody>
-      </p:sp>
-      <p:sp>
-        <p:nvSpPr>
-          <p:cNvPr id="13" name="TextBox 12"/>
+              <a:t>BGM</a:t>
+            </a:r>
+          </a:p>
+        </p:txBody>
+      </p:sp>
+      <p:sp>
+        <p:nvSpPr>
+          <p:cNvPr id="15" name="TextBox 14"/>
           <p:cNvSpPr txBox="1"/>
           <p:nvPr/>
         </p:nvSpPr>
         <p:spPr>
           <a:xfrm>
-            <a:off x="8321040" y="1874520"/>
-            <a:ext cx="3291840" cy="1554480"/>
+            <a:off x="777240" y="4325112"/>
+            <a:ext cx="5029200" cy="1188720"/>
           </a:xfrm>
           <a:prstGeom prst="rect">
             <a:avLst/>
@@ -9653,62 +11240,28 @@
               </a:spcAft>
             </a:pPr>
             <a:r>
-              <a:rPr sz="1500" b="0">
+              <a:rPr sz="1600" b="0">
                 <a:solidFill>
                   <a:srgbClr val="F4E8C8"/>
                 </a:solidFill>
                 <a:latin typeface="Microsoft YaHei"/>
                 <a:ea typeface="Microsoft YaHei"/>
               </a:rPr>
-              <a:t>screenplay.js</a:t>
-            </a:r>
-          </a:p>
-          <a:p>
-            <a:pPr algn="l">
-              <a:spcAft>
-                <a:spcPts val="600"/>
-              </a:spcAft>
-            </a:pPr>
-            <a:r>
-              <a:rPr sz="1500" b="0">
-                <a:solidFill>
-                  <a:srgbClr val="F4E8C8"/>
-                </a:solidFill>
-                <a:latin typeface="Microsoft YaHei"/>
-                <a:ea typeface="Microsoft YaHei"/>
-              </a:rPr>
-              <a:t>三幕節奏 + 劇組代班。</a:t>
-            </a:r>
-          </a:p>
-          <a:p>
-            <a:pPr algn="l">
-              <a:spcAft>
-                <a:spcPts val="600"/>
-              </a:spcAft>
-            </a:pPr>
-            <a:r>
-              <a:rPr sz="1500" b="0">
-                <a:solidFill>
-                  <a:srgbClr val="F4E8C8"/>
-                </a:solidFill>
-                <a:latin typeface="Microsoft YaHei"/>
-                <a:ea typeface="Microsoft YaHei"/>
-              </a:rPr>
-              <a:t>戲寫入心事同關係。</a:t>
-            </a:r>
-          </a:p>
-        </p:txBody>
-      </p:sp>
-      <p:sp>
-        <p:nvSpPr>
-          <p:cNvPr id="14" name="Rounded Rectangle 13"/>
+              <a:t>嗶哩嗶哩官方嵌入《關注塔菲喵》循環歌單。可縮小成一條。唔下載、唔轉檔、唔盜鏈音源。</a:t>
+            </a:r>
+          </a:p>
+        </p:txBody>
+      </p:sp>
+      <p:sp>
+        <p:nvSpPr>
+          <p:cNvPr id="16" name="Rounded Rectangle 15"/>
           <p:cNvSpPr/>
           <p:nvPr/>
         </p:nvSpPr>
         <p:spPr>
           <a:xfrm>
-            <a:off x="457200" y="3794760"/>
-            <a:ext cx="3657600" cy="2377440"/>
+            <a:off x="6309359" y="3547872"/>
+            <a:ext cx="5577840" cy="2194560"/>
           </a:xfrm>
           <a:prstGeom prst="roundRect">
             <a:avLst/>
@@ -9746,14 +11299,14 @@
       </p:sp>
       <p:sp>
         <p:nvSpPr>
-          <p:cNvPr id="15" name="TextBox 14"/>
+          <p:cNvPr id="17" name="TextBox 16"/>
           <p:cNvSpPr txBox="1"/>
           <p:nvPr/>
         </p:nvSpPr>
         <p:spPr>
           <a:xfrm>
-            <a:off x="640080" y="3959352"/>
-            <a:ext cx="3291840" cy="365760"/>
+            <a:off x="6583679" y="3776472"/>
+            <a:ext cx="5029200" cy="411480"/>
           </a:xfrm>
           <a:prstGeom prst="rect">
             <a:avLst/>
@@ -9772,28 +11325,28 @@
               </a:spcAft>
             </a:pPr>
             <a:r>
-              <a:rPr sz="1800" b="1">
+              <a:rPr sz="2200" b="1">
                 <a:solidFill>
                   <a:srgbClr val="D4AF37"/>
                 </a:solidFill>
                 <a:latin typeface="Microsoft YaHei"/>
                 <a:ea typeface="Microsoft YaHei"/>
               </a:rPr>
-              <a:t>4  ·  皮與聲</a:t>
-            </a:r>
-          </a:p>
-        </p:txBody>
-      </p:sp>
-      <p:sp>
-        <p:nvSpPr>
-          <p:cNvPr id="16" name="TextBox 15"/>
+              <a:t>技術</a:t>
+            </a:r>
+          </a:p>
+        </p:txBody>
+      </p:sp>
+      <p:sp>
+        <p:nvSpPr>
+          <p:cNvPr id="18" name="TextBox 17"/>
           <p:cNvSpPr txBox="1"/>
           <p:nvPr/>
         </p:nvSpPr>
         <p:spPr>
           <a:xfrm>
-            <a:off x="640080" y="4434840"/>
-            <a:ext cx="3291840" cy="1554480"/>
+            <a:off x="6583679" y="4325112"/>
+            <a:ext cx="5029200" cy="1188720"/>
           </a:xfrm>
           <a:prstGeom prst="rect">
             <a:avLst/>
@@ -9812,366 +11365,14 @@
               </a:spcAft>
             </a:pPr>
             <a:r>
-              <a:rPr sz="1500" b="0">
+              <a:rPr sz="1600" b="0">
                 <a:solidFill>
                   <a:srgbClr val="F4E8C8"/>
                 </a:solidFill>
                 <a:latin typeface="Microsoft YaHei"/>
                 <a:ea typeface="Microsoft YaHei"/>
               </a:rPr>
-              <a:t>CSS 金漆、Canvas 靈塵、</a:t>
-            </a:r>
-          </a:p>
-          <a:p>
-            <a:pPr algn="l">
-              <a:spcAft>
-                <a:spcPts val="600"/>
-              </a:spcAft>
-            </a:pPr>
-            <a:r>
-              <a:rPr sz="1500" b="0">
-                <a:solidFill>
-                  <a:srgbClr val="F4E8C8"/>
-                </a:solidFill>
-                <a:latin typeface="Microsoft YaHei"/>
-                <a:ea typeface="Microsoft YaHei"/>
-              </a:rPr>
-              <a:t>Web Audio、嗶哩嵌入。</a:t>
-            </a:r>
-          </a:p>
-          <a:p>
-            <a:pPr algn="l">
-              <a:spcAft>
-                <a:spcPts val="600"/>
-              </a:spcAft>
-            </a:pPr>
-            <a:r>
-              <a:rPr sz="1500" b="0">
-                <a:solidFill>
-                  <a:srgbClr val="F4E8C8"/>
-                </a:solidFill>
-                <a:latin typeface="Microsoft YaHei"/>
-                <a:ea typeface="Microsoft YaHei"/>
-              </a:rPr>
-              <a:t>零外鏈圖。</a:t>
-            </a:r>
-          </a:p>
-        </p:txBody>
-      </p:sp>
-      <p:sp>
-        <p:nvSpPr>
-          <p:cNvPr id="17" name="Rounded Rectangle 16"/>
-          <p:cNvSpPr/>
-          <p:nvPr/>
-        </p:nvSpPr>
-        <p:spPr>
-          <a:xfrm>
-            <a:off x="4297680" y="3794760"/>
-            <a:ext cx="3657600" cy="2377440"/>
-          </a:xfrm>
-          <a:prstGeom prst="roundRect">
-            <a:avLst/>
-          </a:prstGeom>
-          <a:solidFill>
-            <a:srgbClr val="14100A"/>
-          </a:solidFill>
-          <a:ln w="15875">
-            <a:solidFill>
-              <a:srgbClr val="D4AF37"/>
-            </a:solidFill>
-          </a:ln>
-        </p:spPr>
-        <p:style>
-          <a:lnRef idx="1">
-            <a:schemeClr val="accent1"/>
-          </a:lnRef>
-          <a:fillRef idx="3">
-            <a:schemeClr val="accent1"/>
-          </a:fillRef>
-          <a:effectRef idx="2">
-            <a:schemeClr val="accent1"/>
-          </a:effectRef>
-          <a:fontRef idx="minor">
-            <a:schemeClr val="lt1"/>
-          </a:fontRef>
-        </p:style>
-        <p:txBody>
-          <a:bodyPr rtlCol="0" anchor="ctr"/>
-          <a:lstStyle/>
-          <a:p>
-            <a:pPr algn="ctr"/>
-          </a:p>
-        </p:txBody>
-      </p:sp>
-      <p:sp>
-        <p:nvSpPr>
-          <p:cNvPr id="18" name="TextBox 17"/>
-          <p:cNvSpPr txBox="1"/>
-          <p:nvPr/>
-        </p:nvSpPr>
-        <p:spPr>
-          <a:xfrm>
-            <a:off x="4480560" y="3959352"/>
-            <a:ext cx="3291840" cy="365760"/>
-          </a:xfrm>
-          <a:prstGeom prst="rect">
-            <a:avLst/>
-          </a:prstGeom>
-          <a:noFill/>
-        </p:spPr>
-        <p:txBody>
-          <a:bodyPr wrap="square">
-            <a:spAutoFit/>
-          </a:bodyPr>
-          <a:lstStyle/>
-          <a:p>
-            <a:pPr algn="l">
-              <a:spcAft>
-                <a:spcPts val="600"/>
-              </a:spcAft>
-            </a:pPr>
-            <a:r>
-              <a:rPr sz="1800" b="1">
-                <a:solidFill>
-                  <a:srgbClr val="D4AF37"/>
-                </a:solidFill>
-                <a:latin typeface="Microsoft YaHei"/>
-                <a:ea typeface="Microsoft YaHei"/>
-              </a:rPr>
-              <a:t>5  ·  試玩</a:t>
-            </a:r>
-          </a:p>
-        </p:txBody>
-      </p:sp>
-      <p:sp>
-        <p:nvSpPr>
-          <p:cNvPr id="19" name="TextBox 18"/>
-          <p:cNvSpPr txBox="1"/>
-          <p:nvPr/>
-        </p:nvSpPr>
-        <p:spPr>
-          <a:xfrm>
-            <a:off x="4480560" y="4434840"/>
-            <a:ext cx="3291840" cy="1554480"/>
-          </a:xfrm>
-          <a:prstGeom prst="rect">
-            <a:avLst/>
-          </a:prstGeom>
-          <a:noFill/>
-        </p:spPr>
-        <p:txBody>
-          <a:bodyPr wrap="square">
-            <a:spAutoFit/>
-          </a:bodyPr>
-          <a:lstStyle/>
-          <a:p>
-            <a:pPr algn="l">
-              <a:spcAft>
-                <a:spcPts val="600"/>
-              </a:spcAft>
-            </a:pPr>
-            <a:r>
-              <a:rPr sz="1500" b="0">
-                <a:solidFill>
-                  <a:srgbClr val="F4E8C8"/>
-                </a:solidFill>
-                <a:latin typeface="Microsoft YaHei"/>
-                <a:ea typeface="Microsoft YaHei"/>
-              </a:rPr>
-              <a:t>Vite 開 /family/</a:t>
-            </a:r>
-          </a:p>
-          <a:p>
-            <a:pPr algn="l">
-              <a:spcAft>
-                <a:spcPts val="600"/>
-              </a:spcAft>
-            </a:pPr>
-            <a:r>
-              <a:rPr sz="1500" b="0">
-                <a:solidFill>
-                  <a:srgbClr val="F4E8C8"/>
-                </a:solidFill>
-                <a:latin typeface="Microsoft YaHei"/>
-                <a:ea typeface="Microsoft YaHei"/>
-              </a:rPr>
-              <a:t>改完即睇。</a:t>
-            </a:r>
-          </a:p>
-          <a:p>
-            <a:pPr algn="l">
-              <a:spcAft>
-                <a:spcPts val="600"/>
-              </a:spcAft>
-            </a:pPr>
-            <a:r>
-              <a:rPr sz="1500" b="0">
-                <a:solidFill>
-                  <a:srgbClr val="F4E8C8"/>
-                </a:solidFill>
-                <a:latin typeface="Microsoft YaHei"/>
-                <a:ea typeface="Microsoft YaHei"/>
-              </a:rPr>
-              <a:t>細畫面、BGM、文案。</a:t>
-            </a:r>
-          </a:p>
-        </p:txBody>
-      </p:sp>
-      <p:sp>
-        <p:nvSpPr>
-          <p:cNvPr id="20" name="Rounded Rectangle 19"/>
-          <p:cNvSpPr/>
-          <p:nvPr/>
-        </p:nvSpPr>
-        <p:spPr>
-          <a:xfrm>
-            <a:off x="8138160" y="3794760"/>
-            <a:ext cx="3657600" cy="2377440"/>
-          </a:xfrm>
-          <a:prstGeom prst="roundRect">
-            <a:avLst/>
-          </a:prstGeom>
-          <a:solidFill>
-            <a:srgbClr val="14100A"/>
-          </a:solidFill>
-          <a:ln w="15875">
-            <a:solidFill>
-              <a:srgbClr val="D4AF37"/>
-            </a:solidFill>
-          </a:ln>
-        </p:spPr>
-        <p:style>
-          <a:lnRef idx="1">
-            <a:schemeClr val="accent1"/>
-          </a:lnRef>
-          <a:fillRef idx="3">
-            <a:schemeClr val="accent1"/>
-          </a:fillRef>
-          <a:effectRef idx="2">
-            <a:schemeClr val="accent1"/>
-          </a:effectRef>
-          <a:fontRef idx="minor">
-            <a:schemeClr val="lt1"/>
-          </a:fontRef>
-        </p:style>
-        <p:txBody>
-          <a:bodyPr rtlCol="0" anchor="ctr"/>
-          <a:lstStyle/>
-          <a:p>
-            <a:pPr algn="ctr"/>
-          </a:p>
-        </p:txBody>
-      </p:sp>
-      <p:sp>
-        <p:nvSpPr>
-          <p:cNvPr id="21" name="TextBox 20"/>
-          <p:cNvSpPr txBox="1"/>
-          <p:nvPr/>
-        </p:nvSpPr>
-        <p:spPr>
-          <a:xfrm>
-            <a:off x="8321040" y="3959352"/>
-            <a:ext cx="3291840" cy="365760"/>
-          </a:xfrm>
-          <a:prstGeom prst="rect">
-            <a:avLst/>
-          </a:prstGeom>
-          <a:noFill/>
-        </p:spPr>
-        <p:txBody>
-          <a:bodyPr wrap="square">
-            <a:spAutoFit/>
-          </a:bodyPr>
-          <a:lstStyle/>
-          <a:p>
-            <a:pPr algn="l">
-              <a:spcAft>
-                <a:spcPts val="600"/>
-              </a:spcAft>
-            </a:pPr>
-            <a:r>
-              <a:rPr sz="1800" b="1">
-                <a:solidFill>
-                  <a:srgbClr val="D4AF37"/>
-                </a:solidFill>
-                <a:latin typeface="Microsoft YaHei"/>
-                <a:ea typeface="Microsoft YaHei"/>
-              </a:rPr>
-              <a:t>6  ·  出貨</a:t>
-            </a:r>
-          </a:p>
-        </p:txBody>
-      </p:sp>
-      <p:sp>
-        <p:nvSpPr>
-          <p:cNvPr id="22" name="TextBox 21"/>
-          <p:cNvSpPr txBox="1"/>
-          <p:nvPr/>
-        </p:nvSpPr>
-        <p:spPr>
-          <a:xfrm>
-            <a:off x="8321040" y="4434840"/>
-            <a:ext cx="3291840" cy="1554480"/>
-          </a:xfrm>
-          <a:prstGeom prst="rect">
-            <a:avLst/>
-          </a:prstGeom>
-          <a:noFill/>
-        </p:spPr>
-        <p:txBody>
-          <a:bodyPr wrap="square">
-            <a:spAutoFit/>
-          </a:bodyPr>
-          <a:lstStyle/>
-          <a:p>
-            <a:pPr algn="l">
-              <a:spcAft>
-                <a:spcPts val="600"/>
-              </a:spcAft>
-            </a:pPr>
-            <a:r>
-              <a:rPr sz="1500" b="0">
-                <a:solidFill>
-                  <a:srgbClr val="F4E8C8"/>
-                </a:solidFill>
-                <a:latin typeface="Microsoft YaHei"/>
-                <a:ea typeface="Microsoft YaHei"/>
-              </a:rPr>
-              <a:t>npm run build</a:t>
-            </a:r>
-          </a:p>
-          <a:p>
-            <a:pPr algn="l">
-              <a:spcAft>
-                <a:spcPts val="600"/>
-              </a:spcAft>
-            </a:pPr>
-            <a:r>
-              <a:rPr sz="1500" b="0">
-                <a:solidFill>
-                  <a:srgbClr val="F4E8C8"/>
-                </a:solidFill>
-                <a:latin typeface="Microsoft YaHei"/>
-                <a:ea typeface="Microsoft YaHei"/>
-              </a:rPr>
-              <a:t>推 gh-pages。</a:t>
-            </a:r>
-          </a:p>
-          <a:p>
-            <a:pPr algn="l">
-              <a:spcAft>
-                <a:spcPts val="600"/>
-              </a:spcAft>
-            </a:pPr>
-            <a:r>
-              <a:rPr sz="1500" b="0">
-                <a:solidFill>
-                  <a:srgbClr val="F4E8C8"/>
-                </a:solidFill>
-                <a:latin typeface="Microsoft YaHei"/>
-                <a:ea typeface="Microsoft YaHei"/>
-              </a:rPr>
-              <a:t>github.io/family</a:t>
+              <a:t>Vite + 原生 JS。規則、編劇、畫師分檔。GitHub Pages 可直接開。</a:t>
             </a:r>
           </a:p>
         </p:txBody>
@@ -10296,8 +11497,8 @@
         </p:nvSpPr>
         <p:spPr>
           <a:xfrm>
-            <a:off x="640080" y="256032"/>
-            <a:ext cx="10972800" cy="777240"/>
+            <a:off x="502920" y="6473952"/>
+            <a:ext cx="7498079" cy="256032"/>
           </a:xfrm>
           <a:prstGeom prst="rect">
             <a:avLst/>
@@ -10316,6 +11517,86 @@
               </a:spcAft>
             </a:pPr>
             <a:r>
+              <a:rPr sz="1100" b="0">
+                <a:solidFill>
+                  <a:srgbClr val="B8A888"/>
+                </a:solidFill>
+                <a:latin typeface="Microsoft YaHei"/>
+                <a:ea typeface="Microsoft YaHei"/>
+              </a:rPr>
+              <a:t>教父世家  ·  THE FAMILY</a:t>
+            </a:r>
+          </a:p>
+        </p:txBody>
+      </p:sp>
+      <p:sp>
+        <p:nvSpPr>
+          <p:cNvPr id="5" name="TextBox 4"/>
+          <p:cNvSpPr txBox="1"/>
+          <p:nvPr/>
+        </p:nvSpPr>
+        <p:spPr>
+          <a:xfrm>
+            <a:off x="9509760" y="6473952"/>
+            <a:ext cx="2103120" cy="256032"/>
+          </a:xfrm>
+          <a:prstGeom prst="rect">
+            <a:avLst/>
+          </a:prstGeom>
+          <a:noFill/>
+        </p:spPr>
+        <p:txBody>
+          <a:bodyPr wrap="square">
+            <a:spAutoFit/>
+          </a:bodyPr>
+          <a:lstStyle/>
+          <a:p>
+            <a:pPr algn="r">
+              <a:spcAft>
+                <a:spcPts val="600"/>
+              </a:spcAft>
+            </a:pPr>
+            <a:r>
+              <a:rPr sz="1100" b="0">
+                <a:solidFill>
+                  <a:srgbClr val="B8A888"/>
+                </a:solidFill>
+                <a:latin typeface="Microsoft YaHei"/>
+                <a:ea typeface="Microsoft YaHei"/>
+              </a:rPr>
+              <a:t>08  /  11</a:t>
+            </a:r>
+          </a:p>
+        </p:txBody>
+      </p:sp>
+      <p:sp>
+        <p:nvSpPr>
+          <p:cNvPr id="6" name="TextBox 5"/>
+          <p:cNvSpPr txBox="1"/>
+          <p:nvPr/>
+        </p:nvSpPr>
+        <p:spPr>
+          <a:xfrm>
+            <a:off x="640080" y="219456"/>
+            <a:ext cx="10972800" cy="777240"/>
+          </a:xfrm>
+          <a:prstGeom prst="rect">
+            <a:avLst/>
+          </a:prstGeom>
+          <a:noFill/>
+        </p:spPr>
+        <p:txBody>
+          <a:bodyPr wrap="square">
+            <a:spAutoFit/>
+          </a:bodyPr>
+          <a:lstStyle/>
+          <a:p>
+            <a:pPr algn="l">
+              <a:spcAft>
+                <a:spcPts val="600"/>
+              </a:spcAft>
+            </a:pPr>
+            <a:r>
               <a:rPr sz="1400" b="0">
                 <a:solidFill>
                   <a:srgbClr val="D4AF37"/>
@@ -10323,7 +11604,7 @@
                 <a:latin typeface="Microsoft YaHei"/>
                 <a:ea typeface="Microsoft YaHei"/>
               </a:rPr>
-              <a:t>07  ·  工程回路</a:t>
+              <a:t>07  ·  教父世家製作 workflow</a:t>
             </a:r>
           </a:p>
           <a:p>
@@ -10333,28 +11614,28 @@
               </a:spcAft>
             </a:pPr>
             <a:r>
-              <a:rPr sz="2600" b="1">
+              <a:rPr sz="2400" b="1">
                 <a:solidFill>
                   <a:srgbClr val="F4E8C8"/>
                 </a:solidFill>
                 <a:latin typeface="Microsoft YaHei"/>
                 <a:ea typeface="Microsoft YaHei"/>
               </a:rPr>
-              <a:t>六個檔，一條每日回路：改 → 睇 → 推</a:t>
-            </a:r>
-          </a:p>
-        </p:txBody>
-      </p:sp>
-      <p:sp>
-        <p:nvSpPr>
-          <p:cNvPr id="5" name="Rounded Rectangle 4"/>
+              <a:t>先立天道，再寫規則，畫面先演示再 LLM</a:t>
+            </a:r>
+          </a:p>
+        </p:txBody>
+      </p:sp>
+      <p:sp>
+        <p:nvSpPr>
+          <p:cNvPr id="7" name="Rounded Rectangle 6"/>
           <p:cNvSpPr/>
           <p:nvPr/>
         </p:nvSpPr>
         <p:spPr>
           <a:xfrm>
-            <a:off x="457200" y="1170432"/>
-            <a:ext cx="3657600" cy="1389888"/>
+            <a:off x="457200" y="1115568"/>
+            <a:ext cx="3657600" cy="2286000"/>
           </a:xfrm>
           <a:prstGeom prst="roundRect">
             <a:avLst/>
@@ -10392,13 +11673,13 @@
       </p:sp>
       <p:sp>
         <p:nvSpPr>
-          <p:cNvPr id="6" name="TextBox 5"/>
+          <p:cNvPr id="8" name="TextBox 7"/>
           <p:cNvSpPr txBox="1"/>
           <p:nvPr/>
         </p:nvSpPr>
         <p:spPr>
           <a:xfrm>
-            <a:off x="640080" y="1335024"/>
+            <a:off x="640080" y="1261872"/>
             <a:ext cx="3291840" cy="365760"/>
           </a:xfrm>
           <a:prstGeom prst="rect">
@@ -10420,26 +11701,26 @@
             <a:r>
               <a:rPr sz="1800" b="1">
                 <a:solidFill>
-                  <a:srgbClr val="7EC8C3"/>
-                </a:solidFill>
-                <a:latin typeface="Microsoft YaHei"/>
-                <a:ea typeface="Microsoft YaHei"/>
-              </a:rPr>
-              <a:t>world.js</a:t>
-            </a:r>
-          </a:p>
-        </p:txBody>
-      </p:sp>
-      <p:sp>
-        <p:nvSpPr>
-          <p:cNvPr id="7" name="TextBox 6"/>
+                  <a:srgbClr val="D4AF37"/>
+                </a:solidFill>
+                <a:latin typeface="Microsoft YaHei"/>
+                <a:ea typeface="Microsoft YaHei"/>
+              </a:rPr>
+              <a:t>1  ·  立意</a:t>
+            </a:r>
+          </a:p>
+        </p:txBody>
+      </p:sp>
+      <p:sp>
+        <p:nvSpPr>
+          <p:cNvPr id="9" name="TextBox 8"/>
           <p:cNvSpPr txBox="1"/>
           <p:nvPr/>
         </p:nvSpPr>
         <p:spPr>
           <a:xfrm>
-            <a:off x="640080" y="1792224"/>
-            <a:ext cx="3291840" cy="548640"/>
+            <a:off x="640080" y="1709928"/>
+            <a:ext cx="3291840" cy="1508760"/>
           </a:xfrm>
           <a:prstGeom prst="rect">
             <a:avLst/>
@@ -10465,21 +11746,55 @@
                 <a:latin typeface="Microsoft YaHei"/>
                 <a:ea typeface="Microsoft YaHei"/>
               </a:rPr>
-              <a:t>月結、人物、天道三鍵</a:t>
-            </a:r>
-          </a:p>
-        </p:txBody>
-      </p:sp>
-      <p:sp>
-        <p:nvSpPr>
-          <p:cNvPr id="8" name="Rounded Rectangle 7"/>
+              <a:t>玩家係天道。</a:t>
+            </a:r>
+          </a:p>
+          <a:p>
+            <a:pPr algn="l">
+              <a:spcAft>
+                <a:spcPts val="600"/>
+              </a:spcAft>
+            </a:pPr>
+            <a:r>
+              <a:rPr sz="1500" b="0">
+                <a:solidFill>
+                  <a:srgbClr val="F4E8C8"/>
+                </a:solidFill>
+                <a:latin typeface="Microsoft YaHei"/>
+                <a:ea typeface="Microsoft YaHei"/>
+              </a:rPr>
+              <a:t>養人、改命、睇戲。</a:t>
+            </a:r>
+          </a:p>
+          <a:p>
+            <a:pPr algn="l">
+              <a:spcAft>
+                <a:spcPts val="600"/>
+              </a:spcAft>
+            </a:pPr>
+            <a:r>
+              <a:rPr sz="1500" b="0">
+                <a:solidFill>
+                  <a:srgbClr val="F4E8C8"/>
+                </a:solidFill>
+                <a:latin typeface="Microsoft YaHei"/>
+                <a:ea typeface="Microsoft YaHei"/>
+              </a:rPr>
+              <a:t>唔做點擊農夫。</a:t>
+            </a:r>
+          </a:p>
+        </p:txBody>
+      </p:sp>
+      <p:sp>
+        <p:nvSpPr>
+          <p:cNvPr id="10" name="Rounded Rectangle 9"/>
           <p:cNvSpPr/>
           <p:nvPr/>
         </p:nvSpPr>
         <p:spPr>
           <a:xfrm>
-            <a:off x="4297680" y="1170432"/>
-            <a:ext cx="3657600" cy="1389888"/>
+            <a:off x="4297680" y="1115568"/>
+            <a:ext cx="3657600" cy="2286000"/>
           </a:xfrm>
           <a:prstGeom prst="roundRect">
             <a:avLst/>
@@ -10517,13 +11832,13 @@
       </p:sp>
       <p:sp>
         <p:nvSpPr>
-          <p:cNvPr id="9" name="TextBox 8"/>
+          <p:cNvPr id="11" name="TextBox 10"/>
           <p:cNvSpPr txBox="1"/>
           <p:nvPr/>
         </p:nvSpPr>
         <p:spPr>
           <a:xfrm>
-            <a:off x="4480560" y="1335024"/>
+            <a:off x="4480560" y="1261872"/>
             <a:ext cx="3291840" cy="365760"/>
           </a:xfrm>
           <a:prstGeom prst="rect">
@@ -10545,26 +11860,26 @@
             <a:r>
               <a:rPr sz="1800" b="1">
                 <a:solidFill>
-                  <a:srgbClr val="7EC8C3"/>
-                </a:solidFill>
-                <a:latin typeface="Microsoft YaHei"/>
-                <a:ea typeface="Microsoft YaHei"/>
-              </a:rPr>
-              <a:t>screenplay.js</a:t>
-            </a:r>
-          </a:p>
-        </p:txBody>
-      </p:sp>
-      <p:sp>
-        <p:nvSpPr>
-          <p:cNvPr id="10" name="TextBox 9"/>
+                  <a:srgbClr val="D4AF37"/>
+                </a:solidFill>
+                <a:latin typeface="Microsoft YaHei"/>
+                <a:ea typeface="Microsoft YaHei"/>
+              </a:rPr>
+              <a:t>2  ·  規則</a:t>
+            </a:r>
+          </a:p>
+        </p:txBody>
+      </p:sp>
+      <p:sp>
+        <p:nvSpPr>
+          <p:cNvPr id="12" name="TextBox 11"/>
           <p:cNvSpPr txBox="1"/>
           <p:nvPr/>
         </p:nvSpPr>
         <p:spPr>
           <a:xfrm>
-            <a:off x="4480560" y="1792224"/>
-            <a:ext cx="3291840" cy="548640"/>
+            <a:off x="4480560" y="1709928"/>
+            <a:ext cx="3291840" cy="1508760"/>
           </a:xfrm>
           <a:prstGeom prst="rect">
             <a:avLst/>
@@ -10590,21 +11905,55 @@
                 <a:latin typeface="Microsoft YaHei"/>
                 <a:ea typeface="Microsoft YaHei"/>
               </a:rPr>
-              <a:t>導演、三幕、OpenRouter</a:t>
-            </a:r>
-          </a:p>
-        </p:txBody>
-      </p:sp>
-      <p:sp>
-        <p:nvSpPr>
-          <p:cNvPr id="11" name="Rounded Rectangle 10"/>
+              <a:t>world.js</a:t>
+            </a:r>
+          </a:p>
+          <a:p>
+            <a:pPr algn="l">
+              <a:spcAft>
+                <a:spcPts val="600"/>
+              </a:spcAft>
+            </a:pPr>
+            <a:r>
+              <a:rPr sz="1500" b="0">
+                <a:solidFill>
+                  <a:srgbClr val="F4E8C8"/>
+                </a:solidFill>
+                <a:latin typeface="Microsoft YaHei"/>
+                <a:ea typeface="Microsoft YaHei"/>
+              </a:rPr>
+              <a:t>月結、根骨、壽元</a:t>
+            </a:r>
+          </a:p>
+          <a:p>
+            <a:pPr algn="l">
+              <a:spcAft>
+                <a:spcPts val="600"/>
+              </a:spcAft>
+            </a:pPr>
+            <a:r>
+              <a:rPr sz="1500" b="0">
+                <a:solidFill>
+                  <a:srgbClr val="F4E8C8"/>
+                </a:solidFill>
+                <a:latin typeface="Microsoft YaHei"/>
+                <a:ea typeface="Microsoft YaHei"/>
+              </a:rPr>
+              <a:t>氣運、死亡、傳承。</a:t>
+            </a:r>
+          </a:p>
+        </p:txBody>
+      </p:sp>
+      <p:sp>
+        <p:nvSpPr>
+          <p:cNvPr id="13" name="Rounded Rectangle 12"/>
           <p:cNvSpPr/>
           <p:nvPr/>
         </p:nvSpPr>
         <p:spPr>
           <a:xfrm>
-            <a:off x="8138160" y="1170432"/>
-            <a:ext cx="3657600" cy="1389888"/>
+            <a:off x="8138160" y="1115568"/>
+            <a:ext cx="3657600" cy="2286000"/>
           </a:xfrm>
           <a:prstGeom prst="roundRect">
             <a:avLst/>
@@ -10642,13 +11991,13 @@
       </p:sp>
       <p:sp>
         <p:nvSpPr>
-          <p:cNvPr id="12" name="TextBox 11"/>
+          <p:cNvPr id="14" name="TextBox 13"/>
           <p:cNvSpPr txBox="1"/>
           <p:nvPr/>
         </p:nvSpPr>
         <p:spPr>
           <a:xfrm>
-            <a:off x="8321040" y="1335024"/>
+            <a:off x="8321040" y="1261872"/>
             <a:ext cx="3291840" cy="365760"/>
           </a:xfrm>
           <a:prstGeom prst="rect">
@@ -10670,26 +12019,26 @@
             <a:r>
               <a:rPr sz="1800" b="1">
                 <a:solidFill>
-                  <a:srgbClr val="7EC8C3"/>
-                </a:solidFill>
-                <a:latin typeface="Microsoft YaHei"/>
-                <a:ea typeface="Microsoft YaHei"/>
-              </a:rPr>
-              <a:t>main.js</a:t>
-            </a:r>
-          </a:p>
-        </p:txBody>
-      </p:sp>
-      <p:sp>
-        <p:nvSpPr>
-          <p:cNvPr id="13" name="TextBox 12"/>
+                  <a:srgbClr val="D4AF37"/>
+                </a:solidFill>
+                <a:latin typeface="Microsoft YaHei"/>
+                <a:ea typeface="Microsoft YaHei"/>
+              </a:rPr>
+              <a:t>3  ·  編劇</a:t>
+            </a:r>
+          </a:p>
+        </p:txBody>
+      </p:sp>
+      <p:sp>
+        <p:nvSpPr>
+          <p:cNvPr id="15" name="TextBox 14"/>
           <p:cNvSpPr txBox="1"/>
           <p:nvPr/>
         </p:nvSpPr>
         <p:spPr>
           <a:xfrm>
-            <a:off x="8321040" y="1792224"/>
-            <a:ext cx="3291840" cy="548640"/>
+            <a:off x="8321040" y="1709928"/>
+            <a:ext cx="3291840" cy="1508760"/>
           </a:xfrm>
           <a:prstGeom prst="rect">
             <a:avLst/>
@@ -10715,21 +12064,55 @@
                 <a:latin typeface="Microsoft YaHei"/>
                 <a:ea typeface="Microsoft YaHei"/>
               </a:rPr>
-              <a:t>HUD、地圖、檢視、操作</a:t>
-            </a:r>
-          </a:p>
-        </p:txBody>
-      </p:sp>
-      <p:sp>
-        <p:nvSpPr>
-          <p:cNvPr id="14" name="Rounded Rectangle 13"/>
+              <a:t>screenplay.js</a:t>
+            </a:r>
+          </a:p>
+          <a:p>
+            <a:pPr algn="l">
+              <a:spcAft>
+                <a:spcPts val="600"/>
+              </a:spcAft>
+            </a:pPr>
+            <a:r>
+              <a:rPr sz="1500" b="0">
+                <a:solidFill>
+                  <a:srgbClr val="F4E8C8"/>
+                </a:solidFill>
+                <a:latin typeface="Microsoft YaHei"/>
+                <a:ea typeface="Microsoft YaHei"/>
+              </a:rPr>
+              <a:t>三幕節奏 + 劇組代班。</a:t>
+            </a:r>
+          </a:p>
+          <a:p>
+            <a:pPr algn="l">
+              <a:spcAft>
+                <a:spcPts val="600"/>
+              </a:spcAft>
+            </a:pPr>
+            <a:r>
+              <a:rPr sz="1500" b="0">
+                <a:solidFill>
+                  <a:srgbClr val="F4E8C8"/>
+                </a:solidFill>
+                <a:latin typeface="Microsoft YaHei"/>
+                <a:ea typeface="Microsoft YaHei"/>
+              </a:rPr>
+              <a:t>有 Key 就背景無限連載。</a:t>
+            </a:r>
+          </a:p>
+        </p:txBody>
+      </p:sp>
+      <p:sp>
+        <p:nvSpPr>
+          <p:cNvPr id="16" name="Rounded Rectangle 15"/>
           <p:cNvSpPr/>
           <p:nvPr/>
         </p:nvSpPr>
         <p:spPr>
           <a:xfrm>
-            <a:off x="457200" y="2724912"/>
-            <a:ext cx="3657600" cy="1389888"/>
+            <a:off x="457200" y="3584448"/>
+            <a:ext cx="3657600" cy="2286000"/>
           </a:xfrm>
           <a:prstGeom prst="roundRect">
             <a:avLst/>
@@ -10767,13 +12150,13 @@
       </p:sp>
       <p:sp>
         <p:nvSpPr>
-          <p:cNvPr id="15" name="TextBox 14"/>
+          <p:cNvPr id="17" name="TextBox 16"/>
           <p:cNvSpPr txBox="1"/>
           <p:nvPr/>
         </p:nvSpPr>
         <p:spPr>
           <a:xfrm>
-            <a:off x="640080" y="2889504"/>
+            <a:off x="640080" y="3730752"/>
             <a:ext cx="3291840" cy="365760"/>
           </a:xfrm>
           <a:prstGeom prst="rect">
@@ -10795,26 +12178,26 @@
             <a:r>
               <a:rPr sz="1800" b="1">
                 <a:solidFill>
-                  <a:srgbClr val="7EC8C3"/>
-                </a:solidFill>
-                <a:latin typeface="Microsoft YaHei"/>
-                <a:ea typeface="Microsoft YaHei"/>
-              </a:rPr>
-              <a:t>style.css</a:t>
-            </a:r>
-          </a:p>
-        </p:txBody>
-      </p:sp>
-      <p:sp>
-        <p:nvSpPr>
-          <p:cNvPr id="16" name="TextBox 15"/>
+                  <a:srgbClr val="D4AF37"/>
+                </a:solidFill>
+                <a:latin typeface="Microsoft YaHei"/>
+                <a:ea typeface="Microsoft YaHei"/>
+              </a:rPr>
+              <a:t>4  ·  皮與聲</a:t>
+            </a:r>
+          </a:p>
+        </p:txBody>
+      </p:sp>
+      <p:sp>
+        <p:nvSpPr>
+          <p:cNvPr id="18" name="TextBox 17"/>
           <p:cNvSpPr txBox="1"/>
           <p:nvPr/>
         </p:nvSpPr>
         <p:spPr>
           <a:xfrm>
-            <a:off x="640080" y="3346704"/>
-            <a:ext cx="3291840" cy="548640"/>
+            <a:off x="640080" y="4178808"/>
+            <a:ext cx="3291840" cy="1508760"/>
           </a:xfrm>
           <a:prstGeom prst="rect">
             <a:avLst/>
@@ -10840,21 +12223,55 @@
                 <a:latin typeface="Microsoft YaHei"/>
                 <a:ea typeface="Microsoft YaHei"/>
               </a:rPr>
-              <a:t>金漆牌坊、墨底描金</a:t>
-            </a:r>
-          </a:p>
-        </p:txBody>
-      </p:sp>
-      <p:sp>
-        <p:nvSpPr>
-          <p:cNvPr id="17" name="Rounded Rectangle 16"/>
+              <a:t>先捆六人+場次演示畫。</a:t>
+            </a:r>
+          </a:p>
+          <a:p>
+            <a:pPr algn="l">
+              <a:spcAft>
+                <a:spcPts val="600"/>
+              </a:spcAft>
+            </a:pPr>
+            <a:r>
+              <a:rPr sz="1500" b="0">
+                <a:solidFill>
+                  <a:srgbClr val="F4E8C8"/>
+                </a:solidFill>
+                <a:latin typeface="Microsoft YaHei"/>
+                <a:ea typeface="Microsoft YaHei"/>
+              </a:rPr>
+              <a:t>再接 LLM 背景出圖。</a:t>
+            </a:r>
+          </a:p>
+          <a:p>
+            <a:pPr algn="l">
+              <a:spcAft>
+                <a:spcPts val="600"/>
+              </a:spcAft>
+            </a:pPr>
+            <a:r>
+              <a:rPr sz="1500" b="0">
+                <a:solidFill>
+                  <a:srgbClr val="F4E8C8"/>
+                </a:solidFill>
+                <a:latin typeface="Microsoft YaHei"/>
+                <a:ea typeface="Microsoft YaHei"/>
+              </a:rPr>
+              <a:t>CSS、Web Audio、嗶哩嵌入。</a:t>
+            </a:r>
+          </a:p>
+        </p:txBody>
+      </p:sp>
+      <p:sp>
+        <p:nvSpPr>
+          <p:cNvPr id="19" name="Rounded Rectangle 18"/>
           <p:cNvSpPr/>
           <p:nvPr/>
         </p:nvSpPr>
         <p:spPr>
           <a:xfrm>
-            <a:off x="4297680" y="2724912"/>
-            <a:ext cx="3657600" cy="1389888"/>
+            <a:off x="4297680" y="3584448"/>
+            <a:ext cx="3657600" cy="2286000"/>
           </a:xfrm>
           <a:prstGeom prst="roundRect">
             <a:avLst/>
@@ -10892,13 +12309,13 @@
       </p:sp>
       <p:sp>
         <p:nvSpPr>
-          <p:cNvPr id="18" name="TextBox 17"/>
+          <p:cNvPr id="20" name="TextBox 19"/>
           <p:cNvSpPr txBox="1"/>
           <p:nvPr/>
         </p:nvSpPr>
         <p:spPr>
           <a:xfrm>
-            <a:off x="4480560" y="2889504"/>
+            <a:off x="4480560" y="3730752"/>
             <a:ext cx="3291840" cy="365760"/>
           </a:xfrm>
           <a:prstGeom prst="rect">
@@ -10920,26 +12337,26 @@
             <a:r>
               <a:rPr sz="1800" b="1">
                 <a:solidFill>
-                  <a:srgbClr val="7EC8C3"/>
-                </a:solidFill>
-                <a:latin typeface="Microsoft YaHei"/>
-                <a:ea typeface="Microsoft YaHei"/>
-              </a:rPr>
-              <a:t>fx.js</a:t>
-            </a:r>
-          </a:p>
-        </p:txBody>
-      </p:sp>
-      <p:sp>
-        <p:nvSpPr>
-          <p:cNvPr id="19" name="TextBox 18"/>
+                  <a:srgbClr val="D4AF37"/>
+                </a:solidFill>
+                <a:latin typeface="Microsoft YaHei"/>
+                <a:ea typeface="Microsoft YaHei"/>
+              </a:rPr>
+              <a:t>5  ·  試玩</a:t>
+            </a:r>
+          </a:p>
+        </p:txBody>
+      </p:sp>
+      <p:sp>
+        <p:nvSpPr>
+          <p:cNvPr id="21" name="TextBox 20"/>
           <p:cNvSpPr txBox="1"/>
           <p:nvPr/>
         </p:nvSpPr>
         <p:spPr>
           <a:xfrm>
-            <a:off x="4480560" y="3346704"/>
-            <a:ext cx="3291840" cy="548640"/>
+            <a:off x="4480560" y="4178808"/>
+            <a:ext cx="3291840" cy="1508760"/>
           </a:xfrm>
           <a:prstGeom prst="rect">
             <a:avLst/>
@@ -10965,21 +12382,55 @@
                 <a:latin typeface="Microsoft YaHei"/>
                 <a:ea typeface="Microsoft YaHei"/>
               </a:rPr>
-              <a:t>靈塵、聚氣、突破金光</a:t>
-            </a:r>
-          </a:p>
-        </p:txBody>
-      </p:sp>
-      <p:sp>
-        <p:nvSpPr>
-          <p:cNvPr id="20" name="Rounded Rectangle 19"/>
+              <a:t>Vite 開 /family/</a:t>
+            </a:r>
+          </a:p>
+          <a:p>
+            <a:pPr algn="l">
+              <a:spcAft>
+                <a:spcPts val="600"/>
+              </a:spcAft>
+            </a:pPr>
+            <a:r>
+              <a:rPr sz="1500" b="0">
+                <a:solidFill>
+                  <a:srgbClr val="F4E8C8"/>
+                </a:solidFill>
+                <a:latin typeface="Microsoft YaHei"/>
+                <a:ea typeface="Microsoft YaHei"/>
+              </a:rPr>
+              <a:t>改完即睇。</a:t>
+            </a:r>
+          </a:p>
+          <a:p>
+            <a:pPr algn="l">
+              <a:spcAft>
+                <a:spcPts val="600"/>
+              </a:spcAft>
+            </a:pPr>
+            <a:r>
+              <a:rPr sz="1500" b="0">
+                <a:solidFill>
+                  <a:srgbClr val="F4E8C8"/>
+                </a:solidFill>
+                <a:latin typeface="Microsoft YaHei"/>
+                <a:ea typeface="Microsoft YaHei"/>
+              </a:rPr>
+              <a:t>細畫面、BGM、文案。</a:t>
+            </a:r>
+          </a:p>
+        </p:txBody>
+      </p:sp>
+      <p:sp>
+        <p:nvSpPr>
+          <p:cNvPr id="22" name="Rounded Rectangle 21"/>
           <p:cNvSpPr/>
           <p:nvPr/>
         </p:nvSpPr>
         <p:spPr>
           <a:xfrm>
-            <a:off x="8138160" y="2724912"/>
-            <a:ext cx="3657600" cy="1389888"/>
+            <a:off x="8138160" y="3584448"/>
+            <a:ext cx="3657600" cy="2286000"/>
           </a:xfrm>
           <a:prstGeom prst="roundRect">
             <a:avLst/>
@@ -11017,13 +12468,13 @@
       </p:sp>
       <p:sp>
         <p:nvSpPr>
-          <p:cNvPr id="21" name="TextBox 20"/>
+          <p:cNvPr id="23" name="TextBox 22"/>
           <p:cNvSpPr txBox="1"/>
           <p:nvPr/>
         </p:nvSpPr>
         <p:spPr>
           <a:xfrm>
-            <a:off x="8321040" y="2889504"/>
+            <a:off x="8321040" y="3730752"/>
             <a:ext cx="3291840" cy="365760"/>
           </a:xfrm>
           <a:prstGeom prst="rect">
@@ -11045,26 +12496,26 @@
             <a:r>
               <a:rPr sz="1800" b="1">
                 <a:solidFill>
-                  <a:srgbClr val="7EC8C3"/>
-                </a:solidFill>
-                <a:latin typeface="Microsoft YaHei"/>
-                <a:ea typeface="Microsoft YaHei"/>
-              </a:rPr>
-              <a:t>audio.js</a:t>
-            </a:r>
-          </a:p>
-        </p:txBody>
-      </p:sp>
-      <p:sp>
-        <p:nvSpPr>
-          <p:cNvPr id="22" name="TextBox 21"/>
+                  <a:srgbClr val="D4AF37"/>
+                </a:solidFill>
+                <a:latin typeface="Microsoft YaHei"/>
+                <a:ea typeface="Microsoft YaHei"/>
+              </a:rPr>
+              <a:t>6  ·  出貨</a:t>
+            </a:r>
+          </a:p>
+        </p:txBody>
+      </p:sp>
+      <p:sp>
+        <p:nvSpPr>
+          <p:cNvPr id="24" name="TextBox 23"/>
           <p:cNvSpPr txBox="1"/>
           <p:nvPr/>
         </p:nvSpPr>
         <p:spPr>
           <a:xfrm>
-            <a:off x="8321040" y="3346704"/>
-            <a:ext cx="3291840" cy="548640"/>
+            <a:off x="8321040" y="4178808"/>
+            <a:ext cx="3291840" cy="1508760"/>
           </a:xfrm>
           <a:prstGeom prst="rect">
             <a:avLst/>
@@ -11090,77 +12541,9 @@
                 <a:latin typeface="Microsoft YaHei"/>
                 <a:ea typeface="Microsoft YaHei"/>
               </a:rPr>
-              <a:t>木魚磬雷 + 嗶哩嵌入</a:t>
-            </a:r>
-          </a:p>
-        </p:txBody>
-      </p:sp>
-      <p:sp>
-        <p:nvSpPr>
-          <p:cNvPr id="23" name="Rounded Rectangle 22"/>
-          <p:cNvSpPr/>
-          <p:nvPr/>
-        </p:nvSpPr>
-        <p:spPr>
-          <a:xfrm>
-            <a:off x="457200" y="4389120"/>
-            <a:ext cx="11247120" cy="1965960"/>
-          </a:xfrm>
-          <a:prstGeom prst="roundRect">
-            <a:avLst/>
-          </a:prstGeom>
-          <a:solidFill>
-            <a:srgbClr val="14100A"/>
-          </a:solidFill>
-          <a:ln w="15875">
-            <a:solidFill>
-              <a:srgbClr val="7EC8C3"/>
-            </a:solidFill>
-          </a:ln>
-        </p:spPr>
-        <p:style>
-          <a:lnRef idx="1">
-            <a:schemeClr val="accent1"/>
-          </a:lnRef>
-          <a:fillRef idx="3">
-            <a:schemeClr val="accent1"/>
-          </a:fillRef>
-          <a:effectRef idx="2">
-            <a:schemeClr val="accent1"/>
-          </a:effectRef>
-          <a:fontRef idx="minor">
-            <a:schemeClr val="lt1"/>
-          </a:fontRef>
-        </p:style>
-        <p:txBody>
-          <a:bodyPr rtlCol="0" anchor="ctr"/>
-          <a:lstStyle/>
-          <a:p>
-            <a:pPr algn="ctr"/>
-          </a:p>
-        </p:txBody>
-      </p:sp>
-      <p:sp>
-        <p:nvSpPr>
-          <p:cNvPr id="24" name="TextBox 23"/>
-          <p:cNvSpPr txBox="1"/>
-          <p:nvPr/>
-        </p:nvSpPr>
-        <p:spPr>
-          <a:xfrm>
-            <a:off x="685800" y="4526280"/>
-            <a:ext cx="10789920" cy="1691640"/>
-          </a:xfrm>
-          <a:prstGeom prst="rect">
-            <a:avLst/>
-          </a:prstGeom>
-          <a:noFill/>
-        </p:spPr>
-        <p:txBody>
-          <a:bodyPr wrap="square">
-            <a:spAutoFit/>
-          </a:bodyPr>
-          <a:lstStyle/>
+              <a:t>npm run build</a:t>
+            </a:r>
+          </a:p>
           <a:p>
             <a:pPr algn="l">
               <a:spcAft>
@@ -11168,14 +12551,14 @@
               </a:spcAft>
             </a:pPr>
             <a:r>
-              <a:rPr sz="1600" b="1">
-                <a:solidFill>
-                  <a:srgbClr val="7EC8C3"/>
-                </a:solidFill>
-                <a:latin typeface="Microsoft YaHei"/>
-                <a:ea typeface="Microsoft YaHei"/>
-              </a:rPr>
-              <a:t>日常　改規則或文案 → npm run dev → 現場睇一場戲 → git commit</a:t>
+              <a:rPr sz="1500" b="0">
+                <a:solidFill>
+                  <a:srgbClr val="F4E8C8"/>
+                </a:solidFill>
+                <a:latin typeface="Microsoft YaHei"/>
+                <a:ea typeface="Microsoft YaHei"/>
+              </a:rPr>
+              <a:t>推 gh-pages。</a:t>
             </a:r>
           </a:p>
           <a:p>
@@ -11185,31 +12568,14 @@
               </a:spcAft>
             </a:pPr>
             <a:r>
-              <a:rPr sz="1600" b="0">
+              <a:rPr sz="1500" b="0">
                 <a:solidFill>
                   <a:srgbClr val="F4E8C8"/>
                 </a:solidFill>
                 <a:latin typeface="Microsoft YaHei"/>
                 <a:ea typeface="Microsoft YaHei"/>
               </a:rPr>
-              <a:t>出貨　npm run build → 將 dist 推去 gh-pages → https://yip-lgtm.github.io/family/</a:t>
-            </a:r>
-          </a:p>
-          <a:p>
-            <a:pPr algn="l">
-              <a:spcAft>
-                <a:spcPts val="600"/>
-              </a:spcAft>
-            </a:pPr>
-            <a:r>
-              <a:rPr sz="1500" b="0">
-                <a:solidFill>
-                  <a:srgbClr val="B8A888"/>
-                </a:solidFill>
-                <a:latin typeface="Microsoft YaHei"/>
-                <a:ea typeface="Microsoft YaHei"/>
-              </a:rPr>
-              <a:t>約束　唔下載嗶哩音源 · 唔抄《教父》對白 · Key 只存瀏覽器 · 劇組永遠可代班</a:t>
+              <a:t>github.io/family</a:t>
             </a:r>
           </a:p>
         </p:txBody>
@@ -11334,8 +12700,8 @@
         </p:nvSpPr>
         <p:spPr>
           <a:xfrm>
-            <a:off x="640080" y="274320"/>
-            <a:ext cx="10972800" cy="777240"/>
+            <a:off x="502920" y="6473952"/>
+            <a:ext cx="7498079" cy="256032"/>
           </a:xfrm>
           <a:prstGeom prst="rect">
             <a:avLst/>
@@ -11354,6 +12720,86 @@
               </a:spcAft>
             </a:pPr>
             <a:r>
+              <a:rPr sz="1100" b="0">
+                <a:solidFill>
+                  <a:srgbClr val="B8A888"/>
+                </a:solidFill>
+                <a:latin typeface="Microsoft YaHei"/>
+                <a:ea typeface="Microsoft YaHei"/>
+              </a:rPr>
+              <a:t>教父世家  ·  THE FAMILY</a:t>
+            </a:r>
+          </a:p>
+        </p:txBody>
+      </p:sp>
+      <p:sp>
+        <p:nvSpPr>
+          <p:cNvPr id="5" name="TextBox 4"/>
+          <p:cNvSpPr txBox="1"/>
+          <p:nvPr/>
+        </p:nvSpPr>
+        <p:spPr>
+          <a:xfrm>
+            <a:off x="9509760" y="6473952"/>
+            <a:ext cx="2103120" cy="256032"/>
+          </a:xfrm>
+          <a:prstGeom prst="rect">
+            <a:avLst/>
+          </a:prstGeom>
+          <a:noFill/>
+        </p:spPr>
+        <p:txBody>
+          <a:bodyPr wrap="square">
+            <a:spAutoFit/>
+          </a:bodyPr>
+          <a:lstStyle/>
+          <a:p>
+            <a:pPr algn="r">
+              <a:spcAft>
+                <a:spcPts val="600"/>
+              </a:spcAft>
+            </a:pPr>
+            <a:r>
+              <a:rPr sz="1100" b="0">
+                <a:solidFill>
+                  <a:srgbClr val="B8A888"/>
+                </a:solidFill>
+                <a:latin typeface="Microsoft YaHei"/>
+                <a:ea typeface="Microsoft YaHei"/>
+              </a:rPr>
+              <a:t>09  /  11</a:t>
+            </a:r>
+          </a:p>
+        </p:txBody>
+      </p:sp>
+      <p:sp>
+        <p:nvSpPr>
+          <p:cNvPr id="6" name="TextBox 5"/>
+          <p:cNvSpPr txBox="1"/>
+          <p:nvPr/>
+        </p:nvSpPr>
+        <p:spPr>
+          <a:xfrm>
+            <a:off x="640080" y="219456"/>
+            <a:ext cx="10972800" cy="777240"/>
+          </a:xfrm>
+          <a:prstGeom prst="rect">
+            <a:avLst/>
+          </a:prstGeom>
+          <a:noFill/>
+        </p:spPr>
+        <p:txBody>
+          <a:bodyPr wrap="square">
+            <a:spAutoFit/>
+          </a:bodyPr>
+          <a:lstStyle/>
+          <a:p>
+            <a:pPr algn="l">
+              <a:spcAft>
+                <a:spcPts val="600"/>
+              </a:spcAft>
+            </a:pPr>
+            <a:r>
               <a:rPr sz="1400" b="0">
                 <a:solidFill>
                   <a:srgbClr val="D4AF37"/>
@@ -11361,7 +12807,7 @@
                 <a:latin typeface="Microsoft YaHei"/>
                 <a:ea typeface="Microsoft YaHei"/>
               </a:rPr>
-              <a:t>08  ·  而家點玩（三分鐘）</a:t>
+              <a:t>08  ·  工程回路</a:t>
             </a:r>
           </a:p>
           <a:p>
@@ -11371,28 +12817,28 @@
               </a:spcAft>
             </a:pPr>
             <a:r>
-              <a:rPr sz="2800" b="1">
+              <a:rPr sz="2600" b="1">
                 <a:solidFill>
                   <a:srgbClr val="F4E8C8"/>
                 </a:solidFill>
                 <a:latin typeface="Microsoft YaHei"/>
                 <a:ea typeface="Microsoft YaHei"/>
               </a:rPr>
-              <a:t>四步入局，唔使註冊</a:t>
-            </a:r>
-          </a:p>
-        </p:txBody>
-      </p:sp>
-      <p:sp>
-        <p:nvSpPr>
-          <p:cNvPr id="5" name="Rounded Rectangle 4"/>
+              <a:t>六個檔，一條每日回路：改 → 睇 → 推</a:t>
+            </a:r>
+          </a:p>
+        </p:txBody>
+      </p:sp>
+      <p:sp>
+        <p:nvSpPr>
+          <p:cNvPr id="7" name="Rounded Rectangle 6"/>
           <p:cNvSpPr/>
           <p:nvPr/>
         </p:nvSpPr>
         <p:spPr>
           <a:xfrm>
-            <a:off x="457200" y="1325880"/>
-            <a:ext cx="2743200" cy="4297680"/>
+            <a:off x="457200" y="1097280"/>
+            <a:ext cx="3657600" cy="1298448"/>
           </a:xfrm>
           <a:prstGeom prst="roundRect">
             <a:avLst/>
@@ -11430,14 +12876,14 @@
       </p:sp>
       <p:sp>
         <p:nvSpPr>
-          <p:cNvPr id="6" name="TextBox 5"/>
+          <p:cNvPr id="8" name="TextBox 7"/>
           <p:cNvSpPr txBox="1"/>
           <p:nvPr/>
         </p:nvSpPr>
         <p:spPr>
           <a:xfrm>
-            <a:off x="640080" y="1554480"/>
-            <a:ext cx="2377440" cy="640080"/>
+            <a:off x="640080" y="1243584"/>
+            <a:ext cx="3291840" cy="347472"/>
           </a:xfrm>
           <a:prstGeom prst="rect">
             <a:avLst/>
@@ -11450,34 +12896,34 @@
           </a:bodyPr>
           <a:lstStyle/>
           <a:p>
-            <a:pPr algn="ctr">
-              <a:spcAft>
-                <a:spcPts val="600"/>
-              </a:spcAft>
-            </a:pPr>
-            <a:r>
-              <a:rPr sz="3600" b="1">
-                <a:solidFill>
-                  <a:srgbClr val="D4AF37"/>
-                </a:solidFill>
-                <a:latin typeface="Microsoft YaHei"/>
-                <a:ea typeface="Microsoft YaHei"/>
-              </a:rPr>
-              <a:t>1</a:t>
-            </a:r>
-          </a:p>
-        </p:txBody>
-      </p:sp>
-      <p:sp>
-        <p:nvSpPr>
-          <p:cNvPr id="7" name="TextBox 6"/>
+            <a:pPr algn="l">
+              <a:spcAft>
+                <a:spcPts val="600"/>
+              </a:spcAft>
+            </a:pPr>
+            <a:r>
+              <a:rPr sz="1800" b="1">
+                <a:solidFill>
+                  <a:srgbClr val="7EC8C3"/>
+                </a:solidFill>
+                <a:latin typeface="Microsoft YaHei"/>
+                <a:ea typeface="Microsoft YaHei"/>
+              </a:rPr>
+              <a:t>world.js</a:t>
+            </a:r>
+          </a:p>
+        </p:txBody>
+      </p:sp>
+      <p:sp>
+        <p:nvSpPr>
+          <p:cNvPr id="9" name="TextBox 8"/>
           <p:cNvSpPr txBox="1"/>
           <p:nvPr/>
         </p:nvSpPr>
         <p:spPr>
           <a:xfrm>
-            <a:off x="640080" y="2286000"/>
-            <a:ext cx="2377440" cy="640080"/>
+            <a:off x="640080" y="1664208"/>
+            <a:ext cx="3291840" cy="502920"/>
           </a:xfrm>
           <a:prstGeom prst="rect">
             <a:avLst/>
@@ -11490,75 +12936,34 @@
           </a:bodyPr>
           <a:lstStyle/>
           <a:p>
-            <a:pPr algn="ctr">
-              <a:spcAft>
-                <a:spcPts val="600"/>
-              </a:spcAft>
-            </a:pPr>
-            <a:r>
-              <a:rPr sz="1800" b="1">
+            <a:pPr algn="l">
+              <a:spcAft>
+                <a:spcPts val="600"/>
+              </a:spcAft>
+            </a:pPr>
+            <a:r>
+              <a:rPr sz="1500" b="0">
                 <a:solidFill>
                   <a:srgbClr val="F4E8C8"/>
                 </a:solidFill>
                 <a:latin typeface="Microsoft YaHei"/>
                 <a:ea typeface="Microsoft YaHei"/>
               </a:rPr>
-              <a:t>打開連結</a:t>
-            </a:r>
-          </a:p>
-        </p:txBody>
-      </p:sp>
-      <p:sp>
-        <p:nvSpPr>
-          <p:cNvPr id="8" name="TextBox 7"/>
-          <p:cNvSpPr txBox="1"/>
-          <p:nvPr/>
-        </p:nvSpPr>
-        <p:spPr>
-          <a:xfrm>
-            <a:off x="594360" y="3063240"/>
-            <a:ext cx="2468880" cy="2194560"/>
-          </a:xfrm>
-          <a:prstGeom prst="rect">
-            <a:avLst/>
-          </a:prstGeom>
-          <a:noFill/>
-        </p:spPr>
-        <p:txBody>
-          <a:bodyPr wrap="square">
-            <a:spAutoFit/>
-          </a:bodyPr>
-          <a:lstStyle/>
-          <a:p>
-            <a:pPr algn="ctr">
-              <a:spcAft>
-                <a:spcPts val="600"/>
-              </a:spcAft>
-            </a:pPr>
-            <a:r>
-              <a:rPr sz="1500" b="0">
-                <a:solidFill>
-                  <a:srgbClr val="B8A888"/>
-                </a:solidFill>
-                <a:latin typeface="Microsoft YaHei"/>
-                <a:ea typeface="Microsoft YaHei"/>
-              </a:rPr>
-              <a:t>yip-lgtm.github.io/family
-撳「承天命」。</a:t>
-            </a:r>
-          </a:p>
-        </p:txBody>
-      </p:sp>
-      <p:sp>
-        <p:nvSpPr>
-          <p:cNvPr id="9" name="Rounded Rectangle 8"/>
+              <a:t>月結、人物、天道四鍵</a:t>
+            </a:r>
+          </a:p>
+        </p:txBody>
+      </p:sp>
+      <p:sp>
+        <p:nvSpPr>
+          <p:cNvPr id="10" name="Rounded Rectangle 9"/>
           <p:cNvSpPr/>
           <p:nvPr/>
         </p:nvSpPr>
         <p:spPr>
           <a:xfrm>
-            <a:off x="3383280" y="1325880"/>
-            <a:ext cx="2743200" cy="4297680"/>
+            <a:off x="4297680" y="1097280"/>
+            <a:ext cx="3657600" cy="1298448"/>
           </a:xfrm>
           <a:prstGeom prst="roundRect">
             <a:avLst/>
@@ -11596,14 +13001,14 @@
       </p:sp>
       <p:sp>
         <p:nvSpPr>
-          <p:cNvPr id="10" name="TextBox 9"/>
+          <p:cNvPr id="11" name="TextBox 10"/>
           <p:cNvSpPr txBox="1"/>
           <p:nvPr/>
         </p:nvSpPr>
         <p:spPr>
           <a:xfrm>
-            <a:off x="3566160" y="1554480"/>
-            <a:ext cx="2377440" cy="640080"/>
+            <a:off x="4480560" y="1243584"/>
+            <a:ext cx="3291840" cy="347472"/>
           </a:xfrm>
           <a:prstGeom prst="rect">
             <a:avLst/>
@@ -11616,34 +13021,34 @@
           </a:bodyPr>
           <a:lstStyle/>
           <a:p>
-            <a:pPr algn="ctr">
-              <a:spcAft>
-                <a:spcPts val="600"/>
-              </a:spcAft>
-            </a:pPr>
-            <a:r>
-              <a:rPr sz="3600" b="1">
-                <a:solidFill>
-                  <a:srgbClr val="D4AF37"/>
-                </a:solidFill>
-                <a:latin typeface="Microsoft YaHei"/>
-                <a:ea typeface="Microsoft YaHei"/>
-              </a:rPr>
-              <a:t>2</a:t>
-            </a:r>
-          </a:p>
-        </p:txBody>
-      </p:sp>
-      <p:sp>
-        <p:nvSpPr>
-          <p:cNvPr id="11" name="TextBox 10"/>
+            <a:pPr algn="l">
+              <a:spcAft>
+                <a:spcPts val="600"/>
+              </a:spcAft>
+            </a:pPr>
+            <a:r>
+              <a:rPr sz="1800" b="1">
+                <a:solidFill>
+                  <a:srgbClr val="7EC8C3"/>
+                </a:solidFill>
+                <a:latin typeface="Microsoft YaHei"/>
+                <a:ea typeface="Microsoft YaHei"/>
+              </a:rPr>
+              <a:t>screenplay.js</a:t>
+            </a:r>
+          </a:p>
+        </p:txBody>
+      </p:sp>
+      <p:sp>
+        <p:nvSpPr>
+          <p:cNvPr id="12" name="TextBox 11"/>
           <p:cNvSpPr txBox="1"/>
           <p:nvPr/>
         </p:nvSpPr>
         <p:spPr>
           <a:xfrm>
-            <a:off x="3566160" y="2286000"/>
-            <a:ext cx="2377440" cy="640080"/>
+            <a:off x="4480560" y="1664208"/>
+            <a:ext cx="3291840" cy="502920"/>
           </a:xfrm>
           <a:prstGeom prst="rect">
             <a:avLst/>
@@ -11656,61 +13061,20 @@
           </a:bodyPr>
           <a:lstStyle/>
           <a:p>
-            <a:pPr algn="ctr">
-              <a:spcAft>
-                <a:spcPts val="600"/>
-              </a:spcAft>
-            </a:pPr>
-            <a:r>
-              <a:rPr sz="1800" b="1">
+            <a:pPr algn="l">
+              <a:spcAft>
+                <a:spcPts val="600"/>
+              </a:spcAft>
+            </a:pPr>
+            <a:r>
+              <a:rPr sz="1500" b="0">
                 <a:solidFill>
                   <a:srgbClr val="F4E8C8"/>
                 </a:solidFill>
                 <a:latin typeface="Microsoft YaHei"/>
                 <a:ea typeface="Microsoft YaHei"/>
               </a:rPr>
-              <a:t>睇一個人</a:t>
-            </a:r>
-          </a:p>
-        </p:txBody>
-      </p:sp>
-      <p:sp>
-        <p:nvSpPr>
-          <p:cNvPr id="12" name="TextBox 11"/>
-          <p:cNvSpPr txBox="1"/>
-          <p:nvPr/>
-        </p:nvSpPr>
-        <p:spPr>
-          <a:xfrm>
-            <a:off x="3520440" y="3063240"/>
-            <a:ext cx="2468880" cy="2194560"/>
-          </a:xfrm>
-          <a:prstGeom prst="rect">
-            <a:avLst/>
-          </a:prstGeom>
-          <a:noFill/>
-        </p:spPr>
-        <p:txBody>
-          <a:bodyPr wrap="square">
-            <a:spAutoFit/>
-          </a:bodyPr>
-          <a:lstStyle/>
-          <a:p>
-            <a:pPr algn="ctr">
-              <a:spcAft>
-                <a:spcPts val="600"/>
-              </a:spcAft>
-            </a:pPr>
-            <a:r>
-              <a:rPr sz="1500" b="0">
-                <a:solidFill>
-                  <a:srgbClr val="B8A888"/>
-                </a:solidFill>
-                <a:latin typeface="Microsoft YaHei"/>
-                <a:ea typeface="Microsoft YaHei"/>
-              </a:rPr>
-              <a:t>點沈清梧或者葉疏影。
-記住佢心事同關係。</a:t>
+              <a:t>導演、三幕、OpenRouter</a:t>
             </a:r>
           </a:p>
         </p:txBody>
@@ -11723,8 +13087,8 @@
         </p:nvSpPr>
         <p:spPr>
           <a:xfrm>
-            <a:off x="6309360" y="1325880"/>
-            <a:ext cx="2743200" cy="4297680"/>
+            <a:off x="8138160" y="1097280"/>
+            <a:ext cx="3657600" cy="1298448"/>
           </a:xfrm>
           <a:prstGeom prst="roundRect">
             <a:avLst/>
@@ -11768,8 +13132,8 @@
         </p:nvSpPr>
         <p:spPr>
           <a:xfrm>
-            <a:off x="6492240" y="1554480"/>
-            <a:ext cx="2377440" cy="640080"/>
+            <a:off x="8321040" y="1243584"/>
+            <a:ext cx="3291840" cy="347472"/>
           </a:xfrm>
           <a:prstGeom prst="rect">
             <a:avLst/>
@@ -11782,20 +13146,20 @@
           </a:bodyPr>
           <a:lstStyle/>
           <a:p>
-            <a:pPr algn="ctr">
-              <a:spcAft>
-                <a:spcPts val="600"/>
-              </a:spcAft>
-            </a:pPr>
-            <a:r>
-              <a:rPr sz="3600" b="1">
-                <a:solidFill>
-                  <a:srgbClr val="D4AF37"/>
-                </a:solidFill>
-                <a:latin typeface="Microsoft YaHei"/>
-                <a:ea typeface="Microsoft YaHei"/>
-              </a:rPr>
-              <a:t>3</a:t>
+            <a:pPr algn="l">
+              <a:spcAft>
+                <a:spcPts val="600"/>
+              </a:spcAft>
+            </a:pPr>
+            <a:r>
+              <a:rPr sz="1800" b="1">
+                <a:solidFill>
+                  <a:srgbClr val="7EC8C3"/>
+                </a:solidFill>
+                <a:latin typeface="Microsoft YaHei"/>
+                <a:ea typeface="Microsoft YaHei"/>
+              </a:rPr>
+              <a:t>main.js</a:t>
             </a:r>
           </a:p>
         </p:txBody>
@@ -11808,8 +13172,8 @@
         </p:nvSpPr>
         <p:spPr>
           <a:xfrm>
-            <a:off x="6492240" y="2286000"/>
-            <a:ext cx="2377440" cy="640080"/>
+            <a:off x="8321040" y="1664208"/>
+            <a:ext cx="3291840" cy="502920"/>
           </a:xfrm>
           <a:prstGeom prst="rect">
             <a:avLst/>
@@ -11822,74 +13186,34 @@
           </a:bodyPr>
           <a:lstStyle/>
           <a:p>
-            <a:pPr algn="ctr">
-              <a:spcAft>
-                <a:spcPts val="600"/>
-              </a:spcAft>
-            </a:pPr>
-            <a:r>
-              <a:rPr sz="1800" b="1">
+            <a:pPr algn="l">
+              <a:spcAft>
+                <a:spcPts val="600"/>
+              </a:spcAft>
+            </a:pPr>
+            <a:r>
+              <a:rPr sz="1500" b="0">
                 <a:solidFill>
                   <a:srgbClr val="F4E8C8"/>
                 </a:solidFill>
                 <a:latin typeface="Microsoft YaHei"/>
                 <a:ea typeface="Microsoft YaHei"/>
               </a:rPr>
-              <a:t>等兩場戲</a:t>
-            </a:r>
-          </a:p>
-        </p:txBody>
-      </p:sp>
-      <p:sp>
-        <p:nvSpPr>
-          <p:cNvPr id="16" name="TextBox 15"/>
-          <p:cNvSpPr txBox="1"/>
-          <p:nvPr/>
-        </p:nvSpPr>
-        <p:spPr>
-          <a:xfrm>
-            <a:off x="6446520" y="3063240"/>
-            <a:ext cx="2468880" cy="2194560"/>
-          </a:xfrm>
-          <a:prstGeom prst="rect">
-            <a:avLst/>
-          </a:prstGeom>
-          <a:noFill/>
-        </p:spPr>
-        <p:txBody>
-          <a:bodyPr wrap="square">
-            <a:spAutoFit/>
-          </a:bodyPr>
-          <a:lstStyle/>
-          <a:p>
-            <a:pPr algn="ctr">
-              <a:spcAft>
-                <a:spcPts val="600"/>
-              </a:spcAft>
-            </a:pPr>
-            <a:r>
-              <a:rPr sz="1500" b="0">
-                <a:solidFill>
-                  <a:srgbClr val="B8A888"/>
-                </a:solidFill>
-                <a:latin typeface="Microsoft YaHei"/>
-                <a:ea typeface="Microsoft YaHei"/>
-              </a:rPr>
-              <a:t>開時間。睇編劇組出第一、第二場。</a:t>
-            </a:r>
-          </a:p>
-        </p:txBody>
-      </p:sp>
-      <p:sp>
-        <p:nvSpPr>
-          <p:cNvPr id="17" name="Rounded Rectangle 16"/>
+              <a:t>HUD、地圖、檢視、操作</a:t>
+            </a:r>
+          </a:p>
+        </p:txBody>
+      </p:sp>
+      <p:sp>
+        <p:nvSpPr>
+          <p:cNvPr id="16" name="Rounded Rectangle 15"/>
           <p:cNvSpPr/>
           <p:nvPr/>
         </p:nvSpPr>
         <p:spPr>
           <a:xfrm>
-            <a:off x="9235440" y="1325880"/>
-            <a:ext cx="2743200" cy="4297680"/>
+            <a:off x="457200" y="2542032"/>
+            <a:ext cx="3657600" cy="1298448"/>
           </a:xfrm>
           <a:prstGeom prst="roundRect">
             <a:avLst/>
@@ -11927,14 +13251,14 @@
       </p:sp>
       <p:sp>
         <p:nvSpPr>
-          <p:cNvPr id="18" name="TextBox 17"/>
+          <p:cNvPr id="17" name="TextBox 16"/>
           <p:cNvSpPr txBox="1"/>
           <p:nvPr/>
         </p:nvSpPr>
         <p:spPr>
           <a:xfrm>
-            <a:off x="9418320" y="1554480"/>
-            <a:ext cx="2377440" cy="640080"/>
+            <a:off x="640080" y="2688336"/>
+            <a:ext cx="3291840" cy="347472"/>
           </a:xfrm>
           <a:prstGeom prst="rect">
             <a:avLst/>
@@ -11947,34 +13271,34 @@
           </a:bodyPr>
           <a:lstStyle/>
           <a:p>
-            <a:pPr algn="ctr">
-              <a:spcAft>
-                <a:spcPts val="600"/>
-              </a:spcAft>
-            </a:pPr>
-            <a:r>
-              <a:rPr sz="3600" b="1">
-                <a:solidFill>
-                  <a:srgbClr val="D4AF37"/>
-                </a:solidFill>
-                <a:latin typeface="Microsoft YaHei"/>
-                <a:ea typeface="Microsoft YaHei"/>
-              </a:rPr>
-              <a:t>4</a:t>
-            </a:r>
-          </a:p>
-        </p:txBody>
-      </p:sp>
-      <p:sp>
-        <p:nvSpPr>
-          <p:cNvPr id="19" name="TextBox 18"/>
+            <a:pPr algn="l">
+              <a:spcAft>
+                <a:spcPts val="600"/>
+              </a:spcAft>
+            </a:pPr>
+            <a:r>
+              <a:rPr sz="1800" b="1">
+                <a:solidFill>
+                  <a:srgbClr val="7EC8C3"/>
+                </a:solidFill>
+                <a:latin typeface="Microsoft YaHei"/>
+                <a:ea typeface="Microsoft YaHei"/>
+              </a:rPr>
+              <a:t>style.css</a:t>
+            </a:r>
+          </a:p>
+        </p:txBody>
+      </p:sp>
+      <p:sp>
+        <p:nvSpPr>
+          <p:cNvPr id="18" name="TextBox 17"/>
           <p:cNvSpPr txBox="1"/>
           <p:nvPr/>
         </p:nvSpPr>
         <p:spPr>
           <a:xfrm>
-            <a:off x="9418320" y="2286000"/>
-            <a:ext cx="2377440" cy="640080"/>
+            <a:off x="640080" y="3108960"/>
+            <a:ext cx="3291840" cy="502920"/>
           </a:xfrm>
           <a:prstGeom prst="rect">
             <a:avLst/>
@@ -11987,21 +13311,66 @@
           </a:bodyPr>
           <a:lstStyle/>
           <a:p>
-            <a:pPr algn="ctr">
-              <a:spcAft>
-                <a:spcPts val="600"/>
-              </a:spcAft>
-            </a:pPr>
-            <a:r>
-              <a:rPr sz="1800" b="1">
+            <a:pPr algn="l">
+              <a:spcAft>
+                <a:spcPts val="600"/>
+              </a:spcAft>
+            </a:pPr>
+            <a:r>
+              <a:rPr sz="1500" b="0">
                 <a:solidFill>
                   <a:srgbClr val="F4E8C8"/>
                 </a:solidFill>
                 <a:latin typeface="Microsoft YaHei"/>
                 <a:ea typeface="Microsoft YaHei"/>
               </a:rPr>
-              <a:t>先改一次命</a:t>
-            </a:r>
+              <a:t>金漆牌坊、墨底描金、父印</a:t>
+            </a:r>
+          </a:p>
+        </p:txBody>
+      </p:sp>
+      <p:sp>
+        <p:nvSpPr>
+          <p:cNvPr id="19" name="Rounded Rectangle 18"/>
+          <p:cNvSpPr/>
+          <p:nvPr/>
+        </p:nvSpPr>
+        <p:spPr>
+          <a:xfrm>
+            <a:off x="4297680" y="2542032"/>
+            <a:ext cx="3657600" cy="1298448"/>
+          </a:xfrm>
+          <a:prstGeom prst="roundRect">
+            <a:avLst/>
+          </a:prstGeom>
+          <a:solidFill>
+            <a:srgbClr val="14100A"/>
+          </a:solidFill>
+          <a:ln w="15875">
+            <a:solidFill>
+              <a:srgbClr val="D4AF37"/>
+            </a:solidFill>
+          </a:ln>
+        </p:spPr>
+        <p:style>
+          <a:lnRef idx="1">
+            <a:schemeClr val="accent1"/>
+          </a:lnRef>
+          <a:fillRef idx="3">
+            <a:schemeClr val="accent1"/>
+          </a:fillRef>
+          <a:effectRef idx="2">
+            <a:schemeClr val="accent1"/>
+          </a:effectRef>
+          <a:fontRef idx="minor">
+            <a:schemeClr val="lt1"/>
+          </a:fontRef>
+        </p:style>
+        <p:txBody>
+          <a:bodyPr rtlCol="0" anchor="ctr"/>
+          <a:lstStyle/>
+          <a:p>
+            <a:pPr algn="ctr"/>
           </a:p>
         </p:txBody>
       </p:sp>
@@ -12013,8 +13382,8 @@
         </p:nvSpPr>
         <p:spPr>
           <a:xfrm>
-            <a:off x="9372600" y="3063240"/>
-            <a:ext cx="2468880" cy="2194560"/>
+            <a:off x="4480560" y="2688336"/>
+            <a:ext cx="3291840" cy="347472"/>
           </a:xfrm>
           <a:prstGeom prst="rect">
             <a:avLst/>
@@ -12027,7 +13396,47 @@
           </a:bodyPr>
           <a:lstStyle/>
           <a:p>
-            <a:pPr algn="ctr">
+            <a:pPr algn="l">
+              <a:spcAft>
+                <a:spcPts val="600"/>
+              </a:spcAft>
+            </a:pPr>
+            <a:r>
+              <a:rPr sz="1800" b="1">
+                <a:solidFill>
+                  <a:srgbClr val="7EC8C3"/>
+                </a:solidFill>
+                <a:latin typeface="Microsoft YaHei"/>
+                <a:ea typeface="Microsoft YaHei"/>
+              </a:rPr>
+              <a:t>fx.js</a:t>
+            </a:r>
+          </a:p>
+        </p:txBody>
+      </p:sp>
+      <p:sp>
+        <p:nvSpPr>
+          <p:cNvPr id="21" name="TextBox 20"/>
+          <p:cNvSpPr txBox="1"/>
+          <p:nvPr/>
+        </p:nvSpPr>
+        <p:spPr>
+          <a:xfrm>
+            <a:off x="4480560" y="3108960"/>
+            <a:ext cx="3291840" cy="502920"/>
+          </a:xfrm>
+          <a:prstGeom prst="rect">
+            <a:avLst/>
+          </a:prstGeom>
+          <a:noFill/>
+        </p:spPr>
+        <p:txBody>
+          <a:bodyPr wrap="square">
+            <a:spAutoFit/>
+          </a:bodyPr>
+          <a:lstStyle/>
+          <a:p>
+            <a:pPr algn="l">
               <a:spcAft>
                 <a:spcPts val="600"/>
               </a:spcAft>
@@ -12035,13 +13444,273 @@
             <a:r>
               <a:rPr sz="1500" b="0">
                 <a:solidFill>
+                  <a:srgbClr val="F4E8C8"/>
+                </a:solidFill>
+                <a:latin typeface="Microsoft YaHei"/>
+                <a:ea typeface="Microsoft YaHei"/>
+              </a:rPr>
+              <a:t>靈塵、聚氣、突破金光</a:t>
+            </a:r>
+          </a:p>
+        </p:txBody>
+      </p:sp>
+      <p:sp>
+        <p:nvSpPr>
+          <p:cNvPr id="22" name="Rounded Rectangle 21"/>
+          <p:cNvSpPr/>
+          <p:nvPr/>
+        </p:nvSpPr>
+        <p:spPr>
+          <a:xfrm>
+            <a:off x="8138160" y="2542032"/>
+            <a:ext cx="3657600" cy="1298448"/>
+          </a:xfrm>
+          <a:prstGeom prst="roundRect">
+            <a:avLst/>
+          </a:prstGeom>
+          <a:solidFill>
+            <a:srgbClr val="14100A"/>
+          </a:solidFill>
+          <a:ln w="15875">
+            <a:solidFill>
+              <a:srgbClr val="D4AF37"/>
+            </a:solidFill>
+          </a:ln>
+        </p:spPr>
+        <p:style>
+          <a:lnRef idx="1">
+            <a:schemeClr val="accent1"/>
+          </a:lnRef>
+          <a:fillRef idx="3">
+            <a:schemeClr val="accent1"/>
+          </a:fillRef>
+          <a:effectRef idx="2">
+            <a:schemeClr val="accent1"/>
+          </a:effectRef>
+          <a:fontRef idx="minor">
+            <a:schemeClr val="lt1"/>
+          </a:fontRef>
+        </p:style>
+        <p:txBody>
+          <a:bodyPr rtlCol="0" anchor="ctr"/>
+          <a:lstStyle/>
+          <a:p>
+            <a:pPr algn="ctr"/>
+          </a:p>
+        </p:txBody>
+      </p:sp>
+      <p:sp>
+        <p:nvSpPr>
+          <p:cNvPr id="23" name="TextBox 22"/>
+          <p:cNvSpPr txBox="1"/>
+          <p:nvPr/>
+        </p:nvSpPr>
+        <p:spPr>
+          <a:xfrm>
+            <a:off x="8321040" y="2688336"/>
+            <a:ext cx="3291840" cy="347472"/>
+          </a:xfrm>
+          <a:prstGeom prst="rect">
+            <a:avLst/>
+          </a:prstGeom>
+          <a:noFill/>
+        </p:spPr>
+        <p:txBody>
+          <a:bodyPr wrap="square">
+            <a:spAutoFit/>
+          </a:bodyPr>
+          <a:lstStyle/>
+          <a:p>
+            <a:pPr algn="l">
+              <a:spcAft>
+                <a:spcPts val="600"/>
+              </a:spcAft>
+            </a:pPr>
+            <a:r>
+              <a:rPr sz="1800" b="1">
+                <a:solidFill>
+                  <a:srgbClr val="7EC8C3"/>
+                </a:solidFill>
+                <a:latin typeface="Microsoft YaHei"/>
+                <a:ea typeface="Microsoft YaHei"/>
+              </a:rPr>
+              <a:t>audio.js</a:t>
+            </a:r>
+          </a:p>
+        </p:txBody>
+      </p:sp>
+      <p:sp>
+        <p:nvSpPr>
+          <p:cNvPr id="24" name="TextBox 23"/>
+          <p:cNvSpPr txBox="1"/>
+          <p:nvPr/>
+        </p:nvSpPr>
+        <p:spPr>
+          <a:xfrm>
+            <a:off x="8321040" y="3108960"/>
+            <a:ext cx="3291840" cy="502920"/>
+          </a:xfrm>
+          <a:prstGeom prst="rect">
+            <a:avLst/>
+          </a:prstGeom>
+          <a:noFill/>
+        </p:spPr>
+        <p:txBody>
+          <a:bodyPr wrap="square">
+            <a:spAutoFit/>
+          </a:bodyPr>
+          <a:lstStyle/>
+          <a:p>
+            <a:pPr algn="l">
+              <a:spcAft>
+                <a:spcPts val="600"/>
+              </a:spcAft>
+            </a:pPr>
+            <a:r>
+              <a:rPr sz="1500" b="0">
+                <a:solidFill>
+                  <a:srgbClr val="F4E8C8"/>
+                </a:solidFill>
+                <a:latin typeface="Microsoft YaHei"/>
+                <a:ea typeface="Microsoft YaHei"/>
+              </a:rPr>
+              <a:t>木魚磬雷 + 嗶哩嵌入</a:t>
+            </a:r>
+          </a:p>
+        </p:txBody>
+      </p:sp>
+      <p:sp>
+        <p:nvSpPr>
+          <p:cNvPr id="25" name="Rounded Rectangle 24"/>
+          <p:cNvSpPr/>
+          <p:nvPr/>
+        </p:nvSpPr>
+        <p:spPr>
+          <a:xfrm>
+            <a:off x="457200" y="4114800"/>
+            <a:ext cx="11247120" cy="2084831"/>
+          </a:xfrm>
+          <a:prstGeom prst="roundRect">
+            <a:avLst/>
+          </a:prstGeom>
+          <a:solidFill>
+            <a:srgbClr val="14100A"/>
+          </a:solidFill>
+          <a:ln w="15875">
+            <a:solidFill>
+              <a:srgbClr val="7EC8C3"/>
+            </a:solidFill>
+          </a:ln>
+        </p:spPr>
+        <p:style>
+          <a:lnRef idx="1">
+            <a:schemeClr val="accent1"/>
+          </a:lnRef>
+          <a:fillRef idx="3">
+            <a:schemeClr val="accent1"/>
+          </a:fillRef>
+          <a:effectRef idx="2">
+            <a:schemeClr val="accent1"/>
+          </a:effectRef>
+          <a:fontRef idx="minor">
+            <a:schemeClr val="lt1"/>
+          </a:fontRef>
+        </p:style>
+        <p:txBody>
+          <a:bodyPr rtlCol="0" anchor="ctr"/>
+          <a:lstStyle/>
+          <a:p>
+            <a:pPr algn="ctr"/>
+          </a:p>
+        </p:txBody>
+      </p:sp>
+      <p:sp>
+        <p:nvSpPr>
+          <p:cNvPr id="26" name="TextBox 25"/>
+          <p:cNvSpPr txBox="1"/>
+          <p:nvPr/>
+        </p:nvSpPr>
+        <p:spPr>
+          <a:xfrm>
+            <a:off x="685800" y="4242816"/>
+            <a:ext cx="10789920" cy="1828800"/>
+          </a:xfrm>
+          <a:prstGeom prst="rect">
+            <a:avLst/>
+          </a:prstGeom>
+          <a:noFill/>
+        </p:spPr>
+        <p:txBody>
+          <a:bodyPr wrap="square">
+            <a:spAutoFit/>
+          </a:bodyPr>
+          <a:lstStyle/>
+          <a:p>
+            <a:pPr algn="l">
+              <a:spcAft>
+                <a:spcPts val="600"/>
+              </a:spcAft>
+            </a:pPr>
+            <a:r>
+              <a:rPr sz="1600" b="1">
+                <a:solidFill>
+                  <a:srgbClr val="7EC8C3"/>
+                </a:solidFill>
+                <a:latin typeface="Microsoft YaHei"/>
+                <a:ea typeface="Microsoft YaHei"/>
+              </a:rPr>
+              <a:t>畫面　demoArt.js 捆演示畫 → illustrate.js 背景出 512 檔圖 → 靜默重試 → 畫好先換</a:t>
+            </a:r>
+          </a:p>
+          <a:p>
+            <a:pPr algn="l">
+              <a:spcAft>
+                <a:spcPts val="600"/>
+              </a:spcAft>
+            </a:pPr>
+            <a:r>
+              <a:rPr sz="1500" b="0">
+                <a:solidFill>
+                  <a:srgbClr val="F4E8C8"/>
+                </a:solidFill>
+                <a:latin typeface="Microsoft YaHei"/>
+                <a:ea typeface="Microsoft YaHei"/>
+              </a:rPr>
+              <a:t>日常　改規則或文案 → npm run dev → 現場睇一場戲 → git commit</a:t>
+            </a:r>
+          </a:p>
+          <a:p>
+            <a:pPr algn="l">
+              <a:spcAft>
+                <a:spcPts val="600"/>
+              </a:spcAft>
+            </a:pPr>
+            <a:r>
+              <a:rPr sz="1500" b="0">
+                <a:solidFill>
+                  <a:srgbClr val="F4E8C8"/>
+                </a:solidFill>
+                <a:latin typeface="Microsoft YaHei"/>
+                <a:ea typeface="Microsoft YaHei"/>
+              </a:rPr>
+              <a:t>出貨　npm run build → 將 dist 推去 gh-pages → https://yip-lgtm.github.io/family/</a:t>
+            </a:r>
+          </a:p>
+          <a:p>
+            <a:pPr algn="l">
+              <a:spcAft>
+                <a:spcPts val="600"/>
+              </a:spcAft>
+            </a:pPr>
+            <a:r>
+              <a:rPr sz="1400" b="0">
+                <a:solidFill>
                   <a:srgbClr val="B8A888"/>
                 </a:solidFill>
                 <a:latin typeface="Microsoft YaHei"/>
                 <a:ea typeface="Microsoft YaHei"/>
               </a:rPr>
-              <a:t>賜福或者天劫。
-然後停手，睇後果。</a:t>
+              <a:t>約束　唔下載嗶哩音源 · 唔抄《教父》對白 · Key 只存瀏覽器 · 演示畫永遠兜底</a:t>
             </a:r>
           </a:p>
         </p:txBody>

--- a/docs/教父世家-3分鐘簡報.pptx
+++ b/docs/教父世家-3分鐘簡報.pptx
@@ -522,7 +522,7 @@
           </a:p>
           <a:p>
             <a:r>
-              <a:t>而家就可以玩：yip-lgtm.github.io/family。今日三分鐘：做咩、畫面點樣永遠有人、點做出嚟。</a:t>
+              <a:t>而家就可以玩：右下角掃「玩」QR，或者 yip-lgtm.github.io/family。今日三分鐘：做咩、畫面點樣永遠有人、點做出嚟。</a:t>
             </a:r>
           </a:p>
         </p:txBody>
@@ -677,7 +677,7 @@
           </a:p>
           <a:p>
             <a:r>
-              <a:t>人死功法在。家在，戲就未完。github.io/family。多謝。</a:t>
+              <a:t>人死功法在。家在，戲就未完。掃中間最大個「玩」QR，或者 yip-lgtm.github.io/family。兩邊係源碼同鏡像。多謝。</a:t>
             </a:r>
           </a:p>
         </p:txBody>
@@ -4726,6 +4726,155 @@
           </a:p>
         </p:txBody>
       </p:sp>
+      <p:sp>
+        <p:nvSpPr>
+          <p:cNvPr id="11" name="Rounded Rectangle 10"/>
+          <p:cNvSpPr/>
+          <p:nvPr/>
+        </p:nvSpPr>
+        <p:spPr>
+          <a:xfrm>
+            <a:off x="10570464" y="4718304"/>
+            <a:ext cx="1188720" cy="1188720"/>
+          </a:xfrm>
+          <a:prstGeom prst="roundRect">
+            <a:avLst/>
+          </a:prstGeom>
+          <a:solidFill>
+            <a:srgbClr val="F4E8C8"/>
+          </a:solidFill>
+          <a:ln w="19050">
+            <a:solidFill>
+              <a:srgbClr val="D4AF37"/>
+            </a:solidFill>
+          </a:ln>
+        </p:spPr>
+        <p:style>
+          <a:lnRef idx="1">
+            <a:schemeClr val="accent1"/>
+          </a:lnRef>
+          <a:fillRef idx="3">
+            <a:schemeClr val="accent1"/>
+          </a:fillRef>
+          <a:effectRef idx="2">
+            <a:schemeClr val="accent1"/>
+          </a:effectRef>
+          <a:fontRef idx="minor">
+            <a:schemeClr val="lt1"/>
+          </a:fontRef>
+        </p:style>
+        <p:txBody>
+          <a:bodyPr rtlCol="0" anchor="ctr"/>
+          <a:lstStyle/>
+          <a:p>
+            <a:pPr algn="ctr"/>
+          </a:p>
+        </p:txBody>
+      </p:sp>
+      <p:pic>
+        <p:nvPicPr>
+          <p:cNvPr id="12" name="Picture 11" descr="play.png"/>
+          <p:cNvPicPr>
+            <a:picLocks noChangeAspect="1"/>
+          </p:cNvPicPr>
+          <p:nvPr/>
+        </p:nvPicPr>
+        <p:blipFill>
+          <a:blip r:embed="rId2"/>
+          <a:stretch>
+            <a:fillRect/>
+          </a:stretch>
+        </p:blipFill>
+        <p:spPr>
+          <a:xfrm>
+            <a:off x="10625328" y="4773168"/>
+            <a:ext cx="1078992" cy="1078992"/>
+          </a:xfrm>
+          <a:prstGeom prst="rect">
+            <a:avLst/>
+          </a:prstGeom>
+        </p:spPr>
+      </p:pic>
+      <p:sp>
+        <p:nvSpPr>
+          <p:cNvPr id="13" name="TextBox 12"/>
+          <p:cNvSpPr txBox="1"/>
+          <p:nvPr/>
+        </p:nvSpPr>
+        <p:spPr>
+          <a:xfrm>
+            <a:off x="10424160" y="5916168"/>
+            <a:ext cx="1481328" cy="274320"/>
+          </a:xfrm>
+          <a:prstGeom prst="rect">
+            <a:avLst/>
+          </a:prstGeom>
+          <a:noFill/>
+        </p:spPr>
+        <p:txBody>
+          <a:bodyPr wrap="square">
+            <a:spAutoFit/>
+          </a:bodyPr>
+          <a:lstStyle/>
+          <a:p>
+            <a:pPr algn="ctr">
+              <a:spcAft>
+                <a:spcPts val="600"/>
+              </a:spcAft>
+            </a:pPr>
+            <a:r>
+              <a:rPr sz="1500" b="1">
+                <a:solidFill>
+                  <a:srgbClr val="D4AF37"/>
+                </a:solidFill>
+                <a:latin typeface="Microsoft YaHei"/>
+                <a:ea typeface="Microsoft YaHei"/>
+              </a:rPr>
+              <a:t>玩</a:t>
+            </a:r>
+          </a:p>
+        </p:txBody>
+      </p:sp>
+      <p:sp>
+        <p:nvSpPr>
+          <p:cNvPr id="14" name="TextBox 13"/>
+          <p:cNvSpPr txBox="1"/>
+          <p:nvPr/>
+        </p:nvSpPr>
+        <p:spPr>
+          <a:xfrm>
+            <a:off x="10332720" y="6153912"/>
+            <a:ext cx="1664208" cy="256032"/>
+          </a:xfrm>
+          <a:prstGeom prst="rect">
+            <a:avLst/>
+          </a:prstGeom>
+          <a:noFill/>
+        </p:spPr>
+        <p:txBody>
+          <a:bodyPr wrap="square">
+            <a:spAutoFit/>
+          </a:bodyPr>
+          <a:lstStyle/>
+          <a:p>
+            <a:pPr algn="ctr">
+              <a:spcAft>
+                <a:spcPts val="600"/>
+              </a:spcAft>
+            </a:pPr>
+            <a:r>
+              <a:rPr sz="1100" b="0">
+                <a:solidFill>
+                  <a:srgbClr val="B8A888"/>
+                </a:solidFill>
+                <a:latin typeface="Microsoft YaHei"/>
+                <a:ea typeface="Microsoft YaHei"/>
+              </a:rPr>
+              <a:t>掃碼即玩</a:t>
+            </a:r>
+          </a:p>
+        </p:txBody>
+      </p:sp>
     </p:spTree>
   </p:cSld>
   <p:clrMapOvr>
@@ -5758,8 +5907,8 @@
         </p:nvSpPr>
         <p:spPr>
           <a:xfrm>
-            <a:off x="5696712" y="658368"/>
-            <a:ext cx="749808" cy="749808"/>
+            <a:off x="5696712" y="347472"/>
+            <a:ext cx="640080" cy="640080"/>
           </a:xfrm>
           <a:prstGeom prst="diamond">
             <a:avLst/>
@@ -5803,8 +5952,8 @@
         </p:nvSpPr>
         <p:spPr>
           <a:xfrm>
-            <a:off x="5696712" y="868314"/>
-            <a:ext cx="749808" cy="359907"/>
+            <a:off x="5696712" y="526694"/>
+            <a:ext cx="640080" cy="307238"/>
           </a:xfrm>
           <a:prstGeom prst="rect">
             <a:avLst/>
@@ -5843,8 +5992,8 @@
         </p:nvSpPr>
         <p:spPr>
           <a:xfrm>
-            <a:off x="731520" y="1481328"/>
-            <a:ext cx="10698480" cy="365760"/>
+            <a:off x="731520" y="1024128"/>
+            <a:ext cx="10698480" cy="292608"/>
           </a:xfrm>
           <a:prstGeom prst="rect">
             <a:avLst/>
@@ -5883,8 +6032,8 @@
         </p:nvSpPr>
         <p:spPr>
           <a:xfrm>
-            <a:off x="731520" y="1901952"/>
-            <a:ext cx="10698480" cy="1143000"/>
+            <a:off x="502920" y="1298448"/>
+            <a:ext cx="11155680" cy="658368"/>
           </a:xfrm>
           <a:prstGeom prst="rect">
             <a:avLst/>
@@ -5903,7 +6052,7 @@
               </a:spcAft>
             </a:pPr>
             <a:r>
-              <a:rPr sz="3200" b="1">
+              <a:rPr sz="2800" b="1">
                 <a:solidFill>
                   <a:srgbClr val="D4AF37"/>
                 </a:solidFill>
@@ -5917,14 +6066,83 @@
       </p:sp>
       <p:sp>
         <p:nvSpPr>
-          <p:cNvPr id="8" name="TextBox 7"/>
+          <p:cNvPr id="8" name="Rounded Rectangle 7"/>
+          <p:cNvSpPr/>
+          <p:nvPr/>
+        </p:nvSpPr>
+        <p:spPr>
+          <a:xfrm>
+            <a:off x="1243584" y="2295144"/>
+            <a:ext cx="1554480" cy="1554480"/>
+          </a:xfrm>
+          <a:prstGeom prst="roundRect">
+            <a:avLst/>
+          </a:prstGeom>
+          <a:solidFill>
+            <a:srgbClr val="F4E8C8"/>
+          </a:solidFill>
+          <a:ln w="19050">
+            <a:solidFill>
+              <a:srgbClr val="D4AF37"/>
+            </a:solidFill>
+          </a:ln>
+        </p:spPr>
+        <p:style>
+          <a:lnRef idx="1">
+            <a:schemeClr val="accent1"/>
+          </a:lnRef>
+          <a:fillRef idx="3">
+            <a:schemeClr val="accent1"/>
+          </a:fillRef>
+          <a:effectRef idx="2">
+            <a:schemeClr val="accent1"/>
+          </a:effectRef>
+          <a:fontRef idx="minor">
+            <a:schemeClr val="lt1"/>
+          </a:fontRef>
+        </p:style>
+        <p:txBody>
+          <a:bodyPr rtlCol="0" anchor="ctr"/>
+          <a:lstStyle/>
+          <a:p>
+            <a:pPr algn="ctr"/>
+          </a:p>
+        </p:txBody>
+      </p:sp>
+      <p:pic>
+        <p:nvPicPr>
+          <p:cNvPr id="9" name="Picture 8" descr="source.png"/>
+          <p:cNvPicPr>
+            <a:picLocks noChangeAspect="1"/>
+          </p:cNvPicPr>
+          <p:nvPr/>
+        </p:nvPicPr>
+        <p:blipFill>
+          <a:blip r:embed="rId2"/>
+          <a:stretch>
+            <a:fillRect/>
+          </a:stretch>
+        </p:blipFill>
+        <p:spPr>
+          <a:xfrm>
+            <a:off x="1298448" y="2350008"/>
+            <a:ext cx="1444752" cy="1444752"/>
+          </a:xfrm>
+          <a:prstGeom prst="rect">
+            <a:avLst/>
+          </a:prstGeom>
+        </p:spPr>
+      </p:pic>
+      <p:sp>
+        <p:nvSpPr>
+          <p:cNvPr id="10" name="TextBox 9"/>
           <p:cNvSpPr txBox="1"/>
           <p:nvPr/>
         </p:nvSpPr>
         <p:spPr>
           <a:xfrm>
-            <a:off x="731520" y="3154680"/>
-            <a:ext cx="10698480" cy="1554480"/>
+            <a:off x="795528" y="3858768"/>
+            <a:ext cx="2450592" cy="274320"/>
           </a:xfrm>
           <a:prstGeom prst="rect">
             <a:avLst/>
@@ -5943,16 +6161,39 @@
               </a:spcAft>
             </a:pPr>
             <a:r>
-              <a:rPr sz="2000" b="1">
-                <a:solidFill>
-                  <a:srgbClr val="7EC8C3"/>
-                </a:solidFill>
-                <a:latin typeface="Microsoft YaHei"/>
-                <a:ea typeface="Microsoft YaHei"/>
-              </a:rPr>
-              <a:t>玩　　https://yip-lgtm.github.io/family/</a:t>
-            </a:r>
-          </a:p>
+              <a:rPr sz="1500" b="1">
+                <a:solidFill>
+                  <a:srgbClr val="D4AF37"/>
+                </a:solidFill>
+                <a:latin typeface="Microsoft YaHei"/>
+                <a:ea typeface="Microsoft YaHei"/>
+              </a:rPr>
+              <a:t>源碼</a:t>
+            </a:r>
+          </a:p>
+        </p:txBody>
+      </p:sp>
+      <p:sp>
+        <p:nvSpPr>
+          <p:cNvPr id="11" name="TextBox 10"/>
+          <p:cNvSpPr txBox="1"/>
+          <p:nvPr/>
+        </p:nvSpPr>
+        <p:spPr>
+          <a:xfrm>
+            <a:off x="704088" y="4096512"/>
+            <a:ext cx="2633472" cy="256032"/>
+          </a:xfrm>
+          <a:prstGeom prst="rect">
+            <a:avLst/>
+          </a:prstGeom>
+          <a:noFill/>
+        </p:spPr>
+        <p:txBody>
+          <a:bodyPr wrap="square">
+            <a:spAutoFit/>
+          </a:bodyPr>
+          <a:lstStyle/>
           <a:p>
             <a:pPr algn="ctr">
               <a:spcAft>
@@ -5960,16 +6201,108 @@
               </a:spcAft>
             </a:pPr>
             <a:r>
-              <a:rPr sz="1800" b="0">
+              <a:rPr sz="1100" b="0">
                 <a:solidFill>
                   <a:srgbClr val="B8A888"/>
                 </a:solidFill>
                 <a:latin typeface="Microsoft YaHei"/>
                 <a:ea typeface="Microsoft YaHei"/>
               </a:rPr>
-              <a:t>源碼　https://github.com/yip-lgtm/family.git</a:t>
-            </a:r>
-          </a:p>
+              <a:t>github.com/yip-lgtm/family</a:t>
+            </a:r>
+          </a:p>
+        </p:txBody>
+      </p:sp>
+      <p:sp>
+        <p:nvSpPr>
+          <p:cNvPr id="12" name="Rounded Rectangle 11"/>
+          <p:cNvSpPr/>
+          <p:nvPr/>
+        </p:nvSpPr>
+        <p:spPr>
+          <a:xfrm>
+            <a:off x="4997196" y="1975104"/>
+            <a:ext cx="2194559" cy="2194559"/>
+          </a:xfrm>
+          <a:prstGeom prst="roundRect">
+            <a:avLst/>
+          </a:prstGeom>
+          <a:solidFill>
+            <a:srgbClr val="F4E8C8"/>
+          </a:solidFill>
+          <a:ln w="28575">
+            <a:solidFill>
+              <a:srgbClr val="D4AF37"/>
+            </a:solidFill>
+          </a:ln>
+        </p:spPr>
+        <p:style>
+          <a:lnRef idx="1">
+            <a:schemeClr val="accent1"/>
+          </a:lnRef>
+          <a:fillRef idx="3">
+            <a:schemeClr val="accent1"/>
+          </a:fillRef>
+          <a:effectRef idx="2">
+            <a:schemeClr val="accent1"/>
+          </a:effectRef>
+          <a:fontRef idx="minor">
+            <a:schemeClr val="lt1"/>
+          </a:fontRef>
+        </p:style>
+        <p:txBody>
+          <a:bodyPr rtlCol="0" anchor="ctr"/>
+          <a:lstStyle/>
+          <a:p>
+            <a:pPr algn="ctr"/>
+          </a:p>
+        </p:txBody>
+      </p:sp>
+      <p:pic>
+        <p:nvPicPr>
+          <p:cNvPr id="13" name="Picture 12" descr="play.png"/>
+          <p:cNvPicPr>
+            <a:picLocks noChangeAspect="1"/>
+          </p:cNvPicPr>
+          <p:nvPr/>
+        </p:nvPicPr>
+        <p:blipFill>
+          <a:blip r:embed="rId3"/>
+          <a:stretch>
+            <a:fillRect/>
+          </a:stretch>
+        </p:blipFill>
+        <p:spPr>
+          <a:xfrm>
+            <a:off x="5052060" y="2029968"/>
+            <a:ext cx="2084831" cy="2084831"/>
+          </a:xfrm>
+          <a:prstGeom prst="rect">
+            <a:avLst/>
+          </a:prstGeom>
+        </p:spPr>
+      </p:pic>
+      <p:sp>
+        <p:nvSpPr>
+          <p:cNvPr id="14" name="TextBox 13"/>
+          <p:cNvSpPr txBox="1"/>
+          <p:nvPr/>
+        </p:nvSpPr>
+        <p:spPr>
+          <a:xfrm>
+            <a:off x="4549140" y="4178807"/>
+            <a:ext cx="3090671" cy="274320"/>
+          </a:xfrm>
+          <a:prstGeom prst="rect">
+            <a:avLst/>
+          </a:prstGeom>
+          <a:noFill/>
+        </p:spPr>
+        <p:txBody>
+          <a:bodyPr wrap="square">
+            <a:spAutoFit/>
+          </a:bodyPr>
+          <a:lstStyle/>
           <a:p>
             <a:pPr algn="ctr">
               <a:spcAft>
@@ -5977,28 +6310,217 @@
               </a:spcAft>
             </a:pPr>
             <a:r>
-              <a:rPr sz="1600" b="0">
+              <a:rPr sz="1500" b="1">
+                <a:solidFill>
+                  <a:srgbClr val="D4AF37"/>
+                </a:solidFill>
+                <a:latin typeface="Microsoft YaHei"/>
+                <a:ea typeface="Microsoft YaHei"/>
+              </a:rPr>
+              <a:t>玩</a:t>
+            </a:r>
+          </a:p>
+        </p:txBody>
+      </p:sp>
+      <p:sp>
+        <p:nvSpPr>
+          <p:cNvPr id="15" name="TextBox 14"/>
+          <p:cNvSpPr txBox="1"/>
+          <p:nvPr/>
+        </p:nvSpPr>
+        <p:spPr>
+          <a:xfrm>
+            <a:off x="4457700" y="4416551"/>
+            <a:ext cx="3273551" cy="256032"/>
+          </a:xfrm>
+          <a:prstGeom prst="rect">
+            <a:avLst/>
+          </a:prstGeom>
+          <a:noFill/>
+        </p:spPr>
+        <p:txBody>
+          <a:bodyPr wrap="square">
+            <a:spAutoFit/>
+          </a:bodyPr>
+          <a:lstStyle/>
+          <a:p>
+            <a:pPr algn="ctr">
+              <a:spcAft>
+                <a:spcPts val="600"/>
+              </a:spcAft>
+            </a:pPr>
+            <a:r>
+              <a:rPr sz="1100" b="0">
                 <a:solidFill>
                   <a:srgbClr val="B8A888"/>
                 </a:solidFill>
                 <a:latin typeface="Microsoft YaHei"/>
                 <a:ea typeface="Microsoft YaHei"/>
               </a:rPr>
-              <a:t>鏡像　https://github.com/yip-lgtm/qi-lineage</a:t>
-            </a:r>
-          </a:p>
-        </p:txBody>
-      </p:sp>
-      <p:sp>
-        <p:nvSpPr>
-          <p:cNvPr id="9" name="TextBox 8"/>
+              <a:t>yip-lgtm.github.io/family</a:t>
+            </a:r>
+          </a:p>
+        </p:txBody>
+      </p:sp>
+      <p:sp>
+        <p:nvSpPr>
+          <p:cNvPr id="16" name="Rounded Rectangle 15"/>
+          <p:cNvSpPr/>
+          <p:nvPr/>
+        </p:nvSpPr>
+        <p:spPr>
+          <a:xfrm>
+            <a:off x="9381744" y="2295144"/>
+            <a:ext cx="1554480" cy="1554480"/>
+          </a:xfrm>
+          <a:prstGeom prst="roundRect">
+            <a:avLst/>
+          </a:prstGeom>
+          <a:solidFill>
+            <a:srgbClr val="F4E8C8"/>
+          </a:solidFill>
+          <a:ln w="19050">
+            <a:solidFill>
+              <a:srgbClr val="D4AF37"/>
+            </a:solidFill>
+          </a:ln>
+        </p:spPr>
+        <p:style>
+          <a:lnRef idx="1">
+            <a:schemeClr val="accent1"/>
+          </a:lnRef>
+          <a:fillRef idx="3">
+            <a:schemeClr val="accent1"/>
+          </a:fillRef>
+          <a:effectRef idx="2">
+            <a:schemeClr val="accent1"/>
+          </a:effectRef>
+          <a:fontRef idx="minor">
+            <a:schemeClr val="lt1"/>
+          </a:fontRef>
+        </p:style>
+        <p:txBody>
+          <a:bodyPr rtlCol="0" anchor="ctr"/>
+          <a:lstStyle/>
+          <a:p>
+            <a:pPr algn="ctr"/>
+          </a:p>
+        </p:txBody>
+      </p:sp>
+      <p:pic>
+        <p:nvPicPr>
+          <p:cNvPr id="17" name="Picture 16" descr="mirror.png"/>
+          <p:cNvPicPr>
+            <a:picLocks noChangeAspect="1"/>
+          </p:cNvPicPr>
+          <p:nvPr/>
+        </p:nvPicPr>
+        <p:blipFill>
+          <a:blip r:embed="rId4"/>
+          <a:stretch>
+            <a:fillRect/>
+          </a:stretch>
+        </p:blipFill>
+        <p:spPr>
+          <a:xfrm>
+            <a:off x="9436608" y="2350008"/>
+            <a:ext cx="1444752" cy="1444752"/>
+          </a:xfrm>
+          <a:prstGeom prst="rect">
+            <a:avLst/>
+          </a:prstGeom>
+        </p:spPr>
+      </p:pic>
+      <p:sp>
+        <p:nvSpPr>
+          <p:cNvPr id="18" name="TextBox 17"/>
           <p:cNvSpPr txBox="1"/>
           <p:nvPr/>
         </p:nvSpPr>
         <p:spPr>
           <a:xfrm>
-            <a:off x="731520" y="4937760"/>
-            <a:ext cx="10698480" cy="914400"/>
+            <a:off x="8933688" y="3858768"/>
+            <a:ext cx="2450592" cy="274320"/>
+          </a:xfrm>
+          <a:prstGeom prst="rect">
+            <a:avLst/>
+          </a:prstGeom>
+          <a:noFill/>
+        </p:spPr>
+        <p:txBody>
+          <a:bodyPr wrap="square">
+            <a:spAutoFit/>
+          </a:bodyPr>
+          <a:lstStyle/>
+          <a:p>
+            <a:pPr algn="ctr">
+              <a:spcAft>
+                <a:spcPts val="600"/>
+              </a:spcAft>
+            </a:pPr>
+            <a:r>
+              <a:rPr sz="1500" b="1">
+                <a:solidFill>
+                  <a:srgbClr val="D4AF37"/>
+                </a:solidFill>
+                <a:latin typeface="Microsoft YaHei"/>
+                <a:ea typeface="Microsoft YaHei"/>
+              </a:rPr>
+              <a:t>鏡像</a:t>
+            </a:r>
+          </a:p>
+        </p:txBody>
+      </p:sp>
+      <p:sp>
+        <p:nvSpPr>
+          <p:cNvPr id="19" name="TextBox 18"/>
+          <p:cNvSpPr txBox="1"/>
+          <p:nvPr/>
+        </p:nvSpPr>
+        <p:spPr>
+          <a:xfrm>
+            <a:off x="8842248" y="4096512"/>
+            <a:ext cx="2633472" cy="256032"/>
+          </a:xfrm>
+          <a:prstGeom prst="rect">
+            <a:avLst/>
+          </a:prstGeom>
+          <a:noFill/>
+        </p:spPr>
+        <p:txBody>
+          <a:bodyPr wrap="square">
+            <a:spAutoFit/>
+          </a:bodyPr>
+          <a:lstStyle/>
+          <a:p>
+            <a:pPr algn="ctr">
+              <a:spcAft>
+                <a:spcPts val="600"/>
+              </a:spcAft>
+            </a:pPr>
+            <a:r>
+              <a:rPr sz="1100" b="0">
+                <a:solidFill>
+                  <a:srgbClr val="B8A888"/>
+                </a:solidFill>
+                <a:latin typeface="Microsoft YaHei"/>
+                <a:ea typeface="Microsoft YaHei"/>
+              </a:rPr>
+              <a:t>github.com/yip-lgtm/qi-lineage</a:t>
+            </a:r>
+          </a:p>
+        </p:txBody>
+      </p:sp>
+      <p:sp>
+        <p:nvSpPr>
+          <p:cNvPr id="20" name="TextBox 19"/>
+          <p:cNvSpPr txBox="1"/>
+          <p:nvPr/>
+        </p:nvSpPr>
+        <p:spPr>
+          <a:xfrm>
+            <a:off x="731520" y="5138928"/>
+            <a:ext cx="10698480" cy="1051560"/>
           </a:xfrm>
           <a:prstGeom prst="rect">
             <a:avLst/>
